--- a/slides/Day2_Widgets_and_Layout.pptx
+++ b/slides/Day2_Widgets_and_Layout.pptx
@@ -1,6 +1,6 @@
 
 <file path=ppt/presentation.xml><?xml version="1.0" encoding="utf-8"?>
-<p:presentation xmlns:a="http://schemas.openxmlformats.org/drawingml/2006/main" xmlns:r="http://schemas.openxmlformats.org/officeDocument/2006/relationships" xmlns:p="http://schemas.openxmlformats.org/presentationml/2006/main" saveSubsetFonts="1" autoCompressPictures="0">
+<p:presentation xmlns:a="http://schemas.openxmlformats.org/drawingml/2006/main" xmlns:p="http://schemas.openxmlformats.org/presentationml/2006/main" xmlns:r="http://schemas.openxmlformats.org/officeDocument/2006/relationships" saveSubsetFonts="1" autoCompressPictures="0">
   <p:sldMasterIdLst>
     <p:sldMasterId id="2147483648" r:id="rId1"/>
   </p:sldMasterIdLst>
@@ -40,7 +40,6 @@
     <p:sldId id="288" r:id="rId34"/>
     <p:sldId id="289" r:id="rId35"/>
     <p:sldId id="290" r:id="rId36"/>
-    <p:sldId id="291" r:id="rId37"/>
     <p:sldId id="292" r:id="rId38"/>
     <p:sldId id="293" r:id="rId39"/>
     <p:sldId id="294" r:id="rId40"/>
@@ -503,4483 +502,6 @@
     </a:lvl9pPr>
   </p:notesStyle>
 </p:notesMaster>
-</file>
-
-<file path=ppt/notesSlides/notesSlide1.xml><?xml version="1.0" encoding="utf-8"?>
-<p:notes xmlns:a="http://schemas.openxmlformats.org/drawingml/2006/main" xmlns:r="http://schemas.openxmlformats.org/officeDocument/2006/relationships" xmlns:p="http://schemas.openxmlformats.org/presentationml/2006/main">
-  <p:cSld>
-    <p:spTree>
-      <p:nvGrpSpPr>
-        <p:cNvPr id="1" name=""/>
-        <p:cNvGrpSpPr/>
-        <p:nvPr/>
-      </p:nvGrpSpPr>
-      <p:grpSpPr>
-        <a:xfrm>
-          <a:off x="0" y="0"/>
-          <a:ext cx="0" cy="0"/>
-          <a:chOff x="0" y="0"/>
-          <a:chExt cx="0" cy="0"/>
-        </a:xfrm>
-      </p:grpSpPr>
-      <p:sp>
-        <p:nvSpPr>
-          <p:cNvPr id="2" name="Slide Image Placeholder 1"/>
-          <p:cNvSpPr>
-            <a:spLocks noGrp="1" noRot="1" noChangeAspect="1"/>
-          </p:cNvSpPr>
-          <p:nvPr>
-            <p:ph type="sldImg"/>
-          </p:nvPr>
-        </p:nvSpPr>
-        <p:spPr/>
-      </p:sp>
-      <p:sp>
-        <p:nvSpPr>
-          <p:cNvPr id="3" name="Notes Placeholder 2"/>
-          <p:cNvSpPr>
-            <a:spLocks noGrp="1"/>
-          </p:cNvSpPr>
-          <p:nvPr>
-            <p:ph type="body" idx="1"/>
-          </p:nvPr>
-        </p:nvSpPr>
-        <p:spPr/>
-        <p:txBody>
-          <a:bodyPr/>
-          <a:lstStyle/>
-          <a:p>
-            <a:r>
-              <a:rPr lang="en-US" dirty="0"/>
-              <a:t>SCRIPT: Yesterday you learned the language and ran an app. Today is the survey's biggest UI gap: building interfaces confidently. Sixty percent of today is you typing.
-OPENER (before this slide is even discussed): the constraints homework. Three delegates at the whiteboard, one question each. Do not open a laptop until that is done. Slide 3 is the debrief.
-PRESENTER CHECKLIST: emulator running; quote_app open at lab-2-start; DevTools open on a second display with Layout Explorer tab visible; Windows column ready on each command slide.</a:t>
-            </a:r>
-            <a:endParaRPr lang="en-US" dirty="0"/>
-          </a:p>
-        </p:txBody>
-      </p:sp>
-      <p:sp>
-        <p:nvSpPr>
-          <p:cNvPr id="4" name="Slide Number Placeholder 3"/>
-          <p:cNvSpPr>
-            <a:spLocks noGrp="1"/>
-          </p:cNvSpPr>
-          <p:nvPr>
-            <p:ph type="sldNum" sz="quarter" idx="10"/>
-          </p:nvPr>
-        </p:nvSpPr>
-        <p:spPr/>
-        <p:txBody>
-          <a:bodyPr/>
-          <a:lstStyle/>
-          <a:p>
-            <a:fld id="{F7021451-1387-4CA6-816F-3879F97B5CBC}" type="slidenum">
-              <a:rPr lang="en-US"/>
-              <a:t>1</a:t>
-            </a:fld>
-            <a:endParaRPr lang="en-US"/>
-          </a:p>
-        </p:txBody>
-      </p:sp>
-    </p:spTree>
-    <p:extLst>
-      <p:ext uri="{BB962C8B-B14F-4D97-AF65-F5344CB8AC3E}">
-        <p14:creationId xmlns:p14="http://schemas.microsoft.com/office/powerpoint/2010/main" val="1024086991"/>
-      </p:ext>
-    </p:extLst>
-  </p:cSld>
-  <p:clrMapOvr>
-    <a:masterClrMapping/>
-  </p:clrMapOvr>
-</p:notes>
-</file>
-
-<file path=ppt/notesSlides/notesSlide10.xml><?xml version="1.0" encoding="utf-8"?>
-<p:notes xmlns:a="http://schemas.openxmlformats.org/drawingml/2006/main" xmlns:r="http://schemas.openxmlformats.org/officeDocument/2006/relationships" xmlns:p="http://schemas.openxmlformats.org/presentationml/2006/main">
-  <p:cSld>
-    <p:spTree>
-      <p:nvGrpSpPr>
-        <p:cNvPr id="1" name=""/>
-        <p:cNvGrpSpPr/>
-        <p:nvPr/>
-      </p:nvGrpSpPr>
-      <p:grpSpPr>
-        <a:xfrm>
-          <a:off x="0" y="0"/>
-          <a:ext cx="0" cy="0"/>
-          <a:chOff x="0" y="0"/>
-          <a:chExt cx="0" cy="0"/>
-        </a:xfrm>
-      </p:grpSpPr>
-      <p:sp>
-        <p:nvSpPr>
-          <p:cNvPr id="2" name="Slide Image Placeholder 1"/>
-          <p:cNvSpPr>
-            <a:spLocks noGrp="1" noRot="1" noChangeAspect="1"/>
-          </p:cNvSpPr>
-          <p:nvPr>
-            <p:ph type="sldImg"/>
-          </p:nvPr>
-        </p:nvSpPr>
-        <p:spPr/>
-      </p:sp>
-      <p:sp>
-        <p:nvSpPr>
-          <p:cNvPr id="3" name="Notes Placeholder 2"/>
-          <p:cNvSpPr>
-            <a:spLocks noGrp="1"/>
-          </p:cNvSpPr>
-          <p:nvPr>
-            <p:ph type="body" idx="1"/>
-          </p:nvPr>
-        </p:nvSpPr>
-        <p:spPr/>
-        <p:txBody>
-          <a:bodyPr/>
-          <a:lstStyle/>
-          <a:p>
-            <a:r>
-              <a:rPr lang="en-US" dirty="0"/>
-              <a:t>SCRIPT: Flexbox people: Row = flex-direction row; mainAxisAlignment = justify-content; crossAxisAlignment = align-items; Expanded = flex: 1. The difference is that a Row's children with no Expanded get unbounded width - which is why long Text overflows unless wrapped in Expanded.
-DEMO: build this Row live; remove Expanded from the Text and show the overflow stripes; put it back.
-CrossAxisAlignment.stretch on a Column makes buttons full width - the pattern for every form in this course.</a:t>
-            </a:r>
-            <a:endParaRPr lang="en-US" dirty="0"/>
-          </a:p>
-        </p:txBody>
-      </p:sp>
-      <p:sp>
-        <p:nvSpPr>
-          <p:cNvPr id="4" name="Slide Number Placeholder 3"/>
-          <p:cNvSpPr>
-            <a:spLocks noGrp="1"/>
-          </p:cNvSpPr>
-          <p:nvPr>
-            <p:ph type="sldNum" sz="quarter" idx="10"/>
-          </p:nvPr>
-        </p:nvSpPr>
-        <p:spPr/>
-        <p:txBody>
-          <a:bodyPr/>
-          <a:lstStyle/>
-          <a:p>
-            <a:fld id="{F7021451-1387-4CA6-816F-3879F97B5CBC}" type="slidenum">
-              <a:rPr lang="en-US"/>
-              <a:t>10</a:t>
-            </a:fld>
-            <a:endParaRPr lang="en-US"/>
-          </a:p>
-        </p:txBody>
-      </p:sp>
-    </p:spTree>
-    <p:extLst>
-      <p:ext uri="{BB962C8B-B14F-4D97-AF65-F5344CB8AC3E}">
-        <p14:creationId xmlns:p14="http://schemas.microsoft.com/office/powerpoint/2010/main" val="1024086991"/>
-      </p:ext>
-    </p:extLst>
-  </p:cSld>
-  <p:clrMapOvr>
-    <a:masterClrMapping/>
-  </p:clrMapOvr>
-</p:notes>
-</file>
-
-<file path=ppt/notesSlides/notesSlide11.xml><?xml version="1.0" encoding="utf-8"?>
-<p:notes xmlns:a="http://schemas.openxmlformats.org/drawingml/2006/main" xmlns:r="http://schemas.openxmlformats.org/officeDocument/2006/relationships" xmlns:p="http://schemas.openxmlformats.org/presentationml/2006/main">
-  <p:cSld>
-    <p:spTree>
-      <p:nvGrpSpPr>
-        <p:cNvPr id="1" name=""/>
-        <p:cNvGrpSpPr/>
-        <p:nvPr/>
-      </p:nvGrpSpPr>
-      <p:grpSpPr>
-        <a:xfrm>
-          <a:off x="0" y="0"/>
-          <a:ext cx="0" cy="0"/>
-          <a:chOff x="0" y="0"/>
-          <a:chExt cx="0" cy="0"/>
-        </a:xfrm>
-      </p:grpSpPr>
-      <p:sp>
-        <p:nvSpPr>
-          <p:cNvPr id="2" name="Slide Image Placeholder 1"/>
-          <p:cNvSpPr>
-            <a:spLocks noGrp="1" noRot="1" noChangeAspect="1"/>
-          </p:cNvSpPr>
-          <p:nvPr>
-            <p:ph type="sldImg"/>
-          </p:nvPr>
-        </p:nvSpPr>
-        <p:spPr/>
-      </p:sp>
-      <p:sp>
-        <p:nvSpPr>
-          <p:cNvPr id="3" name="Notes Placeholder 2"/>
-          <p:cNvSpPr>
-            <a:spLocks noGrp="1"/>
-          </p:cNvSpPr>
-          <p:nvPr>
-            <p:ph type="body" idx="1"/>
-          </p:nvPr>
-        </p:nvSpPr>
-        <p:spPr/>
-        <p:txBody>
-          <a:bodyPr/>
-          <a:lstStyle/>
-          <a:p>
-            <a:r>
-              <a:rPr lang="en-US" dirty="0"/>
-              <a:t>SCRIPT: Break each one live, then fix it. In order:
-1. RenderFlex overflowed - Row/Column child bigger than the flex. Fix: Expanded (bounded width) or SingleChildScrollView (make the axis scrollable).
-2. Vertical viewport unbounded height - ListView inside Column. The Column offers infinite height; ListView needs a bound. Fix: Expanded; or shrinkWrap for tiny lists (it is O(n) layout; do not use for long lists).
-3. ParentDataWidget - Expanded outside a Flex. Fix: move it.
-4. Infinite width - TextField in a Row. TextField wants to fill width; Row gives infinity. Fix: Expanded.
-LAYOUT EXPLORER: open DevTools → Flutter Inspector → Layout Explorer → select the Row. Show the flex factors and the overflow visually. This is the moment to teach the tool.
-PRESENTER: you rehearsed all four on Saturday. Keep the broken versions as separate files so the demo is a file switch, not live typing.</a:t>
-            </a:r>
-            <a:endParaRPr lang="en-US" dirty="0"/>
-          </a:p>
-        </p:txBody>
-      </p:sp>
-      <p:sp>
-        <p:nvSpPr>
-          <p:cNvPr id="4" name="Slide Number Placeholder 3"/>
-          <p:cNvSpPr>
-            <a:spLocks noGrp="1"/>
-          </p:cNvSpPr>
-          <p:nvPr>
-            <p:ph type="sldNum" sz="quarter" idx="10"/>
-          </p:nvPr>
-        </p:nvSpPr>
-        <p:spPr/>
-        <p:txBody>
-          <a:bodyPr/>
-          <a:lstStyle/>
-          <a:p>
-            <a:fld id="{F7021451-1387-4CA6-816F-3879F97B5CBC}" type="slidenum">
-              <a:rPr lang="en-US"/>
-              <a:t>11</a:t>
-            </a:fld>
-            <a:endParaRPr lang="en-US"/>
-          </a:p>
-        </p:txBody>
-      </p:sp>
-    </p:spTree>
-    <p:extLst>
-      <p:ext uri="{BB962C8B-B14F-4D97-AF65-F5344CB8AC3E}">
-        <p14:creationId xmlns:p14="http://schemas.microsoft.com/office/powerpoint/2010/main" val="1024086991"/>
-      </p:ext>
-    </p:extLst>
-  </p:cSld>
-  <p:clrMapOvr>
-    <a:masterClrMapping/>
-  </p:clrMapOvr>
-</p:notes>
-</file>
-
-<file path=ppt/notesSlides/notesSlide12.xml><?xml version="1.0" encoding="utf-8"?>
-<p:notes xmlns:a="http://schemas.openxmlformats.org/drawingml/2006/main" xmlns:r="http://schemas.openxmlformats.org/officeDocument/2006/relationships" xmlns:p="http://schemas.openxmlformats.org/presentationml/2006/main">
-  <p:cSld>
-    <p:spTree>
-      <p:nvGrpSpPr>
-        <p:cNvPr id="1" name=""/>
-        <p:cNvGrpSpPr/>
-        <p:nvPr/>
-      </p:nvGrpSpPr>
-      <p:grpSpPr>
-        <a:xfrm>
-          <a:off x="0" y="0"/>
-          <a:ext cx="0" cy="0"/>
-          <a:chOff x="0" y="0"/>
-          <a:chExt cx="0" cy="0"/>
-        </a:xfrm>
-      </p:grpSpPr>
-      <p:sp>
-        <p:nvSpPr>
-          <p:cNvPr id="2" name="Slide Image Placeholder 1"/>
-          <p:cNvSpPr>
-            <a:spLocks noGrp="1" noRot="1" noChangeAspect="1"/>
-          </p:cNvSpPr>
-          <p:nvPr>
-            <p:ph type="sldImg"/>
-          </p:nvPr>
-        </p:nvSpPr>
-        <p:spPr/>
-      </p:sp>
-      <p:sp>
-        <p:nvSpPr>
-          <p:cNvPr id="3" name="Notes Placeholder 2"/>
-          <p:cNvSpPr>
-            <a:spLocks noGrp="1"/>
-          </p:cNvSpPr>
-          <p:nvPr>
-            <p:ph type="body" idx="1"/>
-          </p:nvPr>
-        </p:nvSpPr>
-        <p:spPr/>
-        <p:txBody>
-          <a:bodyPr/>
-          <a:lstStyle/>
-          <a:p>
-            <a:r>
-              <a:rPr lang="en-US" dirty="0"/>
-              <a:t>SCRIPT: The brand header in Lab 2.1 uses this: a coloured card, a title positioned top-left, a chip hanging off the bottom edge with a negative bottom (needs clipBehavior: Clip.none), and a watermark icon via Positioned.fill + Align.
-GOTCHA: a Stack with only Positioned children has no size - give it a SizedBox or use StackFit.expand.
-CSS mapping: Stack = position: relative container; Positioned = position: absolute.</a:t>
-            </a:r>
-            <a:endParaRPr lang="en-US" dirty="0"/>
-          </a:p>
-        </p:txBody>
-      </p:sp>
-      <p:sp>
-        <p:nvSpPr>
-          <p:cNvPr id="4" name="Slide Number Placeholder 3"/>
-          <p:cNvSpPr>
-            <a:spLocks noGrp="1"/>
-          </p:cNvSpPr>
-          <p:nvPr>
-            <p:ph type="sldNum" sz="quarter" idx="10"/>
-          </p:nvPr>
-        </p:nvSpPr>
-        <p:spPr/>
-        <p:txBody>
-          <a:bodyPr/>
-          <a:lstStyle/>
-          <a:p>
-            <a:fld id="{F7021451-1387-4CA6-816F-3879F97B5CBC}" type="slidenum">
-              <a:rPr lang="en-US"/>
-              <a:t>12</a:t>
-            </a:fld>
-            <a:endParaRPr lang="en-US"/>
-          </a:p>
-        </p:txBody>
-      </p:sp>
-    </p:spTree>
-    <p:extLst>
-      <p:ext uri="{BB962C8B-B14F-4D97-AF65-F5344CB8AC3E}">
-        <p14:creationId xmlns:p14="http://schemas.microsoft.com/office/powerpoint/2010/main" val="1024086991"/>
-      </p:ext>
-    </p:extLst>
-  </p:cSld>
-  <p:clrMapOvr>
-    <a:masterClrMapping/>
-  </p:clrMapOvr>
-</p:notes>
-</file>
-
-<file path=ppt/notesSlides/notesSlide13.xml><?xml version="1.0" encoding="utf-8"?>
-<p:notes xmlns:a="http://schemas.openxmlformats.org/drawingml/2006/main" xmlns:r="http://schemas.openxmlformats.org/officeDocument/2006/relationships" xmlns:p="http://schemas.openxmlformats.org/presentationml/2006/main">
-  <p:cSld>
-    <p:spTree>
-      <p:nvGrpSpPr>
-        <p:cNvPr id="1" name=""/>
-        <p:cNvGrpSpPr/>
-        <p:nvPr/>
-      </p:nvGrpSpPr>
-      <p:grpSpPr>
-        <a:xfrm>
-          <a:off x="0" y="0"/>
-          <a:ext cx="0" cy="0"/>
-          <a:chOff x="0" y="0"/>
-          <a:chExt cx="0" cy="0"/>
-        </a:xfrm>
-      </p:grpSpPr>
-      <p:sp>
-        <p:nvSpPr>
-          <p:cNvPr id="2" name="Slide Image Placeholder 1"/>
-          <p:cNvSpPr>
-            <a:spLocks noGrp="1" noRot="1" noChangeAspect="1"/>
-          </p:cNvSpPr>
-          <p:nvPr>
-            <p:ph type="sldImg"/>
-          </p:nvPr>
-        </p:nvSpPr>
-        <p:spPr/>
-      </p:sp>
-      <p:sp>
-        <p:nvSpPr>
-          <p:cNvPr id="3" name="Notes Placeholder 2"/>
-          <p:cNvSpPr>
-            <a:spLocks noGrp="1"/>
-          </p:cNvSpPr>
-          <p:nvPr>
-            <p:ph type="body" idx="1"/>
-          </p:nvPr>
-        </p:nvSpPr>
-        <p:spPr/>
-        <p:txBody>
-          <a:bodyPr/>
-          <a:lstStyle/>
-          <a:p>
-            <a:r>
-              <a:rPr lang="en-US" dirty="0"/>
-              <a:t>SCRIPT: MediaQuery gives the screen; LayoutBuilder gives your slot. Inside a Row or a dialog, the screen size is the wrong number - use LayoutBuilder. The capture screen goes two-column at 700 px, which you can demo by rotating the emulator (Ctrl+Left/Right on Windows, Cmd+Left/Right on Mac in the emulator toolbar).
-TEXT SCALING: on Day 5 accessibility we test at 200%; anything with a fixed height around text breaks. Say it now.
-sizeOf vs of: MediaQuery.of(context) rebuilds on any MediaQuery change (keyboard, padding); sizeOf only on size. Flutter 3.10+.</a:t>
-            </a:r>
-            <a:endParaRPr lang="en-US" dirty="0"/>
-          </a:p>
-        </p:txBody>
-      </p:sp>
-      <p:sp>
-        <p:nvSpPr>
-          <p:cNvPr id="4" name="Slide Number Placeholder 3"/>
-          <p:cNvSpPr>
-            <a:spLocks noGrp="1"/>
-          </p:cNvSpPr>
-          <p:nvPr>
-            <p:ph type="sldNum" sz="quarter" idx="10"/>
-          </p:nvPr>
-        </p:nvSpPr>
-        <p:spPr/>
-        <p:txBody>
-          <a:bodyPr/>
-          <a:lstStyle/>
-          <a:p>
-            <a:fld id="{F7021451-1387-4CA6-816F-3879F97B5CBC}" type="slidenum">
-              <a:rPr lang="en-US"/>
-              <a:t>13</a:t>
-            </a:fld>
-            <a:endParaRPr lang="en-US"/>
-          </a:p>
-        </p:txBody>
-      </p:sp>
-    </p:spTree>
-    <p:extLst>
-      <p:ext uri="{BB962C8B-B14F-4D97-AF65-F5344CB8AC3E}">
-        <p14:creationId xmlns:p14="http://schemas.microsoft.com/office/powerpoint/2010/main" val="1024086991"/>
-      </p:ext>
-    </p:extLst>
-  </p:cSld>
-  <p:clrMapOvr>
-    <a:masterClrMapping/>
-  </p:clrMapOvr>
-</p:notes>
-</file>
-
-<file path=ppt/notesSlides/notesSlide14.xml><?xml version="1.0" encoding="utf-8"?>
-<p:notes xmlns:a="http://schemas.openxmlformats.org/drawingml/2006/main" xmlns:r="http://schemas.openxmlformats.org/officeDocument/2006/relationships" xmlns:p="http://schemas.openxmlformats.org/presentationml/2006/main">
-  <p:cSld>
-    <p:spTree>
-      <p:nvGrpSpPr>
-        <p:cNvPr id="1" name=""/>
-        <p:cNvGrpSpPr/>
-        <p:nvPr/>
-      </p:nvGrpSpPr>
-      <p:grpSpPr>
-        <a:xfrm>
-          <a:off x="0" y="0"/>
-          <a:ext cx="0" cy="0"/>
-          <a:chOff x="0" y="0"/>
-          <a:chExt cx="0" cy="0"/>
-        </a:xfrm>
-      </p:grpSpPr>
-      <p:sp>
-        <p:nvSpPr>
-          <p:cNvPr id="2" name="Slide Image Placeholder 1"/>
-          <p:cNvSpPr>
-            <a:spLocks noGrp="1" noRot="1" noChangeAspect="1"/>
-          </p:cNvSpPr>
-          <p:nvPr>
-            <p:ph type="sldImg"/>
-          </p:nvPr>
-        </p:nvSpPr>
-        <p:spPr/>
-      </p:sp>
-      <p:sp>
-        <p:nvSpPr>
-          <p:cNvPr id="3" name="Notes Placeholder 2"/>
-          <p:cNvSpPr>
-            <a:spLocks noGrp="1"/>
-          </p:cNvSpPr>
-          <p:nvPr>
-            <p:ph type="body" idx="1"/>
-          </p:nvPr>
-        </p:nvSpPr>
-        <p:spPr/>
-        <p:txBody>
-          <a:bodyPr/>
-          <a:lstStyle/>
-          <a:p>
-            <a:r>
-              <a:rPr lang="en-US" dirty="0"/>
-              <a:t>WHY: the catalogue is large and people default to Container for everything. A ten-minute scan with a "find one you did not know" rule builds vocabulary faster than a slide per widget.
-EXPECTED: Wrap flows children onto new lines (chips, tags); Row never wraps. Align takes any alignment; Center is Align(center). SizedBox forces a size; ConstrainedBox adds min/max. Q4: GridView.builder with SliverGridDelegateWithMaxCrossAxisExtent (reflowing grid); Scaffold.bottomNavigationBar / persistentFooterButtons or a Column with Expanded body + fixed footer (pinned total).
-NO-REPEAT RULE keeps the last people engaged; with 20 delegates cap the round at 12 answers.</a:t>
-            </a:r>
-            <a:endParaRPr lang="en-US" dirty="0"/>
-          </a:p>
-        </p:txBody>
-      </p:sp>
-      <p:sp>
-        <p:nvSpPr>
-          <p:cNvPr id="4" name="Slide Number Placeholder 3"/>
-          <p:cNvSpPr>
-            <a:spLocks noGrp="1"/>
-          </p:cNvSpPr>
-          <p:nvPr>
-            <p:ph type="sldNum" sz="quarter" idx="10"/>
-          </p:nvPr>
-        </p:nvSpPr>
-        <p:spPr/>
-        <p:txBody>
-          <a:bodyPr/>
-          <a:lstStyle/>
-          <a:p>
-            <a:fld id="{F7021451-1387-4CA6-816F-3879F97B5CBC}" type="slidenum">
-              <a:rPr lang="en-US"/>
-              <a:t>14</a:t>
-            </a:fld>
-            <a:endParaRPr lang="en-US"/>
-          </a:p>
-        </p:txBody>
-      </p:sp>
-    </p:spTree>
-    <p:extLst>
-      <p:ext uri="{BB962C8B-B14F-4D97-AF65-F5344CB8AC3E}">
-        <p14:creationId xmlns:p14="http://schemas.microsoft.com/office/powerpoint/2010/main" val="1024086991"/>
-      </p:ext>
-    </p:extLst>
-  </p:cSld>
-  <p:clrMapOvr>
-    <a:masterClrMapping/>
-  </p:clrMapOvr>
-</p:notes>
-</file>
-
-<file path=ppt/notesSlides/notesSlide15.xml><?xml version="1.0" encoding="utf-8"?>
-<p:notes xmlns:a="http://schemas.openxmlformats.org/drawingml/2006/main" xmlns:r="http://schemas.openxmlformats.org/officeDocument/2006/relationships" xmlns:p="http://schemas.openxmlformats.org/presentationml/2006/main">
-  <p:cSld>
-    <p:spTree>
-      <p:nvGrpSpPr>
-        <p:cNvPr id="1" name=""/>
-        <p:cNvGrpSpPr/>
-        <p:nvPr/>
-      </p:nvGrpSpPr>
-      <p:grpSpPr>
-        <a:xfrm>
-          <a:off x="0" y="0"/>
-          <a:ext cx="0" cy="0"/>
-          <a:chOff x="0" y="0"/>
-          <a:chExt cx="0" cy="0"/>
-        </a:xfrm>
-      </p:grpSpPr>
-      <p:sp>
-        <p:nvSpPr>
-          <p:cNvPr id="2" name="Slide Image Placeholder 1"/>
-          <p:cNvSpPr>
-            <a:spLocks noGrp="1" noRot="1" noChangeAspect="1"/>
-          </p:cNvSpPr>
-          <p:nvPr>
-            <p:ph type="sldImg"/>
-          </p:nvPr>
-        </p:nvSpPr>
-        <p:spPr/>
-      </p:sp>
-      <p:sp>
-        <p:nvSpPr>
-          <p:cNvPr id="3" name="Notes Placeholder 2"/>
-          <p:cNvSpPr>
-            <a:spLocks noGrp="1"/>
-          </p:cNvSpPr>
-          <p:nvPr>
-            <p:ph type="body" idx="1"/>
-          </p:nvPr>
-        </p:nvSpPr>
-        <p:spPr/>
-        <p:txBody>
-          <a:bodyPr/>
-          <a:lstStyle/>
-          <a:p>
-            <a:r>
-              <a:rPr lang="en-US" dirty="0"/>
-              <a:t>RUN THE LAB: 35 minutes. Circulate with one question: "who gave that widget its constraints?" - do not fix layouts for people; ask that question until they fix it.
-CHECKPOINTS: 10 min header shows; 20 min LayoutBuilder switching; 30 min the ListView error triggered and fixed.
-COMMON ERRORS: Stack with only Positioned children has zero size → give the Container a height. Chip clipped → clipBehavior: Clip.none on the Stack. Landscape emulator does not rotate → enable auto-rotate in the emulator's quick settings, or use Ctrl/Cmd+Left.
-EMULATOR ROTATE: toolbar buttons on the right of the emulator window, or Ctrl+Left / Ctrl+Right (Windows), Cmd+Left / Cmd+Right (Mac).
-SOLUTION: Appendix B, branch lab-2-1-solution.</a:t>
-            </a:r>
-            <a:endParaRPr lang="en-US" dirty="0"/>
-          </a:p>
-        </p:txBody>
-      </p:sp>
-      <p:sp>
-        <p:nvSpPr>
-          <p:cNvPr id="4" name="Slide Number Placeholder 3"/>
-          <p:cNvSpPr>
-            <a:spLocks noGrp="1"/>
-          </p:cNvSpPr>
-          <p:nvPr>
-            <p:ph type="sldNum" sz="quarter" idx="10"/>
-          </p:nvPr>
-        </p:nvSpPr>
-        <p:spPr/>
-        <p:txBody>
-          <a:bodyPr/>
-          <a:lstStyle/>
-          <a:p>
-            <a:fld id="{F7021451-1387-4CA6-816F-3879F97B5CBC}" type="slidenum">
-              <a:rPr lang="en-US"/>
-              <a:t>15</a:t>
-            </a:fld>
-            <a:endParaRPr lang="en-US"/>
-          </a:p>
-        </p:txBody>
-      </p:sp>
-    </p:spTree>
-    <p:extLst>
-      <p:ext uri="{BB962C8B-B14F-4D97-AF65-F5344CB8AC3E}">
-        <p14:creationId xmlns:p14="http://schemas.microsoft.com/office/powerpoint/2010/main" val="1024086991"/>
-      </p:ext>
-    </p:extLst>
-  </p:cSld>
-  <p:clrMapOvr>
-    <a:masterClrMapping/>
-  </p:clrMapOvr>
-</p:notes>
-</file>
-
-<file path=ppt/notesSlides/notesSlide16.xml><?xml version="1.0" encoding="utf-8"?>
-<p:notes xmlns:a="http://schemas.openxmlformats.org/drawingml/2006/main" xmlns:r="http://schemas.openxmlformats.org/officeDocument/2006/relationships" xmlns:p="http://schemas.openxmlformats.org/presentationml/2006/main">
-  <p:cSld>
-    <p:spTree>
-      <p:nvGrpSpPr>
-        <p:cNvPr id="1" name=""/>
-        <p:cNvGrpSpPr/>
-        <p:nvPr/>
-      </p:nvGrpSpPr>
-      <p:grpSpPr>
-        <a:xfrm>
-          <a:off x="0" y="0"/>
-          <a:ext cx="0" cy="0"/>
-          <a:chOff x="0" y="0"/>
-          <a:chExt cx="0" cy="0"/>
-        </a:xfrm>
-      </p:grpSpPr>
-      <p:sp>
-        <p:nvSpPr>
-          <p:cNvPr id="2" name="Slide Image Placeholder 1"/>
-          <p:cNvSpPr>
-            <a:spLocks noGrp="1" noRot="1" noChangeAspect="1"/>
-          </p:cNvSpPr>
-          <p:nvPr>
-            <p:ph type="sldImg"/>
-          </p:nvPr>
-        </p:nvSpPr>
-        <p:spPr/>
-      </p:sp>
-      <p:sp>
-        <p:nvSpPr>
-          <p:cNvPr id="3" name="Notes Placeholder 2"/>
-          <p:cNvSpPr>
-            <a:spLocks noGrp="1"/>
-          </p:cNvSpPr>
-          <p:nvPr>
-            <p:ph type="body" idx="1"/>
-          </p:nvPr>
-        </p:nvSpPr>
-        <p:spPr/>
-        <p:txBody>
-          <a:bodyPr/>
-          <a:lstStyle/>
-          <a:p>
-            <a:r>
-              <a:rPr lang="en-US" dirty="0"/>
-              <a:t>SCRIPT: Lists first (20 min), then forms (the rest). The form we build is the real capture form; tomorrow it gets a Riverpod notifier, Thursday it hits an API.</a:t>
-            </a:r>
-            <a:endParaRPr lang="en-US" dirty="0"/>
-          </a:p>
-        </p:txBody>
-      </p:sp>
-      <p:sp>
-        <p:nvSpPr>
-          <p:cNvPr id="4" name="Slide Number Placeholder 3"/>
-          <p:cNvSpPr>
-            <a:spLocks noGrp="1"/>
-          </p:cNvSpPr>
-          <p:nvPr>
-            <p:ph type="sldNum" sz="quarter" idx="10"/>
-          </p:nvPr>
-        </p:nvSpPr>
-        <p:spPr/>
-        <p:txBody>
-          <a:bodyPr/>
-          <a:lstStyle/>
-          <a:p>
-            <a:fld id="{F7021451-1387-4CA6-816F-3879F97B5CBC}" type="slidenum">
-              <a:rPr lang="en-US"/>
-              <a:t>16</a:t>
-            </a:fld>
-            <a:endParaRPr lang="en-US"/>
-          </a:p>
-        </p:txBody>
-      </p:sp>
-    </p:spTree>
-    <p:extLst>
-      <p:ext uri="{BB962C8B-B14F-4D97-AF65-F5344CB8AC3E}">
-        <p14:creationId xmlns:p14="http://schemas.microsoft.com/office/powerpoint/2010/main" val="1024086991"/>
-      </p:ext>
-    </p:extLst>
-  </p:cSld>
-  <p:clrMapOvr>
-    <a:masterClrMapping/>
-  </p:clrMapOvr>
-</p:notes>
-</file>
-
-<file path=ppt/notesSlides/notesSlide17.xml><?xml version="1.0" encoding="utf-8"?>
-<p:notes xmlns:a="http://schemas.openxmlformats.org/drawingml/2006/main" xmlns:r="http://schemas.openxmlformats.org/officeDocument/2006/relationships" xmlns:p="http://schemas.openxmlformats.org/presentationml/2006/main">
-  <p:cSld>
-    <p:spTree>
-      <p:nvGrpSpPr>
-        <p:cNvPr id="1" name=""/>
-        <p:cNvGrpSpPr/>
-        <p:nvPr/>
-      </p:nvGrpSpPr>
-      <p:grpSpPr>
-        <a:xfrm>
-          <a:off x="0" y="0"/>
-          <a:ext cx="0" cy="0"/>
-          <a:chOff x="0" y="0"/>
-          <a:chExt cx="0" cy="0"/>
-        </a:xfrm>
-      </p:grpSpPr>
-      <p:sp>
-        <p:nvSpPr>
-          <p:cNvPr id="2" name="Slide Image Placeholder 1"/>
-          <p:cNvSpPr>
-            <a:spLocks noGrp="1" noRot="1" noChangeAspect="1"/>
-          </p:cNvSpPr>
-          <p:nvPr>
-            <p:ph type="sldImg"/>
-          </p:nvPr>
-        </p:nvSpPr>
-        <p:spPr/>
-      </p:sp>
-      <p:sp>
-        <p:nvSpPr>
-          <p:cNvPr id="3" name="Notes Placeholder 2"/>
-          <p:cNvSpPr>
-            <a:spLocks noGrp="1"/>
-          </p:cNvSpPr>
-          <p:nvPr>
-            <p:ph type="body" idx="1"/>
-          </p:nvPr>
-        </p:nvSpPr>
-        <p:spPr/>
-        <p:txBody>
-          <a:bodyPr/>
-          <a:lstStyle/>
-          <a:p>
-            <a:r>
-              <a:rPr lang="en-US" dirty="0"/>
-              <a:t>SCRIPT: FlatList / RecyclerView / virtual scrolling - same idea. builder creates rows on demand.
-DISMISSIBLE GOTCHA: "A dismissed Dismissible widget is still part of the tree" - that assertion fires when you did not remove the item from the list in onDismissed. The key must identify the item (ValueKey(q.id)), never the index.
-separated: gives you a separatorBuilder - cleaner than adding SizedBox inside each item.
-This widget appears again on Day 4 wired to SQLite.</a:t>
-            </a:r>
-            <a:endParaRPr lang="en-US" dirty="0"/>
-          </a:p>
-        </p:txBody>
-      </p:sp>
-      <p:sp>
-        <p:nvSpPr>
-          <p:cNvPr id="4" name="Slide Number Placeholder 3"/>
-          <p:cNvSpPr>
-            <a:spLocks noGrp="1"/>
-          </p:cNvSpPr>
-          <p:nvPr>
-            <p:ph type="sldNum" sz="quarter" idx="10"/>
-          </p:nvPr>
-        </p:nvSpPr>
-        <p:spPr/>
-        <p:txBody>
-          <a:bodyPr/>
-          <a:lstStyle/>
-          <a:p>
-            <a:fld id="{F7021451-1387-4CA6-816F-3879F97B5CBC}" type="slidenum">
-              <a:rPr lang="en-US"/>
-              <a:t>17</a:t>
-            </a:fld>
-            <a:endParaRPr lang="en-US"/>
-          </a:p>
-        </p:txBody>
-      </p:sp>
-    </p:spTree>
-    <p:extLst>
-      <p:ext uri="{BB962C8B-B14F-4D97-AF65-F5344CB8AC3E}">
-        <p14:creationId xmlns:p14="http://schemas.microsoft.com/office/powerpoint/2010/main" val="1024086991"/>
-      </p:ext>
-    </p:extLst>
-  </p:cSld>
-  <p:clrMapOvr>
-    <a:masterClrMapping/>
-  </p:clrMapOvr>
-</p:notes>
-</file>
-
-<file path=ppt/notesSlides/notesSlide18.xml><?xml version="1.0" encoding="utf-8"?>
-<p:notes xmlns:a="http://schemas.openxmlformats.org/drawingml/2006/main" xmlns:r="http://schemas.openxmlformats.org/officeDocument/2006/relationships" xmlns:p="http://schemas.openxmlformats.org/presentationml/2006/main">
-  <p:cSld>
-    <p:spTree>
-      <p:nvGrpSpPr>
-        <p:cNvPr id="1" name=""/>
-        <p:cNvGrpSpPr/>
-        <p:nvPr/>
-      </p:nvGrpSpPr>
-      <p:grpSpPr>
-        <a:xfrm>
-          <a:off x="0" y="0"/>
-          <a:ext cx="0" cy="0"/>
-          <a:chOff x="0" y="0"/>
-          <a:chExt cx="0" cy="0"/>
-        </a:xfrm>
-      </p:grpSpPr>
-      <p:sp>
-        <p:nvSpPr>
-          <p:cNvPr id="2" name="Slide Image Placeholder 1"/>
-          <p:cNvSpPr>
-            <a:spLocks noGrp="1" noRot="1" noChangeAspect="1"/>
-          </p:cNvSpPr>
-          <p:nvPr>
-            <p:ph type="sldImg"/>
-          </p:nvPr>
-        </p:nvSpPr>
-        <p:spPr/>
-      </p:sp>
-      <p:sp>
-        <p:nvSpPr>
-          <p:cNvPr id="3" name="Notes Placeholder 2"/>
-          <p:cNvSpPr>
-            <a:spLocks noGrp="1"/>
-          </p:cNvSpPr>
-          <p:nvPr>
-            <p:ph type="body" idx="1"/>
-          </p:nvPr>
-        </p:nvSpPr>
-        <p:spPr/>
-        <p:txBody>
-          <a:bodyPr/>
-          <a:lstStyle/>
-          <a:p>
-            <a:r>
-              <a:rPr lang="en-US" dirty="0"/>
-              <a:t>SCRIPT: The grid is the "cover options" answer from the reading slide. MaxCrossAxisExtent means "as many 220-px columns as fit" - phone gets 1-2, tablet 3-4, no breakpoint code.
-RefreshIndicator and ScrollController are on the next code; show them briefly in the appendix snippet (Appendix C) if asked.
-Slivers: mention that SliverAppBar gives the collapsing header effect; it is a Day-5 stretch, not core.</a:t>
-            </a:r>
-            <a:endParaRPr lang="en-US" dirty="0"/>
-          </a:p>
-        </p:txBody>
-      </p:sp>
-      <p:sp>
-        <p:nvSpPr>
-          <p:cNvPr id="4" name="Slide Number Placeholder 3"/>
-          <p:cNvSpPr>
-            <a:spLocks noGrp="1"/>
-          </p:cNvSpPr>
-          <p:nvPr>
-            <p:ph type="sldNum" sz="quarter" idx="10"/>
-          </p:nvPr>
-        </p:nvSpPr>
-        <p:spPr/>
-        <p:txBody>
-          <a:bodyPr/>
-          <a:lstStyle/>
-          <a:p>
-            <a:fld id="{F7021451-1387-4CA6-816F-3879F97B5CBC}" type="slidenum">
-              <a:rPr lang="en-US"/>
-              <a:t>18</a:t>
-            </a:fld>
-            <a:endParaRPr lang="en-US"/>
-          </a:p>
-        </p:txBody>
-      </p:sp>
-    </p:spTree>
-    <p:extLst>
-      <p:ext uri="{BB962C8B-B14F-4D97-AF65-F5344CB8AC3E}">
-        <p14:creationId xmlns:p14="http://schemas.microsoft.com/office/powerpoint/2010/main" val="1024086991"/>
-      </p:ext>
-    </p:extLst>
-  </p:cSld>
-  <p:clrMapOvr>
-    <a:masterClrMapping/>
-  </p:clrMapOvr>
-</p:notes>
-</file>
-
-<file path=ppt/notesSlides/notesSlide19.xml><?xml version="1.0" encoding="utf-8"?>
-<p:notes xmlns:a="http://schemas.openxmlformats.org/drawingml/2006/main" xmlns:r="http://schemas.openxmlformats.org/officeDocument/2006/relationships" xmlns:p="http://schemas.openxmlformats.org/presentationml/2006/main">
-  <p:cSld>
-    <p:spTree>
-      <p:nvGrpSpPr>
-        <p:cNvPr id="1" name=""/>
-        <p:cNvGrpSpPr/>
-        <p:nvPr/>
-      </p:nvGrpSpPr>
-      <p:grpSpPr>
-        <a:xfrm>
-          <a:off x="0" y="0"/>
-          <a:ext cx="0" cy="0"/>
-          <a:chOff x="0" y="0"/>
-          <a:chExt cx="0" cy="0"/>
-        </a:xfrm>
-      </p:grpSpPr>
-      <p:sp>
-        <p:nvSpPr>
-          <p:cNvPr id="2" name="Slide Image Placeholder 1"/>
-          <p:cNvSpPr>
-            <a:spLocks noGrp="1" noRot="1" noChangeAspect="1"/>
-          </p:cNvSpPr>
-          <p:nvPr>
-            <p:ph type="sldImg"/>
-          </p:nvPr>
-        </p:nvSpPr>
-        <p:spPr/>
-      </p:sp>
-      <p:sp>
-        <p:nvSpPr>
-          <p:cNvPr id="3" name="Notes Placeholder 2"/>
-          <p:cNvSpPr>
-            <a:spLocks noGrp="1"/>
-          </p:cNvSpPr>
-          <p:nvPr>
-            <p:ph type="body" idx="1"/>
-          </p:nvPr>
-        </p:nvSpPr>
-        <p:spPr/>
-        <p:txBody>
-          <a:bodyPr/>
-          <a:lstStyle/>
-          <a:p>
-            <a:r>
-              <a:rPr lang="en-US" dirty="0"/>
-              <a:t>SCRIPT: React Hook Form / Angular Reactive Forms people: Form + GlobalKey is the form group; validators are per-field functions; controllers are the value accessors.
-DISPOSE: every TextEditingController and FocusNode must be disposed, or the debug build asserts and the app leaks. Put dispose() in before build() so nobody forgets.
-CALLBACK UP: onSubmit(QuoteRequest) keeps the form ignorant of what happens next - tomorrow the callback calls a Riverpod notifier.
-The ! on currentState: justified - the key is attached to the Form in this same build.</a:t>
-            </a:r>
-            <a:endParaRPr lang="en-US" dirty="0"/>
-          </a:p>
-        </p:txBody>
-      </p:sp>
-      <p:sp>
-        <p:nvSpPr>
-          <p:cNvPr id="4" name="Slide Number Placeholder 3"/>
-          <p:cNvSpPr>
-            <a:spLocks noGrp="1"/>
-          </p:cNvSpPr>
-          <p:nvPr>
-            <p:ph type="sldNum" sz="quarter" idx="10"/>
-          </p:nvPr>
-        </p:nvSpPr>
-        <p:spPr/>
-        <p:txBody>
-          <a:bodyPr/>
-          <a:lstStyle/>
-          <a:p>
-            <a:fld id="{F7021451-1387-4CA6-816F-3879F97B5CBC}" type="slidenum">
-              <a:rPr lang="en-US"/>
-              <a:t>19</a:t>
-            </a:fld>
-            <a:endParaRPr lang="en-US"/>
-          </a:p>
-        </p:txBody>
-      </p:sp>
-    </p:spTree>
-    <p:extLst>
-      <p:ext uri="{BB962C8B-B14F-4D97-AF65-F5344CB8AC3E}">
-        <p14:creationId xmlns:p14="http://schemas.microsoft.com/office/powerpoint/2010/main" val="1024086991"/>
-      </p:ext>
-    </p:extLst>
-  </p:cSld>
-  <p:clrMapOvr>
-    <a:masterClrMapping/>
-  </p:clrMapOvr>
-</p:notes>
-</file>
-
-<file path=ppt/notesSlides/notesSlide2.xml><?xml version="1.0" encoding="utf-8"?>
-<p:notes xmlns:a="http://schemas.openxmlformats.org/drawingml/2006/main" xmlns:r="http://schemas.openxmlformats.org/officeDocument/2006/relationships" xmlns:p="http://schemas.openxmlformats.org/presentationml/2006/main">
-  <p:cSld>
-    <p:spTree>
-      <p:nvGrpSpPr>
-        <p:cNvPr id="1" name=""/>
-        <p:cNvGrpSpPr/>
-        <p:nvPr/>
-      </p:nvGrpSpPr>
-      <p:grpSpPr>
-        <a:xfrm>
-          <a:off x="0" y="0"/>
-          <a:ext cx="0" cy="0"/>
-          <a:chOff x="0" y="0"/>
-          <a:chExt cx="0" cy="0"/>
-        </a:xfrm>
-      </p:grpSpPr>
-      <p:sp>
-        <p:nvSpPr>
-          <p:cNvPr id="2" name="Slide Image Placeholder 1"/>
-          <p:cNvSpPr>
-            <a:spLocks noGrp="1" noRot="1" noChangeAspect="1"/>
-          </p:cNvSpPr>
-          <p:nvPr>
-            <p:ph type="sldImg"/>
-          </p:nvPr>
-        </p:nvSpPr>
-        <p:spPr/>
-      </p:sp>
-      <p:sp>
-        <p:nvSpPr>
-          <p:cNvPr id="3" name="Notes Placeholder 2"/>
-          <p:cNvSpPr>
-            <a:spLocks noGrp="1"/>
-          </p:cNvSpPr>
-          <p:nvPr>
-            <p:ph type="body" idx="1"/>
-          </p:nvPr>
-        </p:nvSpPr>
-        <p:spPr/>
-        <p:txBody>
-          <a:bodyPr/>
-          <a:lstStyle/>
-          <a:p>
-            <a:r>
-              <a:rPr lang="en-US" dirty="0"/>
-              <a:t>SCRIPT: Four blocks, three labs, and each lab builds the same screen: the quote capture screen. By 16:00 the app has a real form, validation and two brand themes you can toggle live.
-TIMING: block 2 is the one to protect. If block 1 runs long, cut the buttons table (slide 9) - it is reference material. PRE-FLIGHT 08:45: every lab today needs a working build, unlike Day 1 where 1.2 and 1.3 were DartPad. Confirm one machine still builds before you start. If the sdkmanager NDK crash is back, pin ndkVersion in android/app/build.gradle.kts to an NDK version that is actually installed, then flutter clean. Fallback for any machine that will not build: flutter run -d chrome, which works for every lab today. ALSO: Lab 2.3 step 3 is a partial snippet, delegates merge it into their existing capture_screen.dart. Say that from the front.</a:t>
-            </a:r>
-            <a:endParaRPr lang="en-US" dirty="0"/>
-          </a:p>
-        </p:txBody>
-      </p:sp>
-      <p:sp>
-        <p:nvSpPr>
-          <p:cNvPr id="4" name="Slide Number Placeholder 3"/>
-          <p:cNvSpPr>
-            <a:spLocks noGrp="1"/>
-          </p:cNvSpPr>
-          <p:nvPr>
-            <p:ph type="sldNum" sz="quarter" idx="10"/>
-          </p:nvPr>
-        </p:nvSpPr>
-        <p:spPr/>
-        <p:txBody>
-          <a:bodyPr/>
-          <a:lstStyle/>
-          <a:p>
-            <a:fld id="{F7021451-1387-4CA6-816F-3879F97B5CBC}" type="slidenum">
-              <a:rPr lang="en-US"/>
-              <a:t>2</a:t>
-            </a:fld>
-            <a:endParaRPr lang="en-US"/>
-          </a:p>
-        </p:txBody>
-      </p:sp>
-    </p:spTree>
-    <p:extLst>
-      <p:ext uri="{BB962C8B-B14F-4D97-AF65-F5344CB8AC3E}">
-        <p14:creationId xmlns:p14="http://schemas.microsoft.com/office/powerpoint/2010/main" val="1024086991"/>
-      </p:ext>
-    </p:extLst>
-  </p:cSld>
-  <p:clrMapOvr>
-    <a:masterClrMapping/>
-  </p:clrMapOvr>
-</p:notes>
-</file>
-
-<file path=ppt/notesSlides/notesSlide20.xml><?xml version="1.0" encoding="utf-8"?>
-<p:notes xmlns:a="http://schemas.openxmlformats.org/drawingml/2006/main" xmlns:r="http://schemas.openxmlformats.org/officeDocument/2006/relationships" xmlns:p="http://schemas.openxmlformats.org/presentationml/2006/main">
-  <p:cSld>
-    <p:spTree>
-      <p:nvGrpSpPr>
-        <p:cNvPr id="1" name=""/>
-        <p:cNvGrpSpPr/>
-        <p:nvPr/>
-      </p:nvGrpSpPr>
-      <p:grpSpPr>
-        <a:xfrm>
-          <a:off x="0" y="0"/>
-          <a:ext cx="0" cy="0"/>
-          <a:chOff x="0" y="0"/>
-          <a:chExt cx="0" cy="0"/>
-        </a:xfrm>
-      </p:grpSpPr>
-      <p:sp>
-        <p:nvSpPr>
-          <p:cNvPr id="2" name="Slide Image Placeholder 1"/>
-          <p:cNvSpPr>
-            <a:spLocks noGrp="1" noRot="1" noChangeAspect="1"/>
-          </p:cNvSpPr>
-          <p:nvPr>
-            <p:ph type="sldImg"/>
-          </p:nvPr>
-        </p:nvSpPr>
-        <p:spPr/>
-      </p:sp>
-      <p:sp>
-        <p:nvSpPr>
-          <p:cNvPr id="3" name="Notes Placeholder 2"/>
-          <p:cNvSpPr>
-            <a:spLocks noGrp="1"/>
-          </p:cNvSpPr>
-          <p:nvPr>
-            <p:ph type="body" idx="1"/>
-          </p:nvPr>
-        </p:nvSpPr>
-        <p:spPr/>
-        <p:txBody>
-          <a:bodyPr/>
-          <a:lstStyle/>
-          <a:p>
-            <a:r>
-              <a:rPr lang="en-US" dirty="0"/>
-              <a:t>SCRIPT: Walk each field. (1) Make: trim, required, textInputAction next moves focus. (2) Year: numeric keyboard, digitsOnly + length 4 formatters, tryParse in the validator, range check with string interpolation. (3) Cover: DropdownButtonFormField with initialValue and onChanged. (4) Licence date: custom FormField on the next slide. (5) Submit: FilledButton.icon.
-SDK COMPATIBILITY: DropdownButtonFormField's 'value' parameter was deprecated in favour of 'initialValue' (Flutter 3.33+). If a delegate's older SDK says "The named parameter 'initialValue' isn't defined", tell them to use value: instead, or upgrade with flutter upgrade. If a newer SDK warns 'value' is deprecated, that is the same change in reverse.
-IMPORT: FilteringTextInputFormatter lives in package:flutter/services.dart - "Undefined name" means the import is missing.
-Validation order: validators run top to bottom; the first error focuses nothing by default - mention that on Day 5 accessibility we scroll to the first error.</a:t>
-            </a:r>
-            <a:endParaRPr lang="en-US" dirty="0"/>
-          </a:p>
-        </p:txBody>
-      </p:sp>
-      <p:sp>
-        <p:nvSpPr>
-          <p:cNvPr id="4" name="Slide Number Placeholder 3"/>
-          <p:cNvSpPr>
-            <a:spLocks noGrp="1"/>
-          </p:cNvSpPr>
-          <p:nvPr>
-            <p:ph type="sldNum" sz="quarter" idx="10"/>
-          </p:nvPr>
-        </p:nvSpPr>
-        <p:spPr/>
-        <p:txBody>
-          <a:bodyPr/>
-          <a:lstStyle/>
-          <a:p>
-            <a:fld id="{F7021451-1387-4CA6-816F-3879F97B5CBC}" type="slidenum">
-              <a:rPr lang="en-US"/>
-              <a:t>20</a:t>
-            </a:fld>
-            <a:endParaRPr lang="en-US"/>
-          </a:p>
-        </p:txBody>
-      </p:sp>
-    </p:spTree>
-    <p:extLst>
-      <p:ext uri="{BB962C8B-B14F-4D97-AF65-F5344CB8AC3E}">
-        <p14:creationId xmlns:p14="http://schemas.microsoft.com/office/powerpoint/2010/main" val="1024086991"/>
-      </p:ext>
-    </p:extLst>
-  </p:cSld>
-  <p:clrMapOvr>
-    <a:masterClrMapping/>
-  </p:clrMapOvr>
-</p:notes>
-</file>
-
-<file path=ppt/notesSlides/notesSlide21.xml><?xml version="1.0" encoding="utf-8"?>
-<p:notes xmlns:a="http://schemas.openxmlformats.org/drawingml/2006/main" xmlns:r="http://schemas.openxmlformats.org/officeDocument/2006/relationships" xmlns:p="http://schemas.openxmlformats.org/presentationml/2006/main">
-  <p:cSld>
-    <p:spTree>
-      <p:nvGrpSpPr>
-        <p:cNvPr id="1" name=""/>
-        <p:cNvGrpSpPr/>
-        <p:nvPr/>
-      </p:nvGrpSpPr>
-      <p:grpSpPr>
-        <a:xfrm>
-          <a:off x="0" y="0"/>
-          <a:ext cx="0" cy="0"/>
-          <a:chOff x="0" y="0"/>
-          <a:chExt cx="0" cy="0"/>
-        </a:xfrm>
-      </p:grpSpPr>
-      <p:sp>
-        <p:nvSpPr>
-          <p:cNvPr id="2" name="Slide Image Placeholder 1"/>
-          <p:cNvSpPr>
-            <a:spLocks noGrp="1" noRot="1" noChangeAspect="1"/>
-          </p:cNvSpPr>
-          <p:nvPr>
-            <p:ph type="sldImg"/>
-          </p:nvPr>
-        </p:nvSpPr>
-        <p:spPr/>
-      </p:sp>
-      <p:sp>
-        <p:nvSpPr>
-          <p:cNvPr id="3" name="Notes Placeholder 2"/>
-          <p:cNvSpPr>
-            <a:spLocks noGrp="1"/>
-          </p:cNvSpPr>
-          <p:nvPr>
-            <p:ph type="body" idx="1"/>
-          </p:nvPr>
-        </p:nvSpPr>
-        <p:spPr/>
-        <p:txBody>
-          <a:bodyPr/>
-          <a:lstStyle/>
-          <a:p>
-            <a:r>
-              <a:rPr lang="en-US" dirty="0"/>
-              <a:t>SCRIPT: Walk each field. (1) Make: trim, required, textInputAction next moves focus. (2) Year: numeric keyboard, digitsOnly + length 4 formatters, tryParse in the validator, range check with string interpolation. (3) Cover: DropdownButtonFormField with initialValue and onChanged. (4) Licence date: custom FormField on the next slide. (5) Submit: FilledButton.icon.
-SDK COMPATIBILITY: DropdownButtonFormField's 'value' parameter was deprecated in favour of 'initialValue' (Flutter 3.33+). If a delegate's older SDK says "The named parameter 'initialValue' isn't defined", tell them to use value: instead, or upgrade with flutter upgrade. If a newer SDK warns 'value' is deprecated, that is the same change in reverse.
-IMPORT: FilteringTextInputFormatter lives in package:flutter/services.dart - "Undefined name" means the import is missing.
-Validation order: validators run top to bottom; the first error focuses nothing by default - mention that on Day 5 accessibility we scroll to the first error.</a:t>
-            </a:r>
-            <a:endParaRPr lang="en-US" dirty="0"/>
-          </a:p>
-        </p:txBody>
-      </p:sp>
-      <p:sp>
-        <p:nvSpPr>
-          <p:cNvPr id="4" name="Slide Number Placeholder 3"/>
-          <p:cNvSpPr>
-            <a:spLocks noGrp="1"/>
-          </p:cNvSpPr>
-          <p:nvPr>
-            <p:ph type="sldNum" sz="quarter" idx="10"/>
-          </p:nvPr>
-        </p:nvSpPr>
-        <p:spPr/>
-        <p:txBody>
-          <a:bodyPr/>
-          <a:lstStyle/>
-          <a:p>
-            <a:fld id="{F7021451-1387-4CA6-816F-3879F97B5CBC}" type="slidenum">
-              <a:rPr lang="en-US"/>
-              <a:t>21</a:t>
-            </a:fld>
-            <a:endParaRPr lang="en-US"/>
-          </a:p>
-        </p:txBody>
-      </p:sp>
-    </p:spTree>
-    <p:extLst>
-      <p:ext uri="{BB962C8B-B14F-4D97-AF65-F5344CB8AC3E}">
-        <p14:creationId xmlns:p14="http://schemas.microsoft.com/office/powerpoint/2010/main" val="1024086991"/>
-      </p:ext>
-    </p:extLst>
-  </p:cSld>
-  <p:clrMapOvr>
-    <a:masterClrMapping/>
-  </p:clrMapOvr>
-</p:notes>
-</file>
-
-<file path=ppt/notesSlides/notesSlide22.xml><?xml version="1.0" encoding="utf-8"?>
-<p:notes xmlns:a="http://schemas.openxmlformats.org/drawingml/2006/main" xmlns:r="http://schemas.openxmlformats.org/officeDocument/2006/relationships" xmlns:p="http://schemas.openxmlformats.org/presentationml/2006/main">
-  <p:cSld>
-    <p:spTree>
-      <p:nvGrpSpPr>
-        <p:cNvPr id="1" name=""/>
-        <p:cNvGrpSpPr/>
-        <p:nvPr/>
-      </p:nvGrpSpPr>
-      <p:grpSpPr>
-        <a:xfrm>
-          <a:off x="0" y="0"/>
-          <a:ext cx="0" cy="0"/>
-          <a:chOff x="0" y="0"/>
-          <a:chExt cx="0" cy="0"/>
-        </a:xfrm>
-      </p:grpSpPr>
-      <p:sp>
-        <p:nvSpPr>
-          <p:cNvPr id="2" name="Slide Image Placeholder 1"/>
-          <p:cNvSpPr>
-            <a:spLocks noGrp="1" noRot="1" noChangeAspect="1"/>
-          </p:cNvSpPr>
-          <p:nvPr>
-            <p:ph type="sldImg"/>
-          </p:nvPr>
-        </p:nvSpPr>
-        <p:spPr/>
-      </p:sp>
-      <p:sp>
-        <p:nvSpPr>
-          <p:cNvPr id="3" name="Notes Placeholder 2"/>
-          <p:cNvSpPr>
-            <a:spLocks noGrp="1"/>
-          </p:cNvSpPr>
-          <p:nvPr>
-            <p:ph type="body" idx="1"/>
-          </p:nvPr>
-        </p:nvSpPr>
-        <p:spPr/>
-        <p:txBody>
-          <a:bodyPr/>
-          <a:lstStyle/>
-          <a:p>
-            <a:r>
-              <a:rPr lang="en-US" dirty="0"/>
-              <a:t>SCRIPT: This is the pattern for any non-text field that must validate with the form: wrap it in FormField&lt;T&gt;, call state.didChange when the value changes, render with InputDecorator so it looks like the other fields.
-GOTCHA: showDatePicker throws "No MaterialLocalizations found" if you call it from a context above MaterialApp (e.g. in main). Inside a screen it is fine.
-STRETCH for the lab: replace MaterialLocalizations formatting with intl DateFormat.yMMMd('en_ZA').</a:t>
-            </a:r>
-            <a:endParaRPr lang="en-US" dirty="0"/>
-          </a:p>
-        </p:txBody>
-      </p:sp>
-      <p:sp>
-        <p:nvSpPr>
-          <p:cNvPr id="4" name="Slide Number Placeholder 3"/>
-          <p:cNvSpPr>
-            <a:spLocks noGrp="1"/>
-          </p:cNvSpPr>
-          <p:nvPr>
-            <p:ph type="sldNum" sz="quarter" idx="10"/>
-          </p:nvPr>
-        </p:nvSpPr>
-        <p:spPr/>
-        <p:txBody>
-          <a:bodyPr/>
-          <a:lstStyle/>
-          <a:p>
-            <a:fld id="{F7021451-1387-4CA6-816F-3879F97B5CBC}" type="slidenum">
-              <a:rPr lang="en-US"/>
-              <a:t>22</a:t>
-            </a:fld>
-            <a:endParaRPr lang="en-US"/>
-          </a:p>
-        </p:txBody>
-      </p:sp>
-    </p:spTree>
-    <p:extLst>
-      <p:ext uri="{BB962C8B-B14F-4D97-AF65-F5344CB8AC3E}">
-        <p14:creationId xmlns:p14="http://schemas.microsoft.com/office/powerpoint/2010/main" val="1024086991"/>
-      </p:ext>
-    </p:extLst>
-  </p:cSld>
-  <p:clrMapOvr>
-    <a:masterClrMapping/>
-  </p:clrMapOvr>
-</p:notes>
-</file>
-
-<file path=ppt/notesSlides/notesSlide23.xml><?xml version="1.0" encoding="utf-8"?>
-<p:notes xmlns:a="http://schemas.openxmlformats.org/drawingml/2006/main" xmlns:r="http://schemas.openxmlformats.org/officeDocument/2006/relationships" xmlns:p="http://schemas.openxmlformats.org/presentationml/2006/main">
-  <p:cSld>
-    <p:spTree>
-      <p:nvGrpSpPr>
-        <p:cNvPr id="1" name=""/>
-        <p:cNvGrpSpPr/>
-        <p:nvPr/>
-      </p:nvGrpSpPr>
-      <p:grpSpPr>
-        <a:xfrm>
-          <a:off x="0" y="0"/>
-          <a:ext cx="0" cy="0"/>
-          <a:chOff x="0" y="0"/>
-          <a:chExt cx="0" cy="0"/>
-        </a:xfrm>
-      </p:grpSpPr>
-      <p:sp>
-        <p:nvSpPr>
-          <p:cNvPr id="2" name="Slide Image Placeholder 1"/>
-          <p:cNvSpPr>
-            <a:spLocks noGrp="1" noRot="1" noChangeAspect="1"/>
-          </p:cNvSpPr>
-          <p:nvPr>
-            <p:ph type="sldImg"/>
-          </p:nvPr>
-        </p:nvSpPr>
-        <p:spPr/>
-      </p:sp>
-      <p:sp>
-        <p:nvSpPr>
-          <p:cNvPr id="3" name="Notes Placeholder 2"/>
-          <p:cNvSpPr>
-            <a:spLocks noGrp="1"/>
-          </p:cNvSpPr>
-          <p:nvPr>
-            <p:ph type="body" idx="1"/>
-          </p:nvPr>
-        </p:nvSpPr>
-        <p:spPr/>
-        <p:txBody>
-          <a:bodyPr/>
-          <a:lstStyle/>
-          <a:p>
-            <a:r>
-              <a:rPr lang="en-US" dirty="0"/>
-              <a:t>SCRIPT: Three APIs, one pattern: they return Futures, so you await, and after the await you check context.mounted before using the context again. The lint use_build_context_synchronously will flag you if you forget.
-ctx vs context: inside the dialog builder use ctx to pop; using the outer context pops the wrong route.
-Windows/Mac: identical.</a:t>
-            </a:r>
-            <a:endParaRPr lang="en-US" dirty="0"/>
-          </a:p>
-        </p:txBody>
-      </p:sp>
-      <p:sp>
-        <p:nvSpPr>
-          <p:cNvPr id="4" name="Slide Number Placeholder 3"/>
-          <p:cNvSpPr>
-            <a:spLocks noGrp="1"/>
-          </p:cNvSpPr>
-          <p:nvPr>
-            <p:ph type="sldNum" sz="quarter" idx="10"/>
-          </p:nvPr>
-        </p:nvSpPr>
-        <p:spPr/>
-        <p:txBody>
-          <a:bodyPr/>
-          <a:lstStyle/>
-          <a:p>
-            <a:fld id="{F7021451-1387-4CA6-816F-3879F97B5CBC}" type="slidenum">
-              <a:rPr lang="en-US"/>
-              <a:t>23</a:t>
-            </a:fld>
-            <a:endParaRPr lang="en-US"/>
-          </a:p>
-        </p:txBody>
-      </p:sp>
-    </p:spTree>
-    <p:extLst>
-      <p:ext uri="{BB962C8B-B14F-4D97-AF65-F5344CB8AC3E}">
-        <p14:creationId xmlns:p14="http://schemas.microsoft.com/office/powerpoint/2010/main" val="1024086991"/>
-      </p:ext>
-    </p:extLst>
-  </p:cSld>
-  <p:clrMapOvr>
-    <a:masterClrMapping/>
-  </p:clrMapOvr>
-</p:notes>
-</file>
-
-<file path=ppt/notesSlides/notesSlide24.xml><?xml version="1.0" encoding="utf-8"?>
-<p:notes xmlns:a="http://schemas.openxmlformats.org/drawingml/2006/main" xmlns:r="http://schemas.openxmlformats.org/officeDocument/2006/relationships" xmlns:p="http://schemas.openxmlformats.org/presentationml/2006/main">
-  <p:cSld>
-    <p:spTree>
-      <p:nvGrpSpPr>
-        <p:cNvPr id="1" name=""/>
-        <p:cNvGrpSpPr/>
-        <p:nvPr/>
-      </p:nvGrpSpPr>
-      <p:grpSpPr>
-        <a:xfrm>
-          <a:off x="0" y="0"/>
-          <a:ext cx="0" cy="0"/>
-          <a:chOff x="0" y="0"/>
-          <a:chExt cx="0" cy="0"/>
-        </a:xfrm>
-      </p:grpSpPr>
-      <p:sp>
-        <p:nvSpPr>
-          <p:cNvPr id="2" name="Slide Image Placeholder 1"/>
-          <p:cNvSpPr>
-            <a:spLocks noGrp="1" noRot="1" noChangeAspect="1"/>
-          </p:cNvSpPr>
-          <p:nvPr>
-            <p:ph type="sldImg"/>
-          </p:nvPr>
-        </p:nvSpPr>
-        <p:spPr/>
-      </p:sp>
-      <p:sp>
-        <p:nvSpPr>
-          <p:cNvPr id="3" name="Notes Placeholder 2"/>
-          <p:cNvSpPr>
-            <a:spLocks noGrp="1"/>
-          </p:cNvSpPr>
-          <p:nvPr>
-            <p:ph type="body" idx="1"/>
-          </p:nvPr>
-        </p:nvSpPr>
-        <p:spPr/>
-        <p:txBody>
-          <a:bodyPr/>
-          <a:lstStyle/>
-          <a:p>
-            <a:r>
-              <a:rPr lang="en-US" dirty="0"/>
-              <a:t>SCRIPT: Quick reference. Two gotchas: InkWell needs a Material ancestor to paint the ripple (wrap in Material() if you see no ripple); Radio changed API in Flutter 3.32 (RadioGroup) so we use SegmentedButton for single choice - cleaner and M3-native.
-KEYBOARD: on Android the keyboard can cover fields; Scaffold resizes the body by default (resizeToAvoidBottomInset: true) - wrap the form in SingleChildScrollView and it scrolls into view.</a:t>
-            </a:r>
-            <a:endParaRPr lang="en-US" dirty="0"/>
-          </a:p>
-        </p:txBody>
-      </p:sp>
-      <p:sp>
-        <p:nvSpPr>
-          <p:cNvPr id="4" name="Slide Number Placeholder 3"/>
-          <p:cNvSpPr>
-            <a:spLocks noGrp="1"/>
-          </p:cNvSpPr>
-          <p:nvPr>
-            <p:ph type="sldNum" sz="quarter" idx="10"/>
-          </p:nvPr>
-        </p:nvSpPr>
-        <p:spPr/>
-        <p:txBody>
-          <a:bodyPr/>
-          <a:lstStyle/>
-          <a:p>
-            <a:fld id="{F7021451-1387-4CA6-816F-3879F97B5CBC}" type="slidenum">
-              <a:rPr lang="en-US"/>
-              <a:t>24</a:t>
-            </a:fld>
-            <a:endParaRPr lang="en-US"/>
-          </a:p>
-        </p:txBody>
-      </p:sp>
-    </p:spTree>
-    <p:extLst>
-      <p:ext uri="{BB962C8B-B14F-4D97-AF65-F5344CB8AC3E}">
-        <p14:creationId xmlns:p14="http://schemas.microsoft.com/office/powerpoint/2010/main" val="1024086991"/>
-      </p:ext>
-    </p:extLst>
-  </p:cSld>
-  <p:clrMapOvr>
-    <a:masterClrMapping/>
-  </p:clrMapOvr>
-</p:notes>
-</file>
-
-<file path=ppt/notesSlides/notesSlide25.xml><?xml version="1.0" encoding="utf-8"?>
-<p:notes xmlns:a="http://schemas.openxmlformats.org/drawingml/2006/main" xmlns:r="http://schemas.openxmlformats.org/officeDocument/2006/relationships" xmlns:p="http://schemas.openxmlformats.org/presentationml/2006/main">
-  <p:cSld>
-    <p:spTree>
-      <p:nvGrpSpPr>
-        <p:cNvPr id="1" name=""/>
-        <p:cNvGrpSpPr/>
-        <p:nvPr/>
-      </p:nvGrpSpPr>
-      <p:grpSpPr>
-        <a:xfrm>
-          <a:off x="0" y="0"/>
-          <a:ext cx="0" cy="0"/>
-          <a:chOff x="0" y="0"/>
-          <a:chExt cx="0" cy="0"/>
-        </a:xfrm>
-      </p:grpSpPr>
-      <p:sp>
-        <p:nvSpPr>
-          <p:cNvPr id="2" name="Slide Image Placeholder 1"/>
-          <p:cNvSpPr>
-            <a:spLocks noGrp="1" noRot="1" noChangeAspect="1"/>
-          </p:cNvSpPr>
-          <p:nvPr>
-            <p:ph type="sldImg"/>
-          </p:nvPr>
-        </p:nvSpPr>
-        <p:spPr/>
-      </p:sp>
-      <p:sp>
-        <p:nvSpPr>
-          <p:cNvPr id="3" name="Notes Placeholder 2"/>
-          <p:cNvSpPr>
-            <a:spLocks noGrp="1"/>
-          </p:cNvSpPr>
-          <p:nvPr>
-            <p:ph type="body" idx="1"/>
-          </p:nvPr>
-        </p:nvSpPr>
-        <p:spPr/>
-        <p:txBody>
-          <a:bodyPr/>
-          <a:lstStyle/>
-          <a:p>
-            <a:r>
-              <a:rPr lang="en-US" dirty="0"/>
-              <a:t>WHY: the cookbook is what they will Google in three weeks. Reading it now, right after building the richer version, makes the differences stick.
-EXPECTED: Q1 controllers, formatters, a dropdown, a custom FormField, callback up, dispose. Q2 controller.text (imperative, on submit) vs onChanged/onSaved (reactive/collected); controller when you need to read or set programmatically. Q3 dispose in dispose() to release resources; debug assertion and leaks otherwise. Q4 typical: autovalidateMode, focus management, accessibility labels, async validation.</a:t>
-            </a:r>
-            <a:endParaRPr lang="en-US" dirty="0"/>
-          </a:p>
-        </p:txBody>
-      </p:sp>
-      <p:sp>
-        <p:nvSpPr>
-          <p:cNvPr id="4" name="Slide Number Placeholder 3"/>
-          <p:cNvSpPr>
-            <a:spLocks noGrp="1"/>
-          </p:cNvSpPr>
-          <p:nvPr>
-            <p:ph type="sldNum" sz="quarter" idx="10"/>
-          </p:nvPr>
-        </p:nvSpPr>
-        <p:spPr/>
-        <p:txBody>
-          <a:bodyPr/>
-          <a:lstStyle/>
-          <a:p>
-            <a:fld id="{F7021451-1387-4CA6-816F-3879F97B5CBC}" type="slidenum">
-              <a:rPr lang="en-US"/>
-              <a:t>25</a:t>
-            </a:fld>
-            <a:endParaRPr lang="en-US"/>
-          </a:p>
-        </p:txBody>
-      </p:sp>
-    </p:spTree>
-    <p:extLst>
-      <p:ext uri="{BB962C8B-B14F-4D97-AF65-F5344CB8AC3E}">
-        <p14:creationId xmlns:p14="http://schemas.microsoft.com/office/powerpoint/2010/main" val="1024086991"/>
-      </p:ext>
-    </p:extLst>
-  </p:cSld>
-  <p:clrMapOvr>
-    <a:masterClrMapping/>
-  </p:clrMapOvr>
-</p:notes>
-</file>
-
-<file path=ppt/notesSlides/notesSlide26.xml><?xml version="1.0" encoding="utf-8"?>
-<p:notes xmlns:a="http://schemas.openxmlformats.org/drawingml/2006/main" xmlns:r="http://schemas.openxmlformats.org/officeDocument/2006/relationships" xmlns:p="http://schemas.openxmlformats.org/presentationml/2006/main">
-  <p:cSld>
-    <p:spTree>
-      <p:nvGrpSpPr>
-        <p:cNvPr id="1" name=""/>
-        <p:cNvGrpSpPr/>
-        <p:nvPr/>
-      </p:nvGrpSpPr>
-      <p:grpSpPr>
-        <a:xfrm>
-          <a:off x="0" y="0"/>
-          <a:ext cx="0" cy="0"/>
-          <a:chOff x="0" y="0"/>
-          <a:chExt cx="0" cy="0"/>
-        </a:xfrm>
-      </p:grpSpPr>
-      <p:sp>
-        <p:nvSpPr>
-          <p:cNvPr id="2" name="Slide Image Placeholder 1"/>
-          <p:cNvSpPr>
-            <a:spLocks noGrp="1" noRot="1" noChangeAspect="1"/>
-          </p:cNvSpPr>
-          <p:nvPr>
-            <p:ph type="sldImg"/>
-          </p:nvPr>
-        </p:nvSpPr>
-        <p:spPr/>
-      </p:sp>
-      <p:sp>
-        <p:nvSpPr>
-          <p:cNvPr id="3" name="Notes Placeholder 2"/>
-          <p:cNvSpPr>
-            <a:spLocks noGrp="1"/>
-          </p:cNvSpPr>
-          <p:nvPr>
-            <p:ph type="body" idx="1"/>
-          </p:nvPr>
-        </p:nvSpPr>
-        <p:spPr/>
-        <p:txBody>
-          <a:bodyPr/>
-          <a:lstStyle/>
-          <a:p>
-            <a:r>
-              <a:rPr lang="en-US" dirty="0"/>
-              <a:t>RUN THE LAB: 45 minutes. This is the day's core deliverable; everyone must finish steps 1-4.
-CHECKPOINTS: 15 min fields render; 30 min validation works; 45 min SnackBar shows premium.
-COMMON ERRORS: "Undefined name FilteringTextInputFormatter" → import services.dart. "initialValue isn't defined" → older SDK, use value: (see slide notes). "No MaterialLocalizations found" → showDatePicker called with a context above MaterialApp. "A TextEditingController was used after being disposed" → controller created in build() instead of State. Keyboard covers the button → SingleChildScrollView around the form.
-WINDOWS EMULATOR KEYBOARD: the on-screen keyboard may not appear if hardware keyboard input is enabled; delegates can type with the laptop keyboard anyway. To show the soft keyboard: emulator Settings → disable "Enable keyboard input".
-SOLUTION: Appendix D, branch lab-2-2-solution.</a:t>
-            </a:r>
-            <a:endParaRPr lang="en-US" dirty="0"/>
-          </a:p>
-        </p:txBody>
-      </p:sp>
-      <p:sp>
-        <p:nvSpPr>
-          <p:cNvPr id="4" name="Slide Number Placeholder 3"/>
-          <p:cNvSpPr>
-            <a:spLocks noGrp="1"/>
-          </p:cNvSpPr>
-          <p:nvPr>
-            <p:ph type="sldNum" sz="quarter" idx="10"/>
-          </p:nvPr>
-        </p:nvSpPr>
-        <p:spPr/>
-        <p:txBody>
-          <a:bodyPr/>
-          <a:lstStyle/>
-          <a:p>
-            <a:fld id="{F7021451-1387-4CA6-816F-3879F97B5CBC}" type="slidenum">
-              <a:rPr lang="en-US"/>
-              <a:t>26</a:t>
-            </a:fld>
-            <a:endParaRPr lang="en-US"/>
-          </a:p>
-        </p:txBody>
-      </p:sp>
-    </p:spTree>
-    <p:extLst>
-      <p:ext uri="{BB962C8B-B14F-4D97-AF65-F5344CB8AC3E}">
-        <p14:creationId xmlns:p14="http://schemas.microsoft.com/office/powerpoint/2010/main" val="1024086991"/>
-      </p:ext>
-    </p:extLst>
-  </p:cSld>
-  <p:clrMapOvr>
-    <a:masterClrMapping/>
-  </p:clrMapOvr>
-</p:notes>
-</file>
-
-<file path=ppt/notesSlides/notesSlide27.xml><?xml version="1.0" encoding="utf-8"?>
-<p:notes xmlns:a="http://schemas.openxmlformats.org/drawingml/2006/main" xmlns:r="http://schemas.openxmlformats.org/officeDocument/2006/relationships" xmlns:p="http://schemas.openxmlformats.org/presentationml/2006/main">
-  <p:cSld>
-    <p:spTree>
-      <p:nvGrpSpPr>
-        <p:cNvPr id="1" name=""/>
-        <p:cNvGrpSpPr/>
-        <p:nvPr/>
-      </p:nvGrpSpPr>
-      <p:grpSpPr>
-        <a:xfrm>
-          <a:off x="0" y="0"/>
-          <a:ext cx="0" cy="0"/>
-          <a:chOff x="0" y="0"/>
-          <a:chExt cx="0" cy="0"/>
-        </a:xfrm>
-      </p:grpSpPr>
-      <p:sp>
-        <p:nvSpPr>
-          <p:cNvPr id="2" name="Slide Image Placeholder 1"/>
-          <p:cNvSpPr>
-            <a:spLocks noGrp="1" noRot="1" noChangeAspect="1"/>
-          </p:cNvSpPr>
-          <p:nvPr>
-            <p:ph type="sldImg"/>
-          </p:nvPr>
-        </p:nvSpPr>
-        <p:spPr/>
-      </p:sp>
-      <p:sp>
-        <p:nvSpPr>
-          <p:cNvPr id="3" name="Notes Placeholder 2"/>
-          <p:cNvSpPr>
-            <a:spLocks noGrp="1"/>
-          </p:cNvSpPr>
-          <p:nvPr>
-            <p:ph type="body" idx="1"/>
-          </p:nvPr>
-        </p:nvSpPr>
-        <p:spPr/>
-        <p:txBody>
-          <a:bodyPr/>
-          <a:lstStyle/>
-          <a:p>
-            <a:r>
-              <a:rPr lang="en-US" dirty="0"/>
-              <a:t>SCRIPT: The white-label requirement from the survey starts here. Today: BrandTheme value + runtime toggle. Day 3: brand in a Riverpod provider. Day 5: brand from build flavour. Same class throughout.</a:t>
-            </a:r>
-            <a:endParaRPr lang="en-US" dirty="0"/>
-          </a:p>
-        </p:txBody>
-      </p:sp>
-      <p:sp>
-        <p:nvSpPr>
-          <p:cNvPr id="4" name="Slide Number Placeholder 3"/>
-          <p:cNvSpPr>
-            <a:spLocks noGrp="1"/>
-          </p:cNvSpPr>
-          <p:nvPr>
-            <p:ph type="sldNum" sz="quarter" idx="10"/>
-          </p:nvPr>
-        </p:nvSpPr>
-        <p:spPr/>
-        <p:txBody>
-          <a:bodyPr/>
-          <a:lstStyle/>
-          <a:p>
-            <a:fld id="{F7021451-1387-4CA6-816F-3879F97B5CBC}" type="slidenum">
-              <a:rPr lang="en-US"/>
-              <a:t>27</a:t>
-            </a:fld>
-            <a:endParaRPr lang="en-US"/>
-          </a:p>
-        </p:txBody>
-      </p:sp>
-    </p:spTree>
-    <p:extLst>
-      <p:ext uri="{BB962C8B-B14F-4D97-AF65-F5344CB8AC3E}">
-        <p14:creationId xmlns:p14="http://schemas.microsoft.com/office/powerpoint/2010/main" val="1024086991"/>
-      </p:ext>
-    </p:extLst>
-  </p:cSld>
-  <p:clrMapOvr>
-    <a:masterClrMapping/>
-  </p:clrMapOvr>
-</p:notes>
-</file>
-
-<file path=ppt/notesSlides/notesSlide28.xml><?xml version="1.0" encoding="utf-8"?>
-<p:notes xmlns:a="http://schemas.openxmlformats.org/drawingml/2006/main" xmlns:r="http://schemas.openxmlformats.org/officeDocument/2006/relationships" xmlns:p="http://schemas.openxmlformats.org/presentationml/2006/main">
-  <p:cSld>
-    <p:spTree>
-      <p:nvGrpSpPr>
-        <p:cNvPr id="1" name=""/>
-        <p:cNvGrpSpPr/>
-        <p:nvPr/>
-      </p:nvGrpSpPr>
-      <p:grpSpPr>
-        <a:xfrm>
-          <a:off x="0" y="0"/>
-          <a:ext cx="0" cy="0"/>
-          <a:chOff x="0" y="0"/>
-          <a:chExt cx="0" cy="0"/>
-        </a:xfrm>
-      </p:grpSpPr>
-      <p:sp>
-        <p:nvSpPr>
-          <p:cNvPr id="2" name="Slide Image Placeholder 1"/>
-          <p:cNvSpPr>
-            <a:spLocks noGrp="1" noRot="1" noChangeAspect="1"/>
-          </p:cNvSpPr>
-          <p:nvPr>
-            <p:ph type="sldImg"/>
-          </p:nvPr>
-        </p:nvSpPr>
-        <p:spPr/>
-      </p:sp>
-      <p:sp>
-        <p:nvSpPr>
-          <p:cNvPr id="3" name="Notes Placeholder 2"/>
-          <p:cNvSpPr>
-            <a:spLocks noGrp="1"/>
-          </p:cNvSpPr>
-          <p:nvPr>
-            <p:ph type="body" idx="1"/>
-          </p:nvPr>
-        </p:nvSpPr>
-        <p:spPr/>
-        <p:txBody>
-          <a:bodyPr/>
-          <a:lstStyle/>
-          <a:p>
-            <a:r>
-              <a:rPr lang="en-US" dirty="0"/>
-              <a:t>SCRIPT: Design tokens, Flutter edition. One seed colour generates the whole scheme, including a dark variant. Widgets read roles - cs.primary, cs.onPrimary, cs.primaryContainer - and text styles by name. That is what makes white-label cheap: change the seed, everything follows.
-DEMO: change the seed hex, hot reload, whole app recolours. Then toggle the emulator to dark mode (Settings → Display) and show darkTheme kicking in.
-RULE FOR THE ROOM: if you type Colors.blue or fontSize: 18 inside a widget, you have broken white-label. Use the theme.
-SDK NOTE: on Flutter 3.35 and newer the component theme types are AppBarThemeData and InputDecorationThemeData. The older names AppBarTheme and InputDecorationTheme still compile because ThemeData accepts both, but the Data names are the current ones and what dart fix will suggest. If a delegate on an older SDK gets "InputDecorationThemeData isn't defined", drop the Data suffix.
-LINK: m3.material.io/styles/color/roles for the role names.</a:t>
-            </a:r>
-            <a:endParaRPr lang="en-US" dirty="0"/>
-          </a:p>
-        </p:txBody>
-      </p:sp>
-      <p:sp>
-        <p:nvSpPr>
-          <p:cNvPr id="4" name="Slide Number Placeholder 3"/>
-          <p:cNvSpPr>
-            <a:spLocks noGrp="1"/>
-          </p:cNvSpPr>
-          <p:nvPr>
-            <p:ph type="sldNum" sz="quarter" idx="10"/>
-          </p:nvPr>
-        </p:nvSpPr>
-        <p:spPr/>
-        <p:txBody>
-          <a:bodyPr/>
-          <a:lstStyle/>
-          <a:p>
-            <a:fld id="{F7021451-1387-4CA6-816F-3879F97B5CBC}" type="slidenum">
-              <a:rPr lang="en-US"/>
-              <a:t>28</a:t>
-            </a:fld>
-            <a:endParaRPr lang="en-US"/>
-          </a:p>
-        </p:txBody>
-      </p:sp>
-    </p:spTree>
-    <p:extLst>
-      <p:ext uri="{BB962C8B-B14F-4D97-AF65-F5344CB8AC3E}">
-        <p14:creationId xmlns:p14="http://schemas.microsoft.com/office/powerpoint/2010/main" val="1024086991"/>
-      </p:ext>
-    </p:extLst>
-  </p:cSld>
-  <p:clrMapOvr>
-    <a:masterClrMapping/>
-  </p:clrMapOvr>
-</p:notes>
-</file>
-
-<file path=ppt/notesSlides/notesSlide29.xml><?xml version="1.0" encoding="utf-8"?>
-<p:notes xmlns:a="http://schemas.openxmlformats.org/drawingml/2006/main" xmlns:r="http://schemas.openxmlformats.org/officeDocument/2006/relationships" xmlns:p="http://schemas.openxmlformats.org/presentationml/2006/main">
-  <p:cSld>
-    <p:spTree>
-      <p:nvGrpSpPr>
-        <p:cNvPr id="1" name=""/>
-        <p:cNvGrpSpPr/>
-        <p:nvPr/>
-      </p:nvGrpSpPr>
-      <p:grpSpPr>
-        <a:xfrm>
-          <a:off x="0" y="0"/>
-          <a:ext cx="0" cy="0"/>
-          <a:chOff x="0" y="0"/>
-          <a:chExt cx="0" cy="0"/>
-        </a:xfrm>
-      </p:grpSpPr>
-      <p:sp>
-        <p:nvSpPr>
-          <p:cNvPr id="2" name="Slide Image Placeholder 1"/>
-          <p:cNvSpPr>
-            <a:spLocks noGrp="1" noRot="1" noChangeAspect="1"/>
-          </p:cNvSpPr>
-          <p:nvPr>
-            <p:ph type="sldImg"/>
-          </p:nvPr>
-        </p:nvSpPr>
-        <p:spPr/>
-      </p:sp>
-      <p:sp>
-        <p:nvSpPr>
-          <p:cNvPr id="3" name="Notes Placeholder 2"/>
-          <p:cNvSpPr>
-            <a:spLocks noGrp="1"/>
-          </p:cNvSpPr>
-          <p:nvPr>
-            <p:ph type="body" idx="1"/>
-          </p:nvPr>
-        </p:nvSpPr>
-        <p:spPr/>
-        <p:txBody>
-          <a:bodyPr/>
-          <a:lstStyle/>
-          <a:p>
-            <a:r>
-              <a:rPr lang="en-US" dirty="0"/>
-              <a:t>WHY: colour roles are where developers freelance and break the design system. Making them argue for a role from the spec, then seeing both on screen, fixes it.
-EXPECTED: primary = brand colour for key components (FAB, filled button); onPrimary = text/icons on primary; primaryContainer = softer standout fill (header, chips) with onPrimaryContainer text. Form background = surface (or surfaceContainerLow); header = primaryContainer or primary; not both primary because hierarchy is lost and contrast rules for on-colours differ. Tonal = derived lightness steps from one hue; fromSeed maps tones differently for dark.
-PRESENTER: keep the two header variants as two lines you can swap.</a:t>
-            </a:r>
-            <a:endParaRPr lang="en-US" dirty="0"/>
-          </a:p>
-        </p:txBody>
-      </p:sp>
-      <p:sp>
-        <p:nvSpPr>
-          <p:cNvPr id="4" name="Slide Number Placeholder 3"/>
-          <p:cNvSpPr>
-            <a:spLocks noGrp="1"/>
-          </p:cNvSpPr>
-          <p:nvPr>
-            <p:ph type="sldNum" sz="quarter" idx="10"/>
-          </p:nvPr>
-        </p:nvSpPr>
-        <p:spPr/>
-        <p:txBody>
-          <a:bodyPr/>
-          <a:lstStyle/>
-          <a:p>
-            <a:fld id="{F7021451-1387-4CA6-816F-3879F97B5CBC}" type="slidenum">
-              <a:rPr lang="en-US"/>
-              <a:t>29</a:t>
-            </a:fld>
-            <a:endParaRPr lang="en-US"/>
-          </a:p>
-        </p:txBody>
-      </p:sp>
-    </p:spTree>
-    <p:extLst>
-      <p:ext uri="{BB962C8B-B14F-4D97-AF65-F5344CB8AC3E}">
-        <p14:creationId xmlns:p14="http://schemas.microsoft.com/office/powerpoint/2010/main" val="1024086991"/>
-      </p:ext>
-    </p:extLst>
-  </p:cSld>
-  <p:clrMapOvr>
-    <a:masterClrMapping/>
-  </p:clrMapOvr>
-</p:notes>
-</file>
-
-<file path=ppt/notesSlides/notesSlide3.xml><?xml version="1.0" encoding="utf-8"?>
-<p:notes xmlns:a="http://schemas.openxmlformats.org/drawingml/2006/main" xmlns:r="http://schemas.openxmlformats.org/officeDocument/2006/relationships" xmlns:p="http://schemas.openxmlformats.org/presentationml/2006/main">
-  <p:cSld>
-    <p:spTree>
-      <p:nvGrpSpPr>
-        <p:cNvPr id="1" name=""/>
-        <p:cNvGrpSpPr/>
-        <p:nvPr/>
-      </p:nvGrpSpPr>
-      <p:grpSpPr>
-        <a:xfrm>
-          <a:off x="0" y="0"/>
-          <a:ext cx="0" cy="0"/>
-          <a:chOff x="0" y="0"/>
-          <a:chExt cx="0" cy="0"/>
-        </a:xfrm>
-      </p:grpSpPr>
-      <p:sp>
-        <p:nvSpPr>
-          <p:cNvPr id="2" name="Slide Image Placeholder 1"/>
-          <p:cNvSpPr>
-            <a:spLocks noGrp="1" noRot="1" noChangeAspect="1"/>
-          </p:cNvSpPr>
-          <p:nvPr>
-            <p:ph type="sldImg"/>
-          </p:nvPr>
-        </p:nvSpPr>
-        <p:spPr/>
-      </p:sp>
-      <p:sp>
-        <p:nvSpPr>
-          <p:cNvPr id="3" name="Notes Placeholder 2"/>
-          <p:cNvSpPr>
-            <a:spLocks noGrp="1"/>
-          </p:cNvSpPr>
-          <p:nvPr>
-            <p:ph type="body" idx="1"/>
-          </p:nvPr>
-        </p:nvSpPr>
-        <p:spPr/>
-        <p:txBody>
-          <a:bodyPr/>
-          <a:lstStyle/>
-          <a:p>
-            <a:r>
-              <a:rPr lang="en-US" dirty="0"/>
-              <a:t>SCRIPT: This slide is the debrief AFTER the three delegates have presented. Confirm or correct each answer with the code on the right. Do not lecture the rule again if they got it right - say "correct" and move on. If nobody read the doc, run the first four examples on docs.flutter.dev/ui/layout/constraints live in DartPad instead.
-DEMO: Container(color: amber) directly in Scaffold body → fills the screen. Wrap in Center → STILL fills (loose but bounded; a child-less Container expands). Put it inside a Column → disappears (unbounded main axis → 0 height). Give it width/height → shows at that size anywhere. Four hot reloads, whole rule demonstrated. This matches examples 1-3 and the Column examples in the official constraints doc.
-LINK: docs.flutter.dev/ui/layout/constraints</a:t>
-            </a:r>
-            <a:endParaRPr lang="en-US" dirty="0"/>
-          </a:p>
-        </p:txBody>
-      </p:sp>
-      <p:sp>
-        <p:nvSpPr>
-          <p:cNvPr id="4" name="Slide Number Placeholder 3"/>
-          <p:cNvSpPr>
-            <a:spLocks noGrp="1"/>
-          </p:cNvSpPr>
-          <p:nvPr>
-            <p:ph type="sldNum" sz="quarter" idx="10"/>
-          </p:nvPr>
-        </p:nvSpPr>
-        <p:spPr/>
-        <p:txBody>
-          <a:bodyPr/>
-          <a:lstStyle/>
-          <a:p>
-            <a:fld id="{F7021451-1387-4CA6-816F-3879F97B5CBC}" type="slidenum">
-              <a:rPr lang="en-US"/>
-              <a:t>3</a:t>
-            </a:fld>
-            <a:endParaRPr lang="en-US"/>
-          </a:p>
-        </p:txBody>
-      </p:sp>
-    </p:spTree>
-    <p:extLst>
-      <p:ext uri="{BB962C8B-B14F-4D97-AF65-F5344CB8AC3E}">
-        <p14:creationId xmlns:p14="http://schemas.microsoft.com/office/powerpoint/2010/main" val="1024086991"/>
-      </p:ext>
-    </p:extLst>
-  </p:cSld>
-  <p:clrMapOvr>
-    <a:masterClrMapping/>
-  </p:clrMapOvr>
-</p:notes>
-</file>
-
-<file path=ppt/notesSlides/notesSlide30.xml><?xml version="1.0" encoding="utf-8"?>
-<p:notes xmlns:a="http://schemas.openxmlformats.org/drawingml/2006/main" xmlns:r="http://schemas.openxmlformats.org/officeDocument/2006/relationships" xmlns:p="http://schemas.openxmlformats.org/presentationml/2006/main">
-  <p:cSld>
-    <p:spTree>
-      <p:nvGrpSpPr>
-        <p:cNvPr id="1" name=""/>
-        <p:cNvGrpSpPr/>
-        <p:nvPr/>
-      </p:nvGrpSpPr>
-      <p:grpSpPr>
-        <a:xfrm>
-          <a:off x="0" y="0"/>
-          <a:ext cx="0" cy="0"/>
-          <a:chOff x="0" y="0"/>
-          <a:chExt cx="0" cy="0"/>
-        </a:xfrm>
-      </p:grpSpPr>
-      <p:sp>
-        <p:nvSpPr>
-          <p:cNvPr id="2" name="Slide Image Placeholder 1"/>
-          <p:cNvSpPr>
-            <a:spLocks noGrp="1" noRot="1" noChangeAspect="1"/>
-          </p:cNvSpPr>
-          <p:nvPr>
-            <p:ph type="sldImg"/>
-          </p:nvPr>
-        </p:nvSpPr>
-        <p:spPr/>
-      </p:sp>
-      <p:sp>
-        <p:nvSpPr>
-          <p:cNvPr id="3" name="Notes Placeholder 2"/>
-          <p:cNvSpPr>
-            <a:spLocks noGrp="1"/>
-          </p:cNvSpPr>
-          <p:nvPr>
-            <p:ph type="body" idx="1"/>
-          </p:nvPr>
-        </p:nvSpPr>
-        <p:spPr/>
-        <p:txBody>
-          <a:bodyPr/>
-          <a:lstStyle/>
-          <a:p>
-            <a:r>
-              <a:rPr lang="en-US" dirty="0"/>
-              <a:t>SCRIPT: This is the class the whole white-label story hangs on. Emphasise that nothing in the widgets knows about brands - they read Theme.of(context). Only app.dart knows which BrandTheme is active.
-Component themes live inside toThemeData so every brand shares the same shape (outlined inputs, 48-px buttons) and differs only in colour, name, logo, font.
-FUTURE-PROOF QUESTIONS: "Can a brand override a component shape?" Yes - add fields to BrandTheme and use them in toThemeData. "Can brands change without a release?" Fetch the BrandTheme values from an endpoint at startup; Day 4 shows the pattern with dio.</a:t>
-            </a:r>
-            <a:endParaRPr lang="en-US" dirty="0"/>
-          </a:p>
-        </p:txBody>
-      </p:sp>
-      <p:sp>
-        <p:nvSpPr>
-          <p:cNvPr id="4" name="Slide Number Placeholder 3"/>
-          <p:cNvSpPr>
-            <a:spLocks noGrp="1"/>
-          </p:cNvSpPr>
-          <p:nvPr>
-            <p:ph type="sldNum" sz="quarter" idx="10"/>
-          </p:nvPr>
-        </p:nvSpPr>
-        <p:spPr/>
-        <p:txBody>
-          <a:bodyPr/>
-          <a:lstStyle/>
-          <a:p>
-            <a:fld id="{F7021451-1387-4CA6-816F-3879F97B5CBC}" type="slidenum">
-              <a:rPr lang="en-US"/>
-              <a:t>30</a:t>
-            </a:fld>
-            <a:endParaRPr lang="en-US"/>
-          </a:p>
-        </p:txBody>
-      </p:sp>
-    </p:spTree>
-    <p:extLst>
-      <p:ext uri="{BB962C8B-B14F-4D97-AF65-F5344CB8AC3E}">
-        <p14:creationId xmlns:p14="http://schemas.microsoft.com/office/powerpoint/2010/main" val="1024086991"/>
-      </p:ext>
-    </p:extLst>
-  </p:cSld>
-  <p:clrMapOvr>
-    <a:masterClrMapping/>
-  </p:clrMapOvr>
-</p:notes>
-</file>
-
-<file path=ppt/notesSlides/notesSlide31.xml><?xml version="1.0" encoding="utf-8"?>
-<p:notes xmlns:a="http://schemas.openxmlformats.org/drawingml/2006/main" xmlns:r="http://schemas.openxmlformats.org/officeDocument/2006/relationships" xmlns:p="http://schemas.openxmlformats.org/presentationml/2006/main">
-  <p:cSld>
-    <p:spTree>
-      <p:nvGrpSpPr>
-        <p:cNvPr id="1" name=""/>
-        <p:cNvGrpSpPr/>
-        <p:nvPr/>
-      </p:nvGrpSpPr>
-      <p:grpSpPr>
-        <a:xfrm>
-          <a:off x="0" y="0"/>
-          <a:ext cx="0" cy="0"/>
-          <a:chOff x="0" y="0"/>
-          <a:chExt cx="0" cy="0"/>
-        </a:xfrm>
-      </p:grpSpPr>
-      <p:sp>
-        <p:nvSpPr>
-          <p:cNvPr id="2" name="Slide Image Placeholder 1"/>
-          <p:cNvSpPr>
-            <a:spLocks noGrp="1" noRot="1" noChangeAspect="1"/>
-          </p:cNvSpPr>
-          <p:nvPr>
-            <p:ph type="sldImg"/>
-          </p:nvPr>
-        </p:nvSpPr>
-        <p:spPr/>
-      </p:sp>
-      <p:sp>
-        <p:nvSpPr>
-          <p:cNvPr id="3" name="Notes Placeholder 2"/>
-          <p:cNvSpPr>
-            <a:spLocks noGrp="1"/>
-          </p:cNvSpPr>
-          <p:nvPr>
-            <p:ph type="body" idx="1"/>
-          </p:nvPr>
-        </p:nvSpPr>
-        <p:spPr/>
-        <p:txBody>
-          <a:bodyPr/>
-          <a:lstStyle/>
-          <a:p>
-            <a:r>
-              <a:rPr lang="en-US" dirty="0"/>
-              <a:t>SCRIPT: Demo this. Tap the swap icon in the AppBar, the whole app changes colour and title. That is the moment the white-label requirement becomes concrete for the two people who raised it.
-The pattern is deliberately naive (state in the root, callback threaded down) so that tomorrow's Riverpod refactor has an obvious before/after.
-The ! on brands[_brandKey]!: acceptable because the keys are constants we control; on Day 4 when the key could come from storage, we guard it.</a:t>
-            </a:r>
-            <a:endParaRPr lang="en-US" dirty="0"/>
-          </a:p>
-        </p:txBody>
-      </p:sp>
-      <p:sp>
-        <p:nvSpPr>
-          <p:cNvPr id="4" name="Slide Number Placeholder 3"/>
-          <p:cNvSpPr>
-            <a:spLocks noGrp="1"/>
-          </p:cNvSpPr>
-          <p:nvPr>
-            <p:ph type="sldNum" sz="quarter" idx="10"/>
-          </p:nvPr>
-        </p:nvSpPr>
-        <p:spPr/>
-        <p:txBody>
-          <a:bodyPr/>
-          <a:lstStyle/>
-          <a:p>
-            <a:fld id="{F7021451-1387-4CA6-816F-3879F97B5CBC}" type="slidenum">
-              <a:rPr lang="en-US"/>
-              <a:t>31</a:t>
-            </a:fld>
-            <a:endParaRPr lang="en-US"/>
-          </a:p>
-        </p:txBody>
-      </p:sp>
-    </p:spTree>
-    <p:extLst>
-      <p:ext uri="{BB962C8B-B14F-4D97-AF65-F5344CB8AC3E}">
-        <p14:creationId xmlns:p14="http://schemas.microsoft.com/office/powerpoint/2010/main" val="1024086991"/>
-      </p:ext>
-    </p:extLst>
-  </p:cSld>
-  <p:clrMapOvr>
-    <a:masterClrMapping/>
-  </p:clrMapOvr>
-</p:notes>
-</file>
-
-<file path=ppt/notesSlides/notesSlide32.xml><?xml version="1.0" encoding="utf-8"?>
-<p:notes xmlns:a="http://schemas.openxmlformats.org/drawingml/2006/main" xmlns:r="http://schemas.openxmlformats.org/officeDocument/2006/relationships" xmlns:p="http://schemas.openxmlformats.org/presentationml/2006/main">
-  <p:cSld>
-    <p:spTree>
-      <p:nvGrpSpPr>
-        <p:cNvPr id="1" name=""/>
-        <p:cNvGrpSpPr/>
-        <p:nvPr/>
-      </p:nvGrpSpPr>
-      <p:grpSpPr>
-        <a:xfrm>
-          <a:off x="0" y="0"/>
-          <a:ext cx="0" cy="0"/>
-          <a:chOff x="0" y="0"/>
-          <a:chExt cx="0" cy="0"/>
-        </a:xfrm>
-      </p:grpSpPr>
-      <p:sp>
-        <p:nvSpPr>
-          <p:cNvPr id="2" name="Slide Image Placeholder 1"/>
-          <p:cNvSpPr>
-            <a:spLocks noGrp="1" noRot="1" noChangeAspect="1"/>
-          </p:cNvSpPr>
-          <p:nvPr>
-            <p:ph type="sldImg"/>
-          </p:nvPr>
-        </p:nvSpPr>
-        <p:spPr/>
-      </p:sp>
-      <p:sp>
-        <p:nvSpPr>
-          <p:cNvPr id="3" name="Notes Placeholder 2"/>
-          <p:cNvSpPr>
-            <a:spLocks noGrp="1"/>
-          </p:cNvSpPr>
-          <p:nvPr>
-            <p:ph type="body" idx="1"/>
-          </p:nvPr>
-        </p:nvSpPr>
-        <p:spPr/>
-        <p:txBody>
-          <a:bodyPr/>
-          <a:lstStyle/>
-          <a:p>
-            <a:r>
-              <a:rPr lang="en-US" dirty="0"/>
-              <a:t>SCRIPT: Two errors account for 90% of asset problems: YAML indentation (assets: must be nested under flutter: with exactly two spaces) and forgetting to hot restart after adding a file. "Unable to load asset" is almost always one of those, or a typo in the path.
-Windows path note: asset paths in pubspec always use forward slashes, even on Windows.
-Fonts: google_fonts package can download at runtime, but for an insurance app you ship the .ttf so it works offline and is licence-clean.
-Images code: Appendix E.</a:t>
-            </a:r>
-            <a:endParaRPr lang="en-US" dirty="0"/>
-          </a:p>
-        </p:txBody>
-      </p:sp>
-      <p:sp>
-        <p:nvSpPr>
-          <p:cNvPr id="4" name="Slide Number Placeholder 3"/>
-          <p:cNvSpPr>
-            <a:spLocks noGrp="1"/>
-          </p:cNvSpPr>
-          <p:nvPr>
-            <p:ph type="sldNum" sz="quarter" idx="10"/>
-          </p:nvPr>
-        </p:nvSpPr>
-        <p:spPr/>
-        <p:txBody>
-          <a:bodyPr/>
-          <a:lstStyle/>
-          <a:p>
-            <a:fld id="{F7021451-1387-4CA6-816F-3879F97B5CBC}" type="slidenum">
-              <a:rPr lang="en-US"/>
-              <a:t>32</a:t>
-            </a:fld>
-            <a:endParaRPr lang="en-US"/>
-          </a:p>
-        </p:txBody>
-      </p:sp>
-    </p:spTree>
-    <p:extLst>
-      <p:ext uri="{BB962C8B-B14F-4D97-AF65-F5344CB8AC3E}">
-        <p14:creationId xmlns:p14="http://schemas.microsoft.com/office/powerpoint/2010/main" val="1024086991"/>
-      </p:ext>
-    </p:extLst>
-  </p:cSld>
-  <p:clrMapOvr>
-    <a:masterClrMapping/>
-  </p:clrMapOvr>
-</p:notes>
-</file>
-
-<file path=ppt/notesSlides/notesSlide33.xml><?xml version="1.0" encoding="utf-8"?>
-<p:notes xmlns:a="http://schemas.openxmlformats.org/drawingml/2006/main" xmlns:r="http://schemas.openxmlformats.org/officeDocument/2006/relationships" xmlns:p="http://schemas.openxmlformats.org/presentationml/2006/main">
-  <p:cSld>
-    <p:spTree>
-      <p:nvGrpSpPr>
-        <p:cNvPr id="1" name=""/>
-        <p:cNvGrpSpPr/>
-        <p:nvPr/>
-      </p:nvGrpSpPr>
-      <p:grpSpPr>
-        <a:xfrm>
-          <a:off x="0" y="0"/>
-          <a:ext cx="0" cy="0"/>
-          <a:chOff x="0" y="0"/>
-          <a:chExt cx="0" cy="0"/>
-        </a:xfrm>
-      </p:grpSpPr>
-      <p:sp>
-        <p:nvSpPr>
-          <p:cNvPr id="2" name="Slide Image Placeholder 1"/>
-          <p:cNvSpPr>
-            <a:spLocks noGrp="1" noRot="1" noChangeAspect="1"/>
-          </p:cNvSpPr>
-          <p:nvPr>
-            <p:ph type="sldImg"/>
-          </p:nvPr>
-        </p:nvSpPr>
-        <p:spPr/>
-      </p:sp>
-      <p:sp>
-        <p:nvSpPr>
-          <p:cNvPr id="3" name="Notes Placeholder 2"/>
-          <p:cNvSpPr>
-            <a:spLocks noGrp="1"/>
-          </p:cNvSpPr>
-          <p:nvPr>
-            <p:ph type="body" idx="1"/>
-          </p:nvPr>
-        </p:nvSpPr>
-        <p:spPr/>
-        <p:txBody>
-          <a:bodyPr/>
-          <a:lstStyle/>
-          <a:p>
-            <a:r>
-              <a:rPr lang="en-US" dirty="0"/>
-              <a:t>RUN THE LAB: 35 minutes. The grep step (4) is the important one - it teaches the discipline that makes white-label work. On Windows: Select-String -Path lib -Recurse -Pattern "Colors\.|fontSize:" ; on Mac: grep -rn "Colors\.\|fontSize:" lib.
-COMMON ERRORS: "Unable to load asset" → pubspec indentation, path typo, or no hot restart. Dark mode text invisible → hard-coded Colors.black somewhere; use onSurface. Emulator dark mode: Settings → Display → Dark theme, or adb shell "cmd uimode night yes".
-CLOSE: everyone toggles brand and dark mode on their emulator. That is the Day 2 exit criterion.
-SOLUTION: Appendix F, branch lab-2-3-solution.</a:t>
-            </a:r>
-            <a:endParaRPr lang="en-US" dirty="0"/>
-          </a:p>
-        </p:txBody>
-      </p:sp>
-      <p:sp>
-        <p:nvSpPr>
-          <p:cNvPr id="4" name="Slide Number Placeholder 3"/>
-          <p:cNvSpPr>
-            <a:spLocks noGrp="1"/>
-          </p:cNvSpPr>
-          <p:nvPr>
-            <p:ph type="sldNum" sz="quarter" idx="10"/>
-          </p:nvPr>
-        </p:nvSpPr>
-        <p:spPr/>
-        <p:txBody>
-          <a:bodyPr/>
-          <a:lstStyle/>
-          <a:p>
-            <a:fld id="{F7021451-1387-4CA6-816F-3879F97B5CBC}" type="slidenum">
-              <a:rPr lang="en-US"/>
-              <a:t>33</a:t>
-            </a:fld>
-            <a:endParaRPr lang="en-US"/>
-          </a:p>
-        </p:txBody>
-      </p:sp>
-    </p:spTree>
-    <p:extLst>
-      <p:ext uri="{BB962C8B-B14F-4D97-AF65-F5344CB8AC3E}">
-        <p14:creationId xmlns:p14="http://schemas.microsoft.com/office/powerpoint/2010/main" val="1024086991"/>
-      </p:ext>
-    </p:extLst>
-  </p:cSld>
-  <p:clrMapOvr>
-    <a:masterClrMapping/>
-  </p:clrMapOvr>
-</p:notes>
-</file>
-
-<file path=ppt/notesSlides/notesSlide34.xml><?xml version="1.0" encoding="utf-8"?>
-<p:notes xmlns:a="http://schemas.openxmlformats.org/drawingml/2006/main" xmlns:r="http://schemas.openxmlformats.org/officeDocument/2006/relationships" xmlns:p="http://schemas.openxmlformats.org/presentationml/2006/main">
-  <p:cSld>
-    <p:spTree>
-      <p:nvGrpSpPr>
-        <p:cNvPr id="1" name=""/>
-        <p:cNvGrpSpPr/>
-        <p:nvPr/>
-      </p:nvGrpSpPr>
-      <p:grpSpPr>
-        <a:xfrm>
-          <a:off x="0" y="0"/>
-          <a:ext cx="0" cy="0"/>
-          <a:chOff x="0" y="0"/>
-          <a:chExt cx="0" cy="0"/>
-        </a:xfrm>
-      </p:grpSpPr>
-      <p:sp>
-        <p:nvSpPr>
-          <p:cNvPr id="2" name="Slide Image Placeholder 1"/>
-          <p:cNvSpPr>
-            <a:spLocks noGrp="1" noRot="1" noChangeAspect="1"/>
-          </p:cNvSpPr>
-          <p:nvPr>
-            <p:ph type="sldImg"/>
-          </p:nvPr>
-        </p:nvSpPr>
-        <p:spPr/>
-      </p:sp>
-      <p:sp>
-        <p:nvSpPr>
-          <p:cNvPr id="3" name="Notes Placeholder 2"/>
-          <p:cNvSpPr>
-            <a:spLocks noGrp="1"/>
-          </p:cNvSpPr>
-          <p:nvPr>
-            <p:ph type="body" idx="1"/>
-          </p:nvPr>
-        </p:nvSpPr>
-        <p:spPr/>
-        <p:txBody>
-          <a:bodyPr/>
-          <a:lstStyle/>
-          <a:p>
-            <a:r>
-              <a:rPr lang="en-US" dirty="0"/>
-              <a:t>WHY: tomorrow is the lowest-confidence topic. Sending them into the official overview and the Riverpod rationale tonight means Day 3 starts from their classification of today's code, not from theory.
-EXPECTED: Q1 ephemeral = local, one widget, nobody else needs it (form field text, dark mode is system-provided); app state = shared across screens (brand, last quote). Q2 InheritedWidget shares data down the tree efficiently; Provider adds lifecycle, DI, and simpler API. Q3 typically: compile-time safety (no ProviderNotFound at runtime), no BuildContext dependency (testable logic), combining providers, auto-dispose. Q4 app state → provider.</a:t>
-            </a:r>
-            <a:endParaRPr lang="en-US" dirty="0"/>
-          </a:p>
-        </p:txBody>
-      </p:sp>
-      <p:sp>
-        <p:nvSpPr>
-          <p:cNvPr id="4" name="Slide Number Placeholder 3"/>
-          <p:cNvSpPr>
-            <a:spLocks noGrp="1"/>
-          </p:cNvSpPr>
-          <p:nvPr>
-            <p:ph type="sldNum" sz="quarter" idx="10"/>
-          </p:nvPr>
-        </p:nvSpPr>
-        <p:spPr/>
-        <p:txBody>
-          <a:bodyPr/>
-          <a:lstStyle/>
-          <a:p>
-            <a:fld id="{F7021451-1387-4CA6-816F-3879F97B5CBC}" type="slidenum">
-              <a:rPr lang="en-US"/>
-              <a:t>34</a:t>
-            </a:fld>
-            <a:endParaRPr lang="en-US"/>
-          </a:p>
-        </p:txBody>
-      </p:sp>
-    </p:spTree>
-    <p:extLst>
-      <p:ext uri="{BB962C8B-B14F-4D97-AF65-F5344CB8AC3E}">
-        <p14:creationId xmlns:p14="http://schemas.microsoft.com/office/powerpoint/2010/main" val="1024086991"/>
-      </p:ext>
-    </p:extLst>
-  </p:cSld>
-  <p:clrMapOvr>
-    <a:masterClrMapping/>
-  </p:clrMapOvr>
-</p:notes>
-</file>
-
-<file path=ppt/notesSlides/notesSlide35.xml><?xml version="1.0" encoding="utf-8"?>
-<p:notes xmlns:a="http://schemas.openxmlformats.org/drawingml/2006/main" xmlns:r="http://schemas.openxmlformats.org/officeDocument/2006/relationships" xmlns:p="http://schemas.openxmlformats.org/presentationml/2006/main">
-  <p:cSld>
-    <p:spTree>
-      <p:nvGrpSpPr>
-        <p:cNvPr id="1" name=""/>
-        <p:cNvGrpSpPr/>
-        <p:nvPr/>
-      </p:nvGrpSpPr>
-      <p:grpSpPr>
-        <a:xfrm>
-          <a:off x="0" y="0"/>
-          <a:ext cx="0" cy="0"/>
-          <a:chOff x="0" y="0"/>
-          <a:chExt cx="0" cy="0"/>
-        </a:xfrm>
-      </p:grpSpPr>
-      <p:sp>
-        <p:nvSpPr>
-          <p:cNvPr id="2" name="Slide Image Placeholder 1"/>
-          <p:cNvSpPr>
-            <a:spLocks noGrp="1" noRot="1" noChangeAspect="1"/>
-          </p:cNvSpPr>
-          <p:nvPr>
-            <p:ph type="sldImg"/>
-          </p:nvPr>
-        </p:nvSpPr>
-        <p:spPr/>
-      </p:sp>
-      <p:sp>
-        <p:nvSpPr>
-          <p:cNvPr id="3" name="Notes Placeholder 2"/>
-          <p:cNvSpPr>
-            <a:spLocks noGrp="1"/>
-          </p:cNvSpPr>
-          <p:nvPr>
-            <p:ph type="body" idx="1"/>
-          </p:nvPr>
-        </p:nvSpPr>
-        <p:spPr/>
-        <p:txBody>
-          <a:bodyPr/>
-          <a:lstStyle/>
-          <a:p>
-            <a:r>
-              <a:rPr lang="en-US" dirty="0"/>
-              <a:t>SCRIPT: recap in three minutes, then the homework slide, then Q&amp;A. Ask: "Which of today's four errors have you already hit?" - it tells you who needs the Layout Explorer walk-through again tomorrow.
-PRESENTER: tonight, rebuild the Day 3 reference solution from the room's lab-2-3-solution branch, so the refactor demo starts from exactly their code.</a:t>
-            </a:r>
-            <a:endParaRPr lang="en-US" dirty="0"/>
-          </a:p>
-        </p:txBody>
-      </p:sp>
-      <p:sp>
-        <p:nvSpPr>
-          <p:cNvPr id="4" name="Slide Number Placeholder 3"/>
-          <p:cNvSpPr>
-            <a:spLocks noGrp="1"/>
-          </p:cNvSpPr>
-          <p:nvPr>
-            <p:ph type="sldNum" sz="quarter" idx="10"/>
-          </p:nvPr>
-        </p:nvSpPr>
-        <p:spPr/>
-        <p:txBody>
-          <a:bodyPr/>
-          <a:lstStyle/>
-          <a:p>
-            <a:fld id="{F7021451-1387-4CA6-816F-3879F97B5CBC}" type="slidenum">
-              <a:rPr lang="en-US"/>
-              <a:t>35</a:t>
-            </a:fld>
-            <a:endParaRPr lang="en-US"/>
-          </a:p>
-        </p:txBody>
-      </p:sp>
-    </p:spTree>
-    <p:extLst>
-      <p:ext uri="{BB962C8B-B14F-4D97-AF65-F5344CB8AC3E}">
-        <p14:creationId xmlns:p14="http://schemas.microsoft.com/office/powerpoint/2010/main" val="1024086991"/>
-      </p:ext>
-    </p:extLst>
-  </p:cSld>
-  <p:clrMapOvr>
-    <a:masterClrMapping/>
-  </p:clrMapOvr>
-</p:notes>
-</file>
-
-<file path=ppt/notesSlides/notesSlide36.xml><?xml version="1.0" encoding="utf-8"?>
-<p:notes xmlns:a="http://schemas.openxmlformats.org/drawingml/2006/main" xmlns:r="http://schemas.openxmlformats.org/officeDocument/2006/relationships" xmlns:p="http://schemas.openxmlformats.org/presentationml/2006/main">
-  <p:cSld>
-    <p:spTree>
-      <p:nvGrpSpPr>
-        <p:cNvPr id="1" name=""/>
-        <p:cNvGrpSpPr/>
-        <p:nvPr/>
-      </p:nvGrpSpPr>
-      <p:grpSpPr>
-        <a:xfrm>
-          <a:off x="0" y="0"/>
-          <a:ext cx="0" cy="0"/>
-          <a:chOff x="0" y="0"/>
-          <a:chExt cx="0" cy="0"/>
-        </a:xfrm>
-      </p:grpSpPr>
-      <p:sp>
-        <p:nvSpPr>
-          <p:cNvPr id="2" name="Slide Image Placeholder 1"/>
-          <p:cNvSpPr>
-            <a:spLocks noGrp="1" noRot="1" noChangeAspect="1"/>
-          </p:cNvSpPr>
-          <p:nvPr>
-            <p:ph type="sldImg"/>
-          </p:nvPr>
-        </p:nvSpPr>
-        <p:spPr/>
-      </p:sp>
-      <p:sp>
-        <p:nvSpPr>
-          <p:cNvPr id="3" name="Notes Placeholder 2"/>
-          <p:cNvSpPr>
-            <a:spLocks noGrp="1"/>
-          </p:cNvSpPr>
-          <p:nvPr>
-            <p:ph type="body" idx="1"/>
-          </p:nvPr>
-        </p:nvSpPr>
-        <p:spPr/>
-        <p:txBody>
-          <a:bodyPr/>
-          <a:lstStyle/>
-          <a:p>
-            <a:r>
-              <a:rPr lang="en-US" dirty="0"/>
-              <a:t>PRESENTER. Today is the survey's biggest gap, so protect lab time over slide time.
-PRE-MADE BROKEN FILES: on the USB stick, keep four files each containing one deliberate layout error (overflow, unbounded ListView, misplaced Expanded, TextField in Row). Switching files is faster and safer on a projector than typing a mistake live.
-IF YOU FALL BEHIND: the theming module can shrink to the BrandTheme class + toggle demo (10 min) and Lab 2.3 becomes homework. Days 3 and 5 only need BrandTheme to exist, not to be pretty.</a:t>
-            </a:r>
-            <a:endParaRPr lang="en-US" dirty="0"/>
-          </a:p>
-        </p:txBody>
-      </p:sp>
-      <p:sp>
-        <p:nvSpPr>
-          <p:cNvPr id="4" name="Slide Number Placeholder 3"/>
-          <p:cNvSpPr>
-            <a:spLocks noGrp="1"/>
-          </p:cNvSpPr>
-          <p:nvPr>
-            <p:ph type="sldNum" sz="quarter" idx="10"/>
-          </p:nvPr>
-        </p:nvSpPr>
-        <p:spPr/>
-        <p:txBody>
-          <a:bodyPr/>
-          <a:lstStyle/>
-          <a:p>
-            <a:fld id="{F7021451-1387-4CA6-816F-3879F97B5CBC}" type="slidenum">
-              <a:rPr lang="en-US"/>
-              <a:t>36</a:t>
-            </a:fld>
-            <a:endParaRPr lang="en-US"/>
-          </a:p>
-        </p:txBody>
-      </p:sp>
-    </p:spTree>
-    <p:extLst>
-      <p:ext uri="{BB962C8B-B14F-4D97-AF65-F5344CB8AC3E}">
-        <p14:creationId xmlns:p14="http://schemas.microsoft.com/office/powerpoint/2010/main" val="1024086991"/>
-      </p:ext>
-    </p:extLst>
-  </p:cSld>
-  <p:clrMapOvr>
-    <a:masterClrMapping/>
-  </p:clrMapOvr>
-</p:notes>
-</file>
-
-<file path=ppt/notesSlides/notesSlide37.xml><?xml version="1.0" encoding="utf-8"?>
-<p:notes xmlns:a="http://schemas.openxmlformats.org/drawingml/2006/main" xmlns:r="http://schemas.openxmlformats.org/officeDocument/2006/relationships" xmlns:p="http://schemas.openxmlformats.org/presentationml/2006/main">
-  <p:cSld>
-    <p:spTree>
-      <p:nvGrpSpPr>
-        <p:cNvPr id="1" name=""/>
-        <p:cNvGrpSpPr/>
-        <p:nvPr/>
-      </p:nvGrpSpPr>
-      <p:grpSpPr>
-        <a:xfrm>
-          <a:off x="0" y="0"/>
-          <a:ext cx="0" cy="0"/>
-          <a:chOff x="0" y="0"/>
-          <a:chExt cx="0" cy="0"/>
-        </a:xfrm>
-      </p:grpSpPr>
-      <p:sp>
-        <p:nvSpPr>
-          <p:cNvPr id="2" name="Slide Image Placeholder 1"/>
-          <p:cNvSpPr>
-            <a:spLocks noGrp="1" noRot="1" noChangeAspect="1"/>
-          </p:cNvSpPr>
-          <p:nvPr>
-            <p:ph type="sldImg"/>
-          </p:nvPr>
-        </p:nvSpPr>
-        <p:spPr/>
-      </p:sp>
-      <p:sp>
-        <p:nvSpPr>
-          <p:cNvPr id="3" name="Notes Placeholder 2"/>
-          <p:cNvSpPr>
-            <a:spLocks noGrp="1"/>
-          </p:cNvSpPr>
-          <p:nvPr>
-            <p:ph type="body" idx="1"/>
-          </p:nvPr>
-        </p:nvSpPr>
-        <p:spPr/>
-        <p:txBody>
-          <a:bodyPr/>
-          <a:lstStyle/>
-          <a:p>
-            <a:r>
-              <a:rPr lang="en-US" dirty="0"/>
-              <a:t>Appendix for the projector when a lab stalls.</a:t>
-            </a:r>
-            <a:endParaRPr lang="en-US" dirty="0"/>
-          </a:p>
-        </p:txBody>
-      </p:sp>
-      <p:sp>
-        <p:nvSpPr>
-          <p:cNvPr id="4" name="Slide Number Placeholder 3"/>
-          <p:cNvSpPr>
-            <a:spLocks noGrp="1"/>
-          </p:cNvSpPr>
-          <p:nvPr>
-            <p:ph type="sldNum" sz="quarter" idx="10"/>
-          </p:nvPr>
-        </p:nvSpPr>
-        <p:spPr/>
-        <p:txBody>
-          <a:bodyPr/>
-          <a:lstStyle/>
-          <a:p>
-            <a:fld id="{F7021451-1387-4CA6-816F-3879F97B5CBC}" type="slidenum">
-              <a:rPr lang="en-US"/>
-              <a:t>37</a:t>
-            </a:fld>
-            <a:endParaRPr lang="en-US"/>
-          </a:p>
-        </p:txBody>
-      </p:sp>
-    </p:spTree>
-    <p:extLst>
-      <p:ext uri="{BB962C8B-B14F-4D97-AF65-F5344CB8AC3E}">
-        <p14:creationId xmlns:p14="http://schemas.microsoft.com/office/powerpoint/2010/main" val="1024086991"/>
-      </p:ext>
-    </p:extLst>
-  </p:cSld>
-  <p:clrMapOvr>
-    <a:masterClrMapping/>
-  </p:clrMapOvr>
-</p:notes>
-</file>
-
-<file path=ppt/notesSlides/notesSlide38.xml><?xml version="1.0" encoding="utf-8"?>
-<p:notes xmlns:a="http://schemas.openxmlformats.org/drawingml/2006/main" xmlns:r="http://schemas.openxmlformats.org/officeDocument/2006/relationships" xmlns:p="http://schemas.openxmlformats.org/presentationml/2006/main">
-  <p:cSld>
-    <p:spTree>
-      <p:nvGrpSpPr>
-        <p:cNvPr id="1" name=""/>
-        <p:cNvGrpSpPr/>
-        <p:nvPr/>
-      </p:nvGrpSpPr>
-      <p:grpSpPr>
-        <a:xfrm>
-          <a:off x="0" y="0"/>
-          <a:ext cx="0" cy="0"/>
-          <a:chOff x="0" y="0"/>
-          <a:chExt cx="0" cy="0"/>
-        </a:xfrm>
-      </p:grpSpPr>
-      <p:sp>
-        <p:nvSpPr>
-          <p:cNvPr id="2" name="Slide Image Placeholder 1"/>
-          <p:cNvSpPr>
-            <a:spLocks noGrp="1" noRot="1" noChangeAspect="1"/>
-          </p:cNvSpPr>
-          <p:nvPr>
-            <p:ph type="sldImg"/>
-          </p:nvPr>
-        </p:nvSpPr>
-        <p:spPr/>
-      </p:sp>
-      <p:sp>
-        <p:nvSpPr>
-          <p:cNvPr id="3" name="Notes Placeholder 2"/>
-          <p:cNvSpPr>
-            <a:spLocks noGrp="1"/>
-          </p:cNvSpPr>
-          <p:nvPr>
-            <p:ph type="body" idx="1"/>
-          </p:nvPr>
-        </p:nvSpPr>
-        <p:spPr/>
-        <p:txBody>
-          <a:bodyPr/>
-          <a:lstStyle/>
-          <a:p>
-            <a:r>
-              <a:rPr lang="en-US" dirty="0"/>
-              <a:t>Keep this on the second display during labs.</a:t>
-            </a:r>
-            <a:endParaRPr lang="en-US" dirty="0"/>
-          </a:p>
-        </p:txBody>
-      </p:sp>
-      <p:sp>
-        <p:nvSpPr>
-          <p:cNvPr id="4" name="Slide Number Placeholder 3"/>
-          <p:cNvSpPr>
-            <a:spLocks noGrp="1"/>
-          </p:cNvSpPr>
-          <p:nvPr>
-            <p:ph type="sldNum" sz="quarter" idx="10"/>
-          </p:nvPr>
-        </p:nvSpPr>
-        <p:spPr/>
-        <p:txBody>
-          <a:bodyPr/>
-          <a:lstStyle/>
-          <a:p>
-            <a:fld id="{F7021451-1387-4CA6-816F-3879F97B5CBC}" type="slidenum">
-              <a:rPr lang="en-US"/>
-              <a:t>38</a:t>
-            </a:fld>
-            <a:endParaRPr lang="en-US"/>
-          </a:p>
-        </p:txBody>
-      </p:sp>
-    </p:spTree>
-    <p:extLst>
-      <p:ext uri="{BB962C8B-B14F-4D97-AF65-F5344CB8AC3E}">
-        <p14:creationId xmlns:p14="http://schemas.microsoft.com/office/powerpoint/2010/main" val="1024086991"/>
-      </p:ext>
-    </p:extLst>
-  </p:cSld>
-  <p:clrMapOvr>
-    <a:masterClrMapping/>
-  </p:clrMapOvr>
-</p:notes>
-</file>
-
-<file path=ppt/notesSlides/notesSlide39.xml><?xml version="1.0" encoding="utf-8"?>
-<p:notes xmlns:a="http://schemas.openxmlformats.org/drawingml/2006/main" xmlns:r="http://schemas.openxmlformats.org/officeDocument/2006/relationships" xmlns:p="http://schemas.openxmlformats.org/presentationml/2006/main">
-  <p:cSld>
-    <p:spTree>
-      <p:nvGrpSpPr>
-        <p:cNvPr id="1" name=""/>
-        <p:cNvGrpSpPr/>
-        <p:nvPr/>
-      </p:nvGrpSpPr>
-      <p:grpSpPr>
-        <a:xfrm>
-          <a:off x="0" y="0"/>
-          <a:ext cx="0" cy="0"/>
-          <a:chOff x="0" y="0"/>
-          <a:chExt cx="0" cy="0"/>
-        </a:xfrm>
-      </p:grpSpPr>
-      <p:sp>
-        <p:nvSpPr>
-          <p:cNvPr id="2" name="Slide Image Placeholder 1"/>
-          <p:cNvSpPr>
-            <a:spLocks noGrp="1" noRot="1" noChangeAspect="1"/>
-          </p:cNvSpPr>
-          <p:nvPr>
-            <p:ph type="sldImg"/>
-          </p:nvPr>
-        </p:nvSpPr>
-        <p:spPr/>
-      </p:sp>
-      <p:sp>
-        <p:nvSpPr>
-          <p:cNvPr id="3" name="Notes Placeholder 2"/>
-          <p:cNvSpPr>
-            <a:spLocks noGrp="1"/>
-          </p:cNvSpPr>
-          <p:nvPr>
-            <p:ph type="body" idx="1"/>
-          </p:nvPr>
-        </p:nvSpPr>
-        <p:spPr/>
-        <p:txBody>
-          <a:bodyPr/>
-          <a:lstStyle/>
-          <a:p>
-            <a:r>
-              <a:rPr lang="en-US" dirty="0"/>
-              <a:t>Solution. The LayoutBuilder threshold (700) is deliberately above the Material "medium" breakpoint so phones in landscape stay single-column.</a:t>
-            </a:r>
-            <a:endParaRPr lang="en-US" dirty="0"/>
-          </a:p>
-        </p:txBody>
-      </p:sp>
-      <p:sp>
-        <p:nvSpPr>
-          <p:cNvPr id="4" name="Slide Number Placeholder 3"/>
-          <p:cNvSpPr>
-            <a:spLocks noGrp="1"/>
-          </p:cNvSpPr>
-          <p:nvPr>
-            <p:ph type="sldNum" sz="quarter" idx="10"/>
-          </p:nvPr>
-        </p:nvSpPr>
-        <p:spPr/>
-        <p:txBody>
-          <a:bodyPr/>
-          <a:lstStyle/>
-          <a:p>
-            <a:fld id="{F7021451-1387-4CA6-816F-3879F97B5CBC}" type="slidenum">
-              <a:rPr lang="en-US"/>
-              <a:t>39</a:t>
-            </a:fld>
-            <a:endParaRPr lang="en-US"/>
-          </a:p>
-        </p:txBody>
-      </p:sp>
-    </p:spTree>
-    <p:extLst>
-      <p:ext uri="{BB962C8B-B14F-4D97-AF65-F5344CB8AC3E}">
-        <p14:creationId xmlns:p14="http://schemas.microsoft.com/office/powerpoint/2010/main" val="1024086991"/>
-      </p:ext>
-    </p:extLst>
-  </p:cSld>
-  <p:clrMapOvr>
-    <a:masterClrMapping/>
-  </p:clrMapOvr>
-</p:notes>
-</file>
-
-<file path=ppt/notesSlides/notesSlide4.xml><?xml version="1.0" encoding="utf-8"?>
-<p:notes xmlns:a="http://schemas.openxmlformats.org/drawingml/2006/main" xmlns:r="http://schemas.openxmlformats.org/officeDocument/2006/relationships" xmlns:p="http://schemas.openxmlformats.org/presentationml/2006/main">
-  <p:cSld>
-    <p:spTree>
-      <p:nvGrpSpPr>
-        <p:cNvPr id="1" name=""/>
-        <p:cNvGrpSpPr/>
-        <p:nvPr/>
-      </p:nvGrpSpPr>
-      <p:grpSpPr>
-        <a:xfrm>
-          <a:off x="0" y="0"/>
-          <a:ext cx="0" cy="0"/>
-          <a:chOff x="0" y="0"/>
-          <a:chExt cx="0" cy="0"/>
-        </a:xfrm>
-      </p:grpSpPr>
-      <p:sp>
-        <p:nvSpPr>
-          <p:cNvPr id="2" name="Slide Image Placeholder 1"/>
-          <p:cNvSpPr>
-            <a:spLocks noGrp="1" noRot="1" noChangeAspect="1"/>
-          </p:cNvSpPr>
-          <p:nvPr>
-            <p:ph type="sldImg"/>
-          </p:nvPr>
-        </p:nvSpPr>
-        <p:spPr/>
-      </p:sp>
-      <p:sp>
-        <p:nvSpPr>
-          <p:cNvPr id="3" name="Notes Placeholder 2"/>
-          <p:cNvSpPr>
-            <a:spLocks noGrp="1"/>
-          </p:cNvSpPr>
-          <p:nvPr>
-            <p:ph type="body" idx="1"/>
-          </p:nvPr>
-        </p:nvSpPr>
-        <p:spPr/>
-        <p:txBody>
-          <a:bodyPr/>
-          <a:lstStyle/>
-          <a:p>
-            <a:r>
-              <a:rPr lang="en-US" dirty="0"/>
-              <a:t>SCRIPT: Short module; most of these widgets you met yesterday. The value is the button table (which one when) and the Stateless/Stateful decision rule, plus two habits: Extract Widget and const.</a:t>
-            </a:r>
-            <a:endParaRPr lang="en-US" dirty="0"/>
-          </a:p>
-        </p:txBody>
-      </p:sp>
-      <p:sp>
-        <p:nvSpPr>
-          <p:cNvPr id="4" name="Slide Number Placeholder 3"/>
-          <p:cNvSpPr>
-            <a:spLocks noGrp="1"/>
-          </p:cNvSpPr>
-          <p:nvPr>
-            <p:ph type="sldNum" sz="quarter" idx="10"/>
-          </p:nvPr>
-        </p:nvSpPr>
-        <p:spPr/>
-        <p:txBody>
-          <a:bodyPr/>
-          <a:lstStyle/>
-          <a:p>
-            <a:fld id="{F7021451-1387-4CA6-816F-3879F97B5CBC}" type="slidenum">
-              <a:rPr lang="en-US"/>
-              <a:t>4</a:t>
-            </a:fld>
-            <a:endParaRPr lang="en-US"/>
-          </a:p>
-        </p:txBody>
-      </p:sp>
-    </p:spTree>
-    <p:extLst>
-      <p:ext uri="{BB962C8B-B14F-4D97-AF65-F5344CB8AC3E}">
-        <p14:creationId xmlns:p14="http://schemas.microsoft.com/office/powerpoint/2010/main" val="1024086991"/>
-      </p:ext>
-    </p:extLst>
-  </p:cSld>
-  <p:clrMapOvr>
-    <a:masterClrMapping/>
-  </p:clrMapOvr>
-</p:notes>
-</file>
-
-<file path=ppt/notesSlides/notesSlide40.xml><?xml version="1.0" encoding="utf-8"?>
-<p:notes xmlns:a="http://schemas.openxmlformats.org/drawingml/2006/main" xmlns:r="http://schemas.openxmlformats.org/officeDocument/2006/relationships" xmlns:p="http://schemas.openxmlformats.org/presentationml/2006/main">
-  <p:cSld>
-    <p:spTree>
-      <p:nvGrpSpPr>
-        <p:cNvPr id="1" name=""/>
-        <p:cNvGrpSpPr/>
-        <p:nvPr/>
-      </p:nvGrpSpPr>
-      <p:grpSpPr>
-        <a:xfrm>
-          <a:off x="0" y="0"/>
-          <a:ext cx="0" cy="0"/>
-          <a:chOff x="0" y="0"/>
-          <a:chExt cx="0" cy="0"/>
-        </a:xfrm>
-      </p:grpSpPr>
-      <p:sp>
-        <p:nvSpPr>
-          <p:cNvPr id="2" name="Slide Image Placeholder 1"/>
-          <p:cNvSpPr>
-            <a:spLocks noGrp="1" noRot="1" noChangeAspect="1"/>
-          </p:cNvSpPr>
-          <p:nvPr>
-            <p:ph type="sldImg"/>
-          </p:nvPr>
-        </p:nvSpPr>
-        <p:spPr/>
-      </p:sp>
-      <p:sp>
-        <p:nvSpPr>
-          <p:cNvPr id="3" name="Notes Placeholder 2"/>
-          <p:cNvSpPr>
-            <a:spLocks noGrp="1"/>
-          </p:cNvSpPr>
-          <p:nvPr>
-            <p:ph type="body" idx="1"/>
-          </p:nvPr>
-        </p:nvSpPr>
-        <p:spPr/>
-        <p:txBody>
-          <a:bodyPr/>
-          <a:lstStyle/>
-          <a:p>
-            <a:r>
-              <a:rPr lang="en-US" dirty="0"/>
-              <a:t>Solution. The LayoutBuilder threshold (700) is deliberately above the Material "medium" breakpoint so phones in landscape stay single-column.</a:t>
-            </a:r>
-            <a:endParaRPr lang="en-US" dirty="0"/>
-          </a:p>
-        </p:txBody>
-      </p:sp>
-      <p:sp>
-        <p:nvSpPr>
-          <p:cNvPr id="4" name="Slide Number Placeholder 3"/>
-          <p:cNvSpPr>
-            <a:spLocks noGrp="1"/>
-          </p:cNvSpPr>
-          <p:nvPr>
-            <p:ph type="sldNum" sz="quarter" idx="10"/>
-          </p:nvPr>
-        </p:nvSpPr>
-        <p:spPr/>
-        <p:txBody>
-          <a:bodyPr/>
-          <a:lstStyle/>
-          <a:p>
-            <a:fld id="{F7021451-1387-4CA6-816F-3879F97B5CBC}" type="slidenum">
-              <a:rPr lang="en-US"/>
-              <a:t>40</a:t>
-            </a:fld>
-            <a:endParaRPr lang="en-US"/>
-          </a:p>
-        </p:txBody>
-      </p:sp>
-    </p:spTree>
-    <p:extLst>
-      <p:ext uri="{BB962C8B-B14F-4D97-AF65-F5344CB8AC3E}">
-        <p14:creationId xmlns:p14="http://schemas.microsoft.com/office/powerpoint/2010/main" val="1024086991"/>
-      </p:ext>
-    </p:extLst>
-  </p:cSld>
-  <p:clrMapOvr>
-    <a:masterClrMapping/>
-  </p:clrMapOvr>
-</p:notes>
-</file>
-
-<file path=ppt/notesSlides/notesSlide41.xml><?xml version="1.0" encoding="utf-8"?>
-<p:notes xmlns:a="http://schemas.openxmlformats.org/drawingml/2006/main" xmlns:r="http://schemas.openxmlformats.org/officeDocument/2006/relationships" xmlns:p="http://schemas.openxmlformats.org/presentationml/2006/main">
-  <p:cSld>
-    <p:spTree>
-      <p:nvGrpSpPr>
-        <p:cNvPr id="1" name=""/>
-        <p:cNvGrpSpPr/>
-        <p:nvPr/>
-      </p:nvGrpSpPr>
-      <p:grpSpPr>
-        <a:xfrm>
-          <a:off x="0" y="0"/>
-          <a:ext cx="0" cy="0"/>
-          <a:chOff x="0" y="0"/>
-          <a:chExt cx="0" cy="0"/>
-        </a:xfrm>
-      </p:grpSpPr>
-      <p:sp>
-        <p:nvSpPr>
-          <p:cNvPr id="2" name="Slide Image Placeholder 1"/>
-          <p:cNvSpPr>
-            <a:spLocks noGrp="1" noRot="1" noChangeAspect="1"/>
-          </p:cNvSpPr>
-          <p:nvPr>
-            <p:ph type="sldImg"/>
-          </p:nvPr>
-        </p:nvSpPr>
-        <p:spPr/>
-      </p:sp>
-      <p:sp>
-        <p:nvSpPr>
-          <p:cNvPr id="3" name="Notes Placeholder 2"/>
-          <p:cNvSpPr>
-            <a:spLocks noGrp="1"/>
-          </p:cNvSpPr>
-          <p:nvPr>
-            <p:ph type="body" idx="1"/>
-          </p:nvPr>
-        </p:nvSpPr>
-        <p:spPr/>
-        <p:txBody>
-          <a:bodyPr/>
-          <a:lstStyle/>
-          <a:p>
-            <a:r>
-              <a:rPr lang="en-US" dirty="0"/>
-              <a:t>Solution.</a:t>
-            </a:r>
-            <a:endParaRPr lang="en-US" dirty="0"/>
-          </a:p>
-        </p:txBody>
-      </p:sp>
-      <p:sp>
-        <p:nvSpPr>
-          <p:cNvPr id="4" name="Slide Number Placeholder 3"/>
-          <p:cNvSpPr>
-            <a:spLocks noGrp="1"/>
-          </p:cNvSpPr>
-          <p:nvPr>
-            <p:ph type="sldNum" sz="quarter" idx="10"/>
-          </p:nvPr>
-        </p:nvSpPr>
-        <p:spPr/>
-        <p:txBody>
-          <a:bodyPr/>
-          <a:lstStyle/>
-          <a:p>
-            <a:fld id="{F7021451-1387-4CA6-816F-3879F97B5CBC}" type="slidenum">
-              <a:rPr lang="en-US"/>
-              <a:t>41</a:t>
-            </a:fld>
-            <a:endParaRPr lang="en-US"/>
-          </a:p>
-        </p:txBody>
-      </p:sp>
-    </p:spTree>
-    <p:extLst>
-      <p:ext uri="{BB962C8B-B14F-4D97-AF65-F5344CB8AC3E}">
-        <p14:creationId xmlns:p14="http://schemas.microsoft.com/office/powerpoint/2010/main" val="1024086991"/>
-      </p:ext>
-    </p:extLst>
-  </p:cSld>
-  <p:clrMapOvr>
-    <a:masterClrMapping/>
-  </p:clrMapOvr>
-</p:notes>
-</file>
-
-<file path=ppt/notesSlides/notesSlide42.xml><?xml version="1.0" encoding="utf-8"?>
-<p:notes xmlns:a="http://schemas.openxmlformats.org/drawingml/2006/main" xmlns:r="http://schemas.openxmlformats.org/officeDocument/2006/relationships" xmlns:p="http://schemas.openxmlformats.org/presentationml/2006/main">
-  <p:cSld>
-    <p:spTree>
-      <p:nvGrpSpPr>
-        <p:cNvPr id="1" name=""/>
-        <p:cNvGrpSpPr/>
-        <p:nvPr/>
-      </p:nvGrpSpPr>
-      <p:grpSpPr>
-        <a:xfrm>
-          <a:off x="0" y="0"/>
-          <a:ext cx="0" cy="0"/>
-          <a:chOff x="0" y="0"/>
-          <a:chExt cx="0" cy="0"/>
-        </a:xfrm>
-      </p:grpSpPr>
-      <p:sp>
-        <p:nvSpPr>
-          <p:cNvPr id="2" name="Slide Image Placeholder 1"/>
-          <p:cNvSpPr>
-            <a:spLocks noGrp="1" noRot="1" noChangeAspect="1"/>
-          </p:cNvSpPr>
-          <p:nvPr>
-            <p:ph type="sldImg"/>
-          </p:nvPr>
-        </p:nvSpPr>
-        <p:spPr/>
-      </p:sp>
-      <p:sp>
-        <p:nvSpPr>
-          <p:cNvPr id="3" name="Notes Placeholder 2"/>
-          <p:cNvSpPr>
-            <a:spLocks noGrp="1"/>
-          </p:cNvSpPr>
-          <p:nvPr>
-            <p:ph type="body" idx="1"/>
-          </p:nvPr>
-        </p:nvSpPr>
-        <p:spPr/>
-        <p:txBody>
-          <a:bodyPr/>
-          <a:lstStyle/>
-          <a:p>
-            <a:r>
-              <a:rPr lang="en-US" dirty="0"/>
-              <a:t>Full version of the ListView slide, used again on Day 4 with SQLite data.</a:t>
-            </a:r>
-            <a:endParaRPr lang="en-US" dirty="0"/>
-          </a:p>
-        </p:txBody>
-      </p:sp>
-      <p:sp>
-        <p:nvSpPr>
-          <p:cNvPr id="4" name="Slide Number Placeholder 3"/>
-          <p:cNvSpPr>
-            <a:spLocks noGrp="1"/>
-          </p:cNvSpPr>
-          <p:nvPr>
-            <p:ph type="sldNum" sz="quarter" idx="10"/>
-          </p:nvPr>
-        </p:nvSpPr>
-        <p:spPr/>
-        <p:txBody>
-          <a:bodyPr/>
-          <a:lstStyle/>
-          <a:p>
-            <a:fld id="{F7021451-1387-4CA6-816F-3879F97B5CBC}" type="slidenum">
-              <a:rPr lang="en-US"/>
-              <a:t>42</a:t>
-            </a:fld>
-            <a:endParaRPr lang="en-US"/>
-          </a:p>
-        </p:txBody>
-      </p:sp>
-    </p:spTree>
-    <p:extLst>
-      <p:ext uri="{BB962C8B-B14F-4D97-AF65-F5344CB8AC3E}">
-        <p14:creationId xmlns:p14="http://schemas.microsoft.com/office/powerpoint/2010/main" val="1024086991"/>
-      </p:ext>
-    </p:extLst>
-  </p:cSld>
-  <p:clrMapOvr>
-    <a:masterClrMapping/>
-  </p:clrMapOvr>
-</p:notes>
-</file>
-
-<file path=ppt/notesSlides/notesSlide43.xml><?xml version="1.0" encoding="utf-8"?>
-<p:notes xmlns:a="http://schemas.openxmlformats.org/drawingml/2006/main" xmlns:r="http://schemas.openxmlformats.org/officeDocument/2006/relationships" xmlns:p="http://schemas.openxmlformats.org/presentationml/2006/main">
-  <p:cSld>
-    <p:spTree>
-      <p:nvGrpSpPr>
-        <p:cNvPr id="1" name=""/>
-        <p:cNvGrpSpPr/>
-        <p:nvPr/>
-      </p:nvGrpSpPr>
-      <p:grpSpPr>
-        <a:xfrm>
-          <a:off x="0" y="0"/>
-          <a:ext cx="0" cy="0"/>
-          <a:chOff x="0" y="0"/>
-          <a:chExt cx="0" cy="0"/>
-        </a:xfrm>
-      </p:grpSpPr>
-      <p:sp>
-        <p:nvSpPr>
-          <p:cNvPr id="2" name="Slide Image Placeholder 1"/>
-          <p:cNvSpPr>
-            <a:spLocks noGrp="1" noRot="1" noChangeAspect="1"/>
-          </p:cNvSpPr>
-          <p:nvPr>
-            <p:ph type="sldImg"/>
-          </p:nvPr>
-        </p:nvSpPr>
-        <p:spPr/>
-      </p:sp>
-      <p:sp>
-        <p:nvSpPr>
-          <p:cNvPr id="3" name="Notes Placeholder 2"/>
-          <p:cNvSpPr>
-            <a:spLocks noGrp="1"/>
-          </p:cNvSpPr>
-          <p:nvPr>
-            <p:ph type="body" idx="1"/>
-          </p:nvPr>
-        </p:nvSpPr>
-        <p:spPr/>
-        <p:txBody>
-          <a:bodyPr/>
-          <a:lstStyle/>
-          <a:p>
-            <a:r>
-              <a:rPr lang="en-US" dirty="0"/>
-              <a:t>Full version of the ListView slide, used again on Day 4 with SQLite data.</a:t>
-            </a:r>
-            <a:endParaRPr lang="en-US" dirty="0"/>
-          </a:p>
-        </p:txBody>
-      </p:sp>
-      <p:sp>
-        <p:nvSpPr>
-          <p:cNvPr id="4" name="Slide Number Placeholder 3"/>
-          <p:cNvSpPr>
-            <a:spLocks noGrp="1"/>
-          </p:cNvSpPr>
-          <p:nvPr>
-            <p:ph type="sldNum" sz="quarter" idx="10"/>
-          </p:nvPr>
-        </p:nvSpPr>
-        <p:spPr/>
-        <p:txBody>
-          <a:bodyPr/>
-          <a:lstStyle/>
-          <a:p>
-            <a:fld id="{F7021451-1387-4CA6-816F-3879F97B5CBC}" type="slidenum">
-              <a:rPr lang="en-US"/>
-              <a:t>43</a:t>
-            </a:fld>
-            <a:endParaRPr lang="en-US"/>
-          </a:p>
-        </p:txBody>
-      </p:sp>
-    </p:spTree>
-    <p:extLst>
-      <p:ext uri="{BB962C8B-B14F-4D97-AF65-F5344CB8AC3E}">
-        <p14:creationId xmlns:p14="http://schemas.microsoft.com/office/powerpoint/2010/main" val="1024086991"/>
-      </p:ext>
-    </p:extLst>
-  </p:cSld>
-  <p:clrMapOvr>
-    <a:masterClrMapping/>
-  </p:clrMapOvr>
-</p:notes>
-</file>
-
-<file path=ppt/notesSlides/notesSlide44.xml><?xml version="1.0" encoding="utf-8"?>
-<p:notes xmlns:a="http://schemas.openxmlformats.org/drawingml/2006/main" xmlns:r="http://schemas.openxmlformats.org/officeDocument/2006/relationships" xmlns:p="http://schemas.openxmlformats.org/presentationml/2006/main">
-  <p:cSld>
-    <p:spTree>
-      <p:nvGrpSpPr>
-        <p:cNvPr id="1" name=""/>
-        <p:cNvGrpSpPr/>
-        <p:nvPr/>
-      </p:nvGrpSpPr>
-      <p:grpSpPr>
-        <a:xfrm>
-          <a:off x="0" y="0"/>
-          <a:ext cx="0" cy="0"/>
-          <a:chOff x="0" y="0"/>
-          <a:chExt cx="0" cy="0"/>
-        </a:xfrm>
-      </p:grpSpPr>
-      <p:sp>
-        <p:nvSpPr>
-          <p:cNvPr id="2" name="Slide Image Placeholder 1"/>
-          <p:cNvSpPr>
-            <a:spLocks noGrp="1" noRot="1" noChangeAspect="1"/>
-          </p:cNvSpPr>
-          <p:nvPr>
-            <p:ph type="sldImg"/>
-          </p:nvPr>
-        </p:nvSpPr>
-        <p:spPr/>
-      </p:sp>
-      <p:sp>
-        <p:nvSpPr>
-          <p:cNvPr id="3" name="Notes Placeholder 2"/>
-          <p:cNvSpPr>
-            <a:spLocks noGrp="1"/>
-          </p:cNvSpPr>
-          <p:nvPr>
-            <p:ph type="body" idx="1"/>
-          </p:nvPr>
-        </p:nvSpPr>
-        <p:spPr/>
-        <p:txBody>
-          <a:bodyPr/>
-          <a:lstStyle/>
-          <a:p>
-            <a:r>
-              <a:rPr lang="en-US" dirty="0"/>
-              <a:t>Reference for the GridView slide questions.</a:t>
-            </a:r>
-            <a:endParaRPr lang="en-US" dirty="0"/>
-          </a:p>
-        </p:txBody>
-      </p:sp>
-      <p:sp>
-        <p:nvSpPr>
-          <p:cNvPr id="4" name="Slide Number Placeholder 3"/>
-          <p:cNvSpPr>
-            <a:spLocks noGrp="1"/>
-          </p:cNvSpPr>
-          <p:nvPr>
-            <p:ph type="sldNum" sz="quarter" idx="10"/>
-          </p:nvPr>
-        </p:nvSpPr>
-        <p:spPr/>
-        <p:txBody>
-          <a:bodyPr/>
-          <a:lstStyle/>
-          <a:p>
-            <a:fld id="{F7021451-1387-4CA6-816F-3879F97B5CBC}" type="slidenum">
-              <a:rPr lang="en-US"/>
-              <a:t>44</a:t>
-            </a:fld>
-            <a:endParaRPr lang="en-US"/>
-          </a:p>
-        </p:txBody>
-      </p:sp>
-    </p:spTree>
-    <p:extLst>
-      <p:ext uri="{BB962C8B-B14F-4D97-AF65-F5344CB8AC3E}">
-        <p14:creationId xmlns:p14="http://schemas.microsoft.com/office/powerpoint/2010/main" val="1024086991"/>
-      </p:ext>
-    </p:extLst>
-  </p:cSld>
-  <p:clrMapOvr>
-    <a:masterClrMapping/>
-  </p:clrMapOvr>
-</p:notes>
-</file>
-
-<file path=ppt/notesSlides/notesSlide45.xml><?xml version="1.0" encoding="utf-8"?>
-<p:notes xmlns:a="http://schemas.openxmlformats.org/drawingml/2006/main" xmlns:r="http://schemas.openxmlformats.org/officeDocument/2006/relationships" xmlns:p="http://schemas.openxmlformats.org/presentationml/2006/main">
-  <p:cSld>
-    <p:spTree>
-      <p:nvGrpSpPr>
-        <p:cNvPr id="1" name=""/>
-        <p:cNvGrpSpPr/>
-        <p:nvPr/>
-      </p:nvGrpSpPr>
-      <p:grpSpPr>
-        <a:xfrm>
-          <a:off x="0" y="0"/>
-          <a:ext cx="0" cy="0"/>
-          <a:chOff x="0" y="0"/>
-          <a:chExt cx="0" cy="0"/>
-        </a:xfrm>
-      </p:grpSpPr>
-      <p:sp>
-        <p:nvSpPr>
-          <p:cNvPr id="2" name="Slide Image Placeholder 1"/>
-          <p:cNvSpPr>
-            <a:spLocks noGrp="1" noRot="1" noChangeAspect="1"/>
-          </p:cNvSpPr>
-          <p:nvPr>
-            <p:ph type="sldImg"/>
-          </p:nvPr>
-        </p:nvSpPr>
-        <p:spPr/>
-      </p:sp>
-      <p:sp>
-        <p:nvSpPr>
-          <p:cNvPr id="3" name="Notes Placeholder 2"/>
-          <p:cNvSpPr>
-            <a:spLocks noGrp="1"/>
-          </p:cNvSpPr>
-          <p:nvPr>
-            <p:ph type="body" idx="1"/>
-          </p:nvPr>
-        </p:nvSpPr>
-        <p:spPr/>
-        <p:txBody>
-          <a:bodyPr/>
-          <a:lstStyle/>
-          <a:p>
-            <a:r>
-              <a:rPr lang="en-US" dirty="0"/>
-              <a:t>The import list is the thing people miss; put it on screen if someone has "Undefined name" errors.</a:t>
-            </a:r>
-            <a:endParaRPr lang="en-US" dirty="0"/>
-          </a:p>
-        </p:txBody>
-      </p:sp>
-      <p:sp>
-        <p:nvSpPr>
-          <p:cNvPr id="4" name="Slide Number Placeholder 3"/>
-          <p:cNvSpPr>
-            <a:spLocks noGrp="1"/>
-          </p:cNvSpPr>
-          <p:nvPr>
-            <p:ph type="sldNum" sz="quarter" idx="10"/>
-          </p:nvPr>
-        </p:nvSpPr>
-        <p:spPr/>
-        <p:txBody>
-          <a:bodyPr/>
-          <a:lstStyle/>
-          <a:p>
-            <a:fld id="{F7021451-1387-4CA6-816F-3879F97B5CBC}" type="slidenum">
-              <a:rPr lang="en-US"/>
-              <a:t>45</a:t>
-            </a:fld>
-            <a:endParaRPr lang="en-US"/>
-          </a:p>
-        </p:txBody>
-      </p:sp>
-    </p:spTree>
-    <p:extLst>
-      <p:ext uri="{BB962C8B-B14F-4D97-AF65-F5344CB8AC3E}">
-        <p14:creationId xmlns:p14="http://schemas.microsoft.com/office/powerpoint/2010/main" val="1024086991"/>
-      </p:ext>
-    </p:extLst>
-  </p:cSld>
-  <p:clrMapOvr>
-    <a:masterClrMapping/>
-  </p:clrMapOvr>
-</p:notes>
-</file>
-
-<file path=ppt/notesSlides/notesSlide46.xml><?xml version="1.0" encoding="utf-8"?>
-<p:notes xmlns:a="http://schemas.openxmlformats.org/drawingml/2006/main" xmlns:r="http://schemas.openxmlformats.org/officeDocument/2006/relationships" xmlns:p="http://schemas.openxmlformats.org/presentationml/2006/main">
-  <p:cSld>
-    <p:spTree>
-      <p:nvGrpSpPr>
-        <p:cNvPr id="1" name=""/>
-        <p:cNvGrpSpPr/>
-        <p:nvPr/>
-      </p:nvGrpSpPr>
-      <p:grpSpPr>
-        <a:xfrm>
-          <a:off x="0" y="0"/>
-          <a:ext cx="0" cy="0"/>
-          <a:chOff x="0" y="0"/>
-          <a:chExt cx="0" cy="0"/>
-        </a:xfrm>
-      </p:grpSpPr>
-      <p:sp>
-        <p:nvSpPr>
-          <p:cNvPr id="2" name="Slide Image Placeholder 1"/>
-          <p:cNvSpPr>
-            <a:spLocks noGrp="1" noRot="1" noChangeAspect="1"/>
-          </p:cNvSpPr>
-          <p:nvPr>
-            <p:ph type="sldImg"/>
-          </p:nvPr>
-        </p:nvSpPr>
-        <p:spPr/>
-      </p:sp>
-      <p:sp>
-        <p:nvSpPr>
-          <p:cNvPr id="3" name="Notes Placeholder 2"/>
-          <p:cNvSpPr>
-            <a:spLocks noGrp="1"/>
-          </p:cNvSpPr>
-          <p:nvPr>
-            <p:ph type="body" idx="1"/>
-          </p:nvPr>
-        </p:nvSpPr>
-        <p:spPr/>
-        <p:txBody>
-          <a:bodyPr/>
-          <a:lstStyle/>
-          <a:p>
-            <a:r>
-              <a:rPr lang="en-US" dirty="0"/>
-              <a:t>Reference.</a:t>
-            </a:r>
-            <a:endParaRPr lang="en-US" dirty="0"/>
-          </a:p>
-        </p:txBody>
-      </p:sp>
-      <p:sp>
-        <p:nvSpPr>
-          <p:cNvPr id="4" name="Slide Number Placeholder 3"/>
-          <p:cNvSpPr>
-            <a:spLocks noGrp="1"/>
-          </p:cNvSpPr>
-          <p:nvPr>
-            <p:ph type="sldNum" sz="quarter" idx="10"/>
-          </p:nvPr>
-        </p:nvSpPr>
-        <p:spPr/>
-        <p:txBody>
-          <a:bodyPr/>
-          <a:lstStyle/>
-          <a:p>
-            <a:fld id="{F7021451-1387-4CA6-816F-3879F97B5CBC}" type="slidenum">
-              <a:rPr lang="en-US"/>
-              <a:t>46</a:t>
-            </a:fld>
-            <a:endParaRPr lang="en-US"/>
-          </a:p>
-        </p:txBody>
-      </p:sp>
-    </p:spTree>
-    <p:extLst>
-      <p:ext uri="{BB962C8B-B14F-4D97-AF65-F5344CB8AC3E}">
-        <p14:creationId xmlns:p14="http://schemas.microsoft.com/office/powerpoint/2010/main" val="1024086991"/>
-      </p:ext>
-    </p:extLst>
-  </p:cSld>
-  <p:clrMapOvr>
-    <a:masterClrMapping/>
-  </p:clrMapOvr>
-</p:notes>
-</file>
-
-<file path=ppt/notesSlides/notesSlide47.xml><?xml version="1.0" encoding="utf-8"?>
-<p:notes xmlns:a="http://schemas.openxmlformats.org/drawingml/2006/main" xmlns:r="http://schemas.openxmlformats.org/officeDocument/2006/relationships" xmlns:p="http://schemas.openxmlformats.org/presentationml/2006/main">
-  <p:cSld>
-    <p:spTree>
-      <p:nvGrpSpPr>
-        <p:cNvPr id="1" name=""/>
-        <p:cNvGrpSpPr/>
-        <p:nvPr/>
-      </p:nvGrpSpPr>
-      <p:grpSpPr>
-        <a:xfrm>
-          <a:off x="0" y="0"/>
-          <a:ext cx="0" cy="0"/>
-          <a:chOff x="0" y="0"/>
-          <a:chExt cx="0" cy="0"/>
-        </a:xfrm>
-      </p:grpSpPr>
-      <p:sp>
-        <p:nvSpPr>
-          <p:cNvPr id="2" name="Slide Image Placeholder 1"/>
-          <p:cNvSpPr>
-            <a:spLocks noGrp="1" noRot="1" noChangeAspect="1"/>
-          </p:cNvSpPr>
-          <p:nvPr>
-            <p:ph type="sldImg"/>
-          </p:nvPr>
-        </p:nvSpPr>
-        <p:spPr/>
-      </p:sp>
-      <p:sp>
-        <p:nvSpPr>
-          <p:cNvPr id="3" name="Notes Placeholder 2"/>
-          <p:cNvSpPr>
-            <a:spLocks noGrp="1"/>
-          </p:cNvSpPr>
-          <p:nvPr>
-            <p:ph type="body" idx="1"/>
-          </p:nvPr>
-        </p:nvSpPr>
-        <p:spPr/>
-        <p:txBody>
-          <a:bodyPr/>
-          <a:lstStyle/>
-          <a:p>
-            <a:r>
-              <a:rPr lang="en-US" dirty="0"/>
-              <a:t>Full file with imports.</a:t>
-            </a:r>
-            <a:endParaRPr lang="en-US" dirty="0"/>
-          </a:p>
-        </p:txBody>
-      </p:sp>
-      <p:sp>
-        <p:nvSpPr>
-          <p:cNvPr id="4" name="Slide Number Placeholder 3"/>
-          <p:cNvSpPr>
-            <a:spLocks noGrp="1"/>
-          </p:cNvSpPr>
-          <p:nvPr>
-            <p:ph type="sldNum" sz="quarter" idx="10"/>
-          </p:nvPr>
-        </p:nvSpPr>
-        <p:spPr/>
-        <p:txBody>
-          <a:bodyPr/>
-          <a:lstStyle/>
-          <a:p>
-            <a:fld id="{F7021451-1387-4CA6-816F-3879F97B5CBC}" type="slidenum">
-              <a:rPr lang="en-US"/>
-              <a:t>47</a:t>
-            </a:fld>
-            <a:endParaRPr lang="en-US"/>
-          </a:p>
-        </p:txBody>
-      </p:sp>
-    </p:spTree>
-    <p:extLst>
-      <p:ext uri="{BB962C8B-B14F-4D97-AF65-F5344CB8AC3E}">
-        <p14:creationId xmlns:p14="http://schemas.microsoft.com/office/powerpoint/2010/main" val="1024086991"/>
-      </p:ext>
-    </p:extLst>
-  </p:cSld>
-  <p:clrMapOvr>
-    <a:masterClrMapping/>
-  </p:clrMapOvr>
-</p:notes>
-</file>
-
-<file path=ppt/notesSlides/notesSlide48.xml><?xml version="1.0" encoding="utf-8"?>
-<p:notes xmlns:a="http://schemas.openxmlformats.org/drawingml/2006/main" xmlns:r="http://schemas.openxmlformats.org/officeDocument/2006/relationships" xmlns:p="http://schemas.openxmlformats.org/presentationml/2006/main">
-  <p:cSld>
-    <p:spTree>
-      <p:nvGrpSpPr>
-        <p:cNvPr id="1" name=""/>
-        <p:cNvGrpSpPr/>
-        <p:nvPr/>
-      </p:nvGrpSpPr>
-      <p:grpSpPr>
-        <a:xfrm>
-          <a:off x="0" y="0"/>
-          <a:ext cx="0" cy="0"/>
-          <a:chOff x="0" y="0"/>
-          <a:chExt cx="0" cy="0"/>
-        </a:xfrm>
-      </p:grpSpPr>
-      <p:sp>
-        <p:nvSpPr>
-          <p:cNvPr id="2" name="Slide Image Placeholder 1"/>
-          <p:cNvSpPr>
-            <a:spLocks noGrp="1" noRot="1" noChangeAspect="1"/>
-          </p:cNvSpPr>
-          <p:nvPr>
-            <p:ph type="sldImg"/>
-          </p:nvPr>
-        </p:nvSpPr>
-        <p:spPr/>
-      </p:sp>
-      <p:sp>
-        <p:nvSpPr>
-          <p:cNvPr id="3" name="Notes Placeholder 2"/>
-          <p:cNvSpPr>
-            <a:spLocks noGrp="1"/>
-          </p:cNvSpPr>
-          <p:nvPr>
-            <p:ph type="body" idx="1"/>
-          </p:nvPr>
-        </p:nvSpPr>
-        <p:spPr/>
-        <p:txBody>
-          <a:bodyPr/>
-          <a:lstStyle/>
-          <a:p>
-            <a:r>
-              <a:rPr lang="en-US" dirty="0"/>
-              <a:t>Full file with imports.</a:t>
-            </a:r>
-            <a:endParaRPr lang="en-US" dirty="0"/>
-          </a:p>
-        </p:txBody>
-      </p:sp>
-      <p:sp>
-        <p:nvSpPr>
-          <p:cNvPr id="4" name="Slide Number Placeholder 3"/>
-          <p:cNvSpPr>
-            <a:spLocks noGrp="1"/>
-          </p:cNvSpPr>
-          <p:nvPr>
-            <p:ph type="sldNum" sz="quarter" idx="10"/>
-          </p:nvPr>
-        </p:nvSpPr>
-        <p:spPr/>
-        <p:txBody>
-          <a:bodyPr/>
-          <a:lstStyle/>
-          <a:p>
-            <a:fld id="{F7021451-1387-4CA6-816F-3879F97B5CBC}" type="slidenum">
-              <a:rPr lang="en-US"/>
-              <a:t>48</a:t>
-            </a:fld>
-            <a:endParaRPr lang="en-US"/>
-          </a:p>
-        </p:txBody>
-      </p:sp>
-    </p:spTree>
-    <p:extLst>
-      <p:ext uri="{BB962C8B-B14F-4D97-AF65-F5344CB8AC3E}">
-        <p14:creationId xmlns:p14="http://schemas.microsoft.com/office/powerpoint/2010/main" val="1024086991"/>
-      </p:ext>
-    </p:extLst>
-  </p:cSld>
-  <p:clrMapOvr>
-    <a:masterClrMapping/>
-  </p:clrMapOvr>
-</p:notes>
-</file>
-
-<file path=ppt/notesSlides/notesSlide49.xml><?xml version="1.0" encoding="utf-8"?>
-<p:notes xmlns:a="http://schemas.openxmlformats.org/drawingml/2006/main" xmlns:r="http://schemas.openxmlformats.org/officeDocument/2006/relationships" xmlns:p="http://schemas.openxmlformats.org/presentationml/2006/main">
-  <p:cSld>
-    <p:spTree>
-      <p:nvGrpSpPr>
-        <p:cNvPr id="1" name=""/>
-        <p:cNvGrpSpPr/>
-        <p:nvPr/>
-      </p:nvGrpSpPr>
-      <p:grpSpPr>
-        <a:xfrm>
-          <a:off x="0" y="0"/>
-          <a:ext cx="0" cy="0"/>
-          <a:chOff x="0" y="0"/>
-          <a:chExt cx="0" cy="0"/>
-        </a:xfrm>
-      </p:grpSpPr>
-      <p:sp>
-        <p:nvSpPr>
-          <p:cNvPr id="2" name="Slide Image Placeholder 1"/>
-          <p:cNvSpPr>
-            <a:spLocks noGrp="1" noRot="1" noChangeAspect="1"/>
-          </p:cNvSpPr>
-          <p:nvPr>
-            <p:ph type="sldImg"/>
-          </p:nvPr>
-        </p:nvSpPr>
-        <p:spPr/>
-      </p:sp>
-      <p:sp>
-        <p:nvSpPr>
-          <p:cNvPr id="3" name="Notes Placeholder 2"/>
-          <p:cNvSpPr>
-            <a:spLocks noGrp="1"/>
-          </p:cNvSpPr>
-          <p:nvPr>
-            <p:ph type="body" idx="1"/>
-          </p:nvPr>
-        </p:nvSpPr>
-        <p:spPr/>
-        <p:txBody>
-          <a:bodyPr/>
-          <a:lstStyle/>
-          <a:p>
-            <a:r>
-              <a:rPr lang="en-US" dirty="0"/>
-              <a:t>Solution.</a:t>
-            </a:r>
-            <a:endParaRPr lang="en-US" dirty="0"/>
-          </a:p>
-        </p:txBody>
-      </p:sp>
-      <p:sp>
-        <p:nvSpPr>
-          <p:cNvPr id="4" name="Slide Number Placeholder 3"/>
-          <p:cNvSpPr>
-            <a:spLocks noGrp="1"/>
-          </p:cNvSpPr>
-          <p:nvPr>
-            <p:ph type="sldNum" sz="quarter" idx="10"/>
-          </p:nvPr>
-        </p:nvSpPr>
-        <p:spPr/>
-        <p:txBody>
-          <a:bodyPr/>
-          <a:lstStyle/>
-          <a:p>
-            <a:fld id="{F7021451-1387-4CA6-816F-3879F97B5CBC}" type="slidenum">
-              <a:rPr lang="en-US"/>
-              <a:t>49</a:t>
-            </a:fld>
-            <a:endParaRPr lang="en-US"/>
-          </a:p>
-        </p:txBody>
-      </p:sp>
-    </p:spTree>
-    <p:extLst>
-      <p:ext uri="{BB962C8B-B14F-4D97-AF65-F5344CB8AC3E}">
-        <p14:creationId xmlns:p14="http://schemas.microsoft.com/office/powerpoint/2010/main" val="1024086991"/>
-      </p:ext>
-    </p:extLst>
-  </p:cSld>
-  <p:clrMapOvr>
-    <a:masterClrMapping/>
-  </p:clrMapOvr>
-</p:notes>
-</file>
-
-<file path=ppt/notesSlides/notesSlide5.xml><?xml version="1.0" encoding="utf-8"?>
-<p:notes xmlns:a="http://schemas.openxmlformats.org/drawingml/2006/main" xmlns:r="http://schemas.openxmlformats.org/officeDocument/2006/relationships" xmlns:p="http://schemas.openxmlformats.org/presentationml/2006/main">
-  <p:cSld>
-    <p:spTree>
-      <p:nvGrpSpPr>
-        <p:cNvPr id="1" name=""/>
-        <p:cNvGrpSpPr/>
-        <p:nvPr/>
-      </p:nvGrpSpPr>
-      <p:grpSpPr>
-        <a:xfrm>
-          <a:off x="0" y="0"/>
-          <a:ext cx="0" cy="0"/>
-          <a:chOff x="0" y="0"/>
-          <a:chExt cx="0" cy="0"/>
-        </a:xfrm>
-      </p:grpSpPr>
-      <p:sp>
-        <p:nvSpPr>
-          <p:cNvPr id="2" name="Slide Image Placeholder 1"/>
-          <p:cNvSpPr>
-            <a:spLocks noGrp="1" noRot="1" noChangeAspect="1"/>
-          </p:cNvSpPr>
-          <p:nvPr>
-            <p:ph type="sldImg"/>
-          </p:nvPr>
-        </p:nvSpPr>
-        <p:spPr/>
-      </p:sp>
-      <p:sp>
-        <p:nvSpPr>
-          <p:cNvPr id="3" name="Notes Placeholder 2"/>
-          <p:cNvSpPr>
-            <a:spLocks noGrp="1"/>
-          </p:cNvSpPr>
-          <p:nvPr>
-            <p:ph type="body" idx="1"/>
-          </p:nvPr>
-        </p:nvSpPr>
-        <p:spPr/>
-        <p:txBody>
-          <a:bodyPr/>
-          <a:lstStyle/>
-          <a:p>
-            <a:r>
-              <a:rPr lang="en-US" dirty="0"/>
-              <a:t>SCRIPT: Container composes Padding + Align + DecoratedBox + ConstrainedBox. It is convenient, and the analyser will nag you when a simpler widget would do (e.g. "use SizedBox for whitespace").
-GOTCHA: color: and decoration: together throws an assertion. Put the color inside BoxDecoration.
-GOTCHA: alignment makes Container expand to the parent's max constraints - that surprises people when a "small" card suddenly fills the screen.
-DEMO: hot reload each property in turn; keep the emulator visible.</a:t>
-            </a:r>
-            <a:endParaRPr lang="en-US" dirty="0"/>
-          </a:p>
-        </p:txBody>
-      </p:sp>
-      <p:sp>
-        <p:nvSpPr>
-          <p:cNvPr id="4" name="Slide Number Placeholder 3"/>
-          <p:cNvSpPr>
-            <a:spLocks noGrp="1"/>
-          </p:cNvSpPr>
-          <p:nvPr>
-            <p:ph type="sldNum" sz="quarter" idx="10"/>
-          </p:nvPr>
-        </p:nvSpPr>
-        <p:spPr/>
-        <p:txBody>
-          <a:bodyPr/>
-          <a:lstStyle/>
-          <a:p>
-            <a:fld id="{F7021451-1387-4CA6-816F-3879F97B5CBC}" type="slidenum">
-              <a:rPr lang="en-US"/>
-              <a:t>5</a:t>
-            </a:fld>
-            <a:endParaRPr lang="en-US"/>
-          </a:p>
-        </p:txBody>
-      </p:sp>
-    </p:spTree>
-    <p:extLst>
-      <p:ext uri="{BB962C8B-B14F-4D97-AF65-F5344CB8AC3E}">
-        <p14:creationId xmlns:p14="http://schemas.microsoft.com/office/powerpoint/2010/main" val="1024086991"/>
-      </p:ext>
-    </p:extLst>
-  </p:cSld>
-  <p:clrMapOvr>
-    <a:masterClrMapping/>
-  </p:clrMapOvr>
-</p:notes>
-</file>
-
-<file path=ppt/notesSlides/notesSlide50.xml><?xml version="1.0" encoding="utf-8"?>
-<p:notes xmlns:a="http://schemas.openxmlformats.org/drawingml/2006/main" xmlns:r="http://schemas.openxmlformats.org/officeDocument/2006/relationships" xmlns:p="http://schemas.openxmlformats.org/presentationml/2006/main">
-  <p:cSld>
-    <p:spTree>
-      <p:nvGrpSpPr>
-        <p:cNvPr id="1" name=""/>
-        <p:cNvGrpSpPr/>
-        <p:nvPr/>
-      </p:nvGrpSpPr>
-      <p:grpSpPr>
-        <a:xfrm>
-          <a:off x="0" y="0"/>
-          <a:ext cx="0" cy="0"/>
-          <a:chOff x="0" y="0"/>
-          <a:chExt cx="0" cy="0"/>
-        </a:xfrm>
-      </p:grpSpPr>
-      <p:sp>
-        <p:nvSpPr>
-          <p:cNvPr id="2" name="Slide Image Placeholder 1"/>
-          <p:cNvSpPr>
-            <a:spLocks noGrp="1" noRot="1" noChangeAspect="1"/>
-          </p:cNvSpPr>
-          <p:nvPr>
-            <p:ph type="sldImg"/>
-          </p:nvPr>
-        </p:nvSpPr>
-        <p:spPr/>
-      </p:sp>
-      <p:sp>
-        <p:nvSpPr>
-          <p:cNvPr id="3" name="Notes Placeholder 2"/>
-          <p:cNvSpPr>
-            <a:spLocks noGrp="1"/>
-          </p:cNvSpPr>
-          <p:nvPr>
-            <p:ph type="body" idx="1"/>
-          </p:nvPr>
-        </p:nvSpPr>
-        <p:spPr/>
-        <p:txBody>
-          <a:bodyPr/>
-          <a:lstStyle/>
-          <a:p>
-            <a:r>
-              <a:rPr lang="en-US" dirty="0"/>
-              <a:t>Replace the repo placeholder.</a:t>
-            </a:r>
-            <a:endParaRPr lang="en-US" dirty="0"/>
-          </a:p>
-        </p:txBody>
-      </p:sp>
-      <p:sp>
-        <p:nvSpPr>
-          <p:cNvPr id="4" name="Slide Number Placeholder 3"/>
-          <p:cNvSpPr>
-            <a:spLocks noGrp="1"/>
-          </p:cNvSpPr>
-          <p:nvPr>
-            <p:ph type="sldNum" sz="quarter" idx="10"/>
-          </p:nvPr>
-        </p:nvSpPr>
-        <p:spPr/>
-        <p:txBody>
-          <a:bodyPr/>
-          <a:lstStyle/>
-          <a:p>
-            <a:fld id="{F7021451-1387-4CA6-816F-3879F97B5CBC}" type="slidenum">
-              <a:rPr lang="en-US"/>
-              <a:t>50</a:t>
-            </a:fld>
-            <a:endParaRPr lang="en-US"/>
-          </a:p>
-        </p:txBody>
-      </p:sp>
-    </p:spTree>
-    <p:extLst>
-      <p:ext uri="{BB962C8B-B14F-4D97-AF65-F5344CB8AC3E}">
-        <p14:creationId xmlns:p14="http://schemas.microsoft.com/office/powerpoint/2010/main" val="1024086991"/>
-      </p:ext>
-    </p:extLst>
-  </p:cSld>
-  <p:clrMapOvr>
-    <a:masterClrMapping/>
-  </p:clrMapOvr>
-</p:notes>
-</file>
-
-<file path=ppt/notesSlides/notesSlide6.xml><?xml version="1.0" encoding="utf-8"?>
-<p:notes xmlns:a="http://schemas.openxmlformats.org/drawingml/2006/main" xmlns:r="http://schemas.openxmlformats.org/officeDocument/2006/relationships" xmlns:p="http://schemas.openxmlformats.org/presentationml/2006/main">
-  <p:cSld>
-    <p:spTree>
-      <p:nvGrpSpPr>
-        <p:cNvPr id="1" name=""/>
-        <p:cNvGrpSpPr/>
-        <p:nvPr/>
-      </p:nvGrpSpPr>
-      <p:grpSpPr>
-        <a:xfrm>
-          <a:off x="0" y="0"/>
-          <a:ext cx="0" cy="0"/>
-          <a:chOff x="0" y="0"/>
-          <a:chExt cx="0" cy="0"/>
-        </a:xfrm>
-      </p:grpSpPr>
-      <p:sp>
-        <p:nvSpPr>
-          <p:cNvPr id="2" name="Slide Image Placeholder 1"/>
-          <p:cNvSpPr>
-            <a:spLocks noGrp="1" noRot="1" noChangeAspect="1"/>
-          </p:cNvSpPr>
-          <p:nvPr>
-            <p:ph type="sldImg"/>
-          </p:nvPr>
-        </p:nvSpPr>
-        <p:spPr/>
-      </p:sp>
-      <p:sp>
-        <p:nvSpPr>
-          <p:cNvPr id="3" name="Notes Placeholder 2"/>
-          <p:cNvSpPr>
-            <a:spLocks noGrp="1"/>
-          </p:cNvSpPr>
-          <p:nvPr>
-            <p:ph type="body" idx="1"/>
-          </p:nvPr>
-        </p:nvSpPr>
-        <p:spPr/>
-        <p:txBody>
-          <a:bodyPr/>
-          <a:lstStyle/>
-          <a:p>
-            <a:r>
-              <a:rPr lang="en-US" dirty="0"/>
-              <a:t>SCRIPT: Reference slide. The rule for buttons in Material 3: one FilledButton per screen for the main action, OutlinedButton or FilledButton.tonal for secondary, TextButton for tertiary. That mirrors the capture form: Get quote (filled), Reset (outlined), Terms (text).
-onPressed: null disables. That is how we disable "Get quote" until the form is valid if we want to.
-tooltip on IconButton: screen readers announce it; also required by the accessibility lint on Day 5.</a:t>
-            </a:r>
-            <a:endParaRPr lang="en-US" dirty="0"/>
-          </a:p>
-        </p:txBody>
-      </p:sp>
-      <p:sp>
-        <p:nvSpPr>
-          <p:cNvPr id="4" name="Slide Number Placeholder 3"/>
-          <p:cNvSpPr>
-            <a:spLocks noGrp="1"/>
-          </p:cNvSpPr>
-          <p:nvPr>
-            <p:ph type="sldNum" sz="quarter" idx="10"/>
-          </p:nvPr>
-        </p:nvSpPr>
-        <p:spPr/>
-        <p:txBody>
-          <a:bodyPr/>
-          <a:lstStyle/>
-          <a:p>
-            <a:fld id="{F7021451-1387-4CA6-816F-3879F97B5CBC}" type="slidenum">
-              <a:rPr lang="en-US"/>
-              <a:t>6</a:t>
-            </a:fld>
-            <a:endParaRPr lang="en-US"/>
-          </a:p>
-        </p:txBody>
-      </p:sp>
-    </p:spTree>
-    <p:extLst>
-      <p:ext uri="{BB962C8B-B14F-4D97-AF65-F5344CB8AC3E}">
-        <p14:creationId xmlns:p14="http://schemas.microsoft.com/office/powerpoint/2010/main" val="1024086991"/>
-      </p:ext>
-    </p:extLst>
-  </p:cSld>
-  <p:clrMapOvr>
-    <a:masterClrMapping/>
-  </p:clrMapOvr>
-</p:notes>
-</file>
-
-<file path=ppt/notesSlides/notesSlide7.xml><?xml version="1.0" encoding="utf-8"?>
-<p:notes xmlns:a="http://schemas.openxmlformats.org/drawingml/2006/main" xmlns:r="http://schemas.openxmlformats.org/officeDocument/2006/relationships" xmlns:p="http://schemas.openxmlformats.org/presentationml/2006/main">
-  <p:cSld>
-    <p:spTree>
-      <p:nvGrpSpPr>
-        <p:cNvPr id="1" name=""/>
-        <p:cNvGrpSpPr/>
-        <p:nvPr/>
-      </p:nvGrpSpPr>
-      <p:grpSpPr>
-        <a:xfrm>
-          <a:off x="0" y="0"/>
-          <a:ext cx="0" cy="0"/>
-          <a:chOff x="0" y="0"/>
-          <a:chExt cx="0" cy="0"/>
-        </a:xfrm>
-      </p:grpSpPr>
-      <p:sp>
-        <p:nvSpPr>
-          <p:cNvPr id="2" name="Slide Image Placeholder 1"/>
-          <p:cNvSpPr>
-            <a:spLocks noGrp="1" noRot="1" noChangeAspect="1"/>
-          </p:cNvSpPr>
-          <p:nvPr>
-            <p:ph type="sldImg"/>
-          </p:nvPr>
-        </p:nvSpPr>
-        <p:spPr/>
-      </p:sp>
-      <p:sp>
-        <p:nvSpPr>
-          <p:cNvPr id="3" name="Notes Placeholder 2"/>
-          <p:cNvSpPr>
-            <a:spLocks noGrp="1"/>
-          </p:cNvSpPr>
-          <p:nvPr>
-            <p:ph type="body" idx="1"/>
-          </p:nvPr>
-        </p:nvSpPr>
-        <p:spPr/>
-        <p:txBody>
-          <a:bodyPr/>
-          <a:lstStyle/>
-          <a:p>
-            <a:r>
-              <a:rPr lang="en-US" dirty="0"/>
-              <a:t>SCRIPT: The question comes up on every screen. Give them the rule: Stateless by default; Stateful only for controllers and purely local UI state; shared/business state goes to state management (Day 3).
-The "two widgets" test: if two widgets need the same value, it is not local state. Lift it or provide it.
-Tomorrow we move the brand toggle out of QuoteApp's State into a Riverpod provider - that is the worked example of the rule.</a:t>
-            </a:r>
-            <a:endParaRPr lang="en-US" dirty="0"/>
-          </a:p>
-        </p:txBody>
-      </p:sp>
-      <p:sp>
-        <p:nvSpPr>
-          <p:cNvPr id="4" name="Slide Number Placeholder 3"/>
-          <p:cNvSpPr>
-            <a:spLocks noGrp="1"/>
-          </p:cNvSpPr>
-          <p:nvPr>
-            <p:ph type="sldNum" sz="quarter" idx="10"/>
-          </p:nvPr>
-        </p:nvSpPr>
-        <p:spPr/>
-        <p:txBody>
-          <a:bodyPr/>
-          <a:lstStyle/>
-          <a:p>
-            <a:fld id="{F7021451-1387-4CA6-816F-3879F97B5CBC}" type="slidenum">
-              <a:rPr lang="en-US"/>
-              <a:t>7</a:t>
-            </a:fld>
-            <a:endParaRPr lang="en-US"/>
-          </a:p>
-        </p:txBody>
-      </p:sp>
-    </p:spTree>
-    <p:extLst>
-      <p:ext uri="{BB962C8B-B14F-4D97-AF65-F5344CB8AC3E}">
-        <p14:creationId xmlns:p14="http://schemas.microsoft.com/office/powerpoint/2010/main" val="1024086991"/>
-      </p:ext>
-    </p:extLst>
-  </p:cSld>
-  <p:clrMapOvr>
-    <a:masterClrMapping/>
-  </p:clrMapOvr>
-</p:notes>
-</file>
-
-<file path=ppt/notesSlides/notesSlide8.xml><?xml version="1.0" encoding="utf-8"?>
-<p:notes xmlns:a="http://schemas.openxmlformats.org/drawingml/2006/main" xmlns:r="http://schemas.openxmlformats.org/officeDocument/2006/relationships" xmlns:p="http://schemas.openxmlformats.org/presentationml/2006/main">
-  <p:cSld>
-    <p:spTree>
-      <p:nvGrpSpPr>
-        <p:cNvPr id="1" name=""/>
-        <p:cNvGrpSpPr/>
-        <p:nvPr/>
-      </p:nvGrpSpPr>
-      <p:grpSpPr>
-        <a:xfrm>
-          <a:off x="0" y="0"/>
-          <a:ext cx="0" cy="0"/>
-          <a:chOff x="0" y="0"/>
-          <a:chExt cx="0" cy="0"/>
-        </a:xfrm>
-      </p:grpSpPr>
-      <p:sp>
-        <p:nvSpPr>
-          <p:cNvPr id="2" name="Slide Image Placeholder 1"/>
-          <p:cNvSpPr>
-            <a:spLocks noGrp="1" noRot="1" noChangeAspect="1"/>
-          </p:cNvSpPr>
-          <p:nvPr>
-            <p:ph type="sldImg"/>
-          </p:nvPr>
-        </p:nvSpPr>
-        <p:spPr/>
-      </p:sp>
-      <p:sp>
-        <p:nvSpPr>
-          <p:cNvPr id="3" name="Notes Placeholder 2"/>
-          <p:cNvSpPr>
-            <a:spLocks noGrp="1"/>
-          </p:cNvSpPr>
-          <p:nvPr>
-            <p:ph type="body" idx="1"/>
-          </p:nvPr>
-        </p:nvSpPr>
-        <p:spPr/>
-        <p:txBody>
-          <a:bodyPr/>
-          <a:lstStyle/>
-          <a:p>
-            <a:r>
-              <a:rPr lang="en-US" dirty="0"/>
-              <a:t>SCRIPT: Demo Extract Widget live on the Day 1 capture screen: select the SegmentedButton, Ctrl+. → Extract Widget → CoverPicker. Show the generated class. Then run dart fix --dry-run in the terminal and show the const suggestions, then dart fix --apply.
-CLASS vs METHOD: a senior dev will ask "why not a private method?". Answer: methods rebuild whenever the parent rebuilds and cannot be const; classes get their own element and can skip rebuilds. Also easier to test and to move.
-KEYS: preview only; Dismissible in the lists module is where they see the real need.
-COMMANDS (identical both OS): dart fix --dry-run · dart fix --apply · dart format .</a:t>
-            </a:r>
-            <a:endParaRPr lang="en-US" dirty="0"/>
-          </a:p>
-        </p:txBody>
-      </p:sp>
-      <p:sp>
-        <p:nvSpPr>
-          <p:cNvPr id="4" name="Slide Number Placeholder 3"/>
-          <p:cNvSpPr>
-            <a:spLocks noGrp="1"/>
-          </p:cNvSpPr>
-          <p:nvPr>
-            <p:ph type="sldNum" sz="quarter" idx="10"/>
-          </p:nvPr>
-        </p:nvSpPr>
-        <p:spPr/>
-        <p:txBody>
-          <a:bodyPr/>
-          <a:lstStyle/>
-          <a:p>
-            <a:fld id="{F7021451-1387-4CA6-816F-3879F97B5CBC}" type="slidenum">
-              <a:rPr lang="en-US"/>
-              <a:t>8</a:t>
-            </a:fld>
-            <a:endParaRPr lang="en-US"/>
-          </a:p>
-        </p:txBody>
-      </p:sp>
-    </p:spTree>
-    <p:extLst>
-      <p:ext uri="{BB962C8B-B14F-4D97-AF65-F5344CB8AC3E}">
-        <p14:creationId xmlns:p14="http://schemas.microsoft.com/office/powerpoint/2010/main" val="1024086991"/>
-      </p:ext>
-    </p:extLst>
-  </p:cSld>
-  <p:clrMapOvr>
-    <a:masterClrMapping/>
-  </p:clrMapOvr>
-</p:notes>
-</file>
-
-<file path=ppt/notesSlides/notesSlide9.xml><?xml version="1.0" encoding="utf-8"?>
-<p:notes xmlns:a="http://schemas.openxmlformats.org/drawingml/2006/main" xmlns:r="http://schemas.openxmlformats.org/officeDocument/2006/relationships" xmlns:p="http://schemas.openxmlformats.org/presentationml/2006/main">
-  <p:cSld>
-    <p:spTree>
-      <p:nvGrpSpPr>
-        <p:cNvPr id="1" name=""/>
-        <p:cNvGrpSpPr/>
-        <p:nvPr/>
-      </p:nvGrpSpPr>
-      <p:grpSpPr>
-        <a:xfrm>
-          <a:off x="0" y="0"/>
-          <a:ext cx="0" cy="0"/>
-          <a:chOff x="0" y="0"/>
-          <a:chExt cx="0" cy="0"/>
-        </a:xfrm>
-      </p:grpSpPr>
-      <p:sp>
-        <p:nvSpPr>
-          <p:cNvPr id="2" name="Slide Image Placeholder 1"/>
-          <p:cNvSpPr>
-            <a:spLocks noGrp="1" noRot="1" noChangeAspect="1"/>
-          </p:cNvSpPr>
-          <p:nvPr>
-            <p:ph type="sldImg"/>
-          </p:nvPr>
-        </p:nvSpPr>
-        <p:spPr/>
-      </p:sp>
-      <p:sp>
-        <p:nvSpPr>
-          <p:cNvPr id="3" name="Notes Placeholder 2"/>
-          <p:cNvSpPr>
-            <a:spLocks noGrp="1"/>
-          </p:cNvSpPr>
-          <p:nvPr>
-            <p:ph type="body" idx="1"/>
-          </p:nvPr>
-        </p:nvSpPr>
-        <p:spPr/>
-        <p:txBody>
-          <a:bodyPr/>
-          <a:lstStyle/>
-          <a:p>
-            <a:r>
-              <a:rPr lang="en-US" dirty="0"/>
-              <a:t>SCRIPT: The survey's biggest gap. Slow down here. Every slide has a live demo; every concept gets broken and fixed on the projector before the lab.</a:t>
-            </a:r>
-            <a:endParaRPr lang="en-US" dirty="0"/>
-          </a:p>
-        </p:txBody>
-      </p:sp>
-      <p:sp>
-        <p:nvSpPr>
-          <p:cNvPr id="4" name="Slide Number Placeholder 3"/>
-          <p:cNvSpPr>
-            <a:spLocks noGrp="1"/>
-          </p:cNvSpPr>
-          <p:nvPr>
-            <p:ph type="sldNum" sz="quarter" idx="10"/>
-          </p:nvPr>
-        </p:nvSpPr>
-        <p:spPr/>
-        <p:txBody>
-          <a:bodyPr/>
-          <a:lstStyle/>
-          <a:p>
-            <a:fld id="{F7021451-1387-4CA6-816F-3879F97B5CBC}" type="slidenum">
-              <a:rPr lang="en-US"/>
-              <a:t>9</a:t>
-            </a:fld>
-            <a:endParaRPr lang="en-US"/>
-          </a:p>
-        </p:txBody>
-      </p:sp>
-    </p:spTree>
-    <p:extLst>
-      <p:ext uri="{BB962C8B-B14F-4D97-AF65-F5344CB8AC3E}">
-        <p14:creationId xmlns:p14="http://schemas.microsoft.com/office/powerpoint/2010/main" val="1024086991"/>
-      </p:ext>
-    </p:extLst>
-  </p:cSld>
-  <p:clrMapOvr>
-    <a:masterClrMapping/>
-  </p:clrMapOvr>
-</p:notes>
 </file>
 
 <file path=ppt/slideLayouts/slideLayout1.xml><?xml version="1.0" encoding="utf-8"?>
@@ -5290,7 +812,7 @@
 </file>
 
 <file path=ppt/slides/slide1.xml><?xml version="1.0" encoding="utf-8"?>
-<p:sld xmlns:a="http://schemas.openxmlformats.org/drawingml/2006/main" xmlns:r="http://schemas.openxmlformats.org/officeDocument/2006/relationships" xmlns:p="http://schemas.openxmlformats.org/presentationml/2006/main">
+<p:sld xmlns:a="http://schemas.openxmlformats.org/drawingml/2006/main" xmlns:p="http://schemas.openxmlformats.org/presentationml/2006/main">
   <p:cSld name="Slide 1">
     <p:bg>
       <p:bgPr>
@@ -5569,7 +1091,7 @@
                 <a:ea typeface="Calibri" pitchFamily="34" charset="-122"/>
                 <a:cs typeface="Calibri" pitchFamily="34" charset="-120"/>
               </a:rPr>
-              <a:t>Priority gap from the survey (2.2) - today is mostly hands-on  ·  Instructor: Clynton Botterill</a:t>
+              <a:t>Today is mostly hands-on  ·  Instructor: Clynton Botterill</a:t>
             </a:r>
             <a:endParaRPr lang="en-US" sz="1200" dirty="0"/>
           </a:p>
@@ -26488,7 +22010,7 @@
 </file>
 
 <file path=ppt/slides/slide34.xml><?xml version="1.0" encoding="utf-8"?>
-<p:sld xmlns:a="http://schemas.openxmlformats.org/drawingml/2006/main" xmlns:r="http://schemas.openxmlformats.org/officeDocument/2006/relationships" xmlns:p="http://schemas.openxmlformats.org/presentationml/2006/main">
+<p:sld xmlns:a="http://schemas.openxmlformats.org/drawingml/2006/main" xmlns:p="http://schemas.openxmlformats.org/presentationml/2006/main">
   <p:cSld name="Slide 34">
     <p:bg>
       <p:bgPr>
@@ -27068,7 +22590,7 @@
                 <a:ea typeface="Calibri" pitchFamily="34" charset="-122"/>
                 <a:cs typeface="Calibri" pitchFamily="34" charset="-120"/>
               </a:rPr>
-              <a:t>State management is the lowest score in the survey (1.8) - this reading is half the fix.</a:t>
+              <a:t>This reading is half the fix.</a:t>
             </a:r>
             <a:endParaRPr lang="en-US" sz="1250" dirty="0"/>
           </a:p>
@@ -27669,1289 +23191,6 @@
                 <a:cs typeface="Calibri" pitchFamily="34" charset="-120"/>
               </a:rPr>
               <a:t>34</a:t>
-            </a:r>
-            <a:endParaRPr lang="en-US" sz="900" dirty="0"/>
-          </a:p>
-        </p:txBody>
-      </p:sp>
-    </p:spTree>
-  </p:cSld>
-  <p:clrMapOvr>
-    <a:masterClrMapping/>
-  </p:clrMapOvr>
-</p:sld>
-</file>
-
-<file path=ppt/slides/slide36.xml><?xml version="1.0" encoding="utf-8"?>
-<p:sld xmlns:a="http://schemas.openxmlformats.org/drawingml/2006/main" xmlns:r="http://schemas.openxmlformats.org/officeDocument/2006/relationships" xmlns:p="http://schemas.openxmlformats.org/presentationml/2006/main">
-  <p:cSld name="Slide 36">
-    <p:bg>
-      <p:bgPr>
-        <a:solidFill>
-          <a:srgbClr val="FFFFFF"/>
-        </a:solidFill>
-      </p:bgPr>
-    </p:bg>
-    <p:spTree>
-      <p:nvGrpSpPr>
-        <p:cNvPr id="1" name=""/>
-        <p:cNvGrpSpPr/>
-        <p:nvPr/>
-      </p:nvGrpSpPr>
-      <p:grpSpPr>
-        <a:xfrm>
-          <a:off x="0" y="0"/>
-          <a:ext cx="0" cy="0"/>
-          <a:chOff x="0" y="0"/>
-          <a:chExt cx="0" cy="0"/>
-        </a:xfrm>
-      </p:grpSpPr>
-      <p:sp>
-        <p:nvSpPr>
-          <p:cNvPr id="2" name="Text 0"/>
-          <p:cNvSpPr txBox="1"/>
-          <p:nvPr/>
-        </p:nvSpPr>
-        <p:spPr>
-          <a:xfrm>
-            <a:off x="548640" y="365760"/>
-            <a:ext cx="11091672" cy="731520"/>
-          </a:xfrm>
-          <a:prstGeom prst="rect">
-            <a:avLst/>
-          </a:prstGeom>
-          <a:noFill/>
-          <a:ln/>
-        </p:spPr>
-        <p:txBody>
-          <a:bodyPr wrap="square" lIns="0" tIns="0" rIns="0" bIns="0" rtlCol="0" anchor="ctr"/>
-          <a:lstStyle/>
-          <a:p>
-            <a:pPr indent="0" marL="0">
-              <a:buNone/>
-            </a:pPr>
-            <a:r>
-              <a:rPr lang="en-US" sz="3000" b="1" dirty="0">
-                <a:solidFill>
-                  <a:srgbClr val="0B2545"/>
-                </a:solidFill>
-                <a:latin typeface="Calibri" pitchFamily="34" charset="0"/>
-                <a:ea typeface="Calibri" pitchFamily="34" charset="-122"/>
-                <a:cs typeface="Calibri" pitchFamily="34" charset="-120"/>
-              </a:rPr>
-              <a:t>PLAN B · When it breaks in class</a:t>
-            </a:r>
-            <a:endParaRPr lang="en-US" sz="3000" dirty="0"/>
-          </a:p>
-        </p:txBody>
-      </p:sp>
-      <p:graphicFrame>
-        <p:nvGraphicFramePr>
-          <p:cNvPr id="37" name="Table 0"/>
-          <p:cNvGraphicFramePr>
-            <a:graphicFrameLocks noGrp="1"/>
-          </p:cNvGraphicFramePr>
-          <p:nvPr>
-            <p:extLst>
-              <p:ext uri="{D42A27DB-BD31-4B8C-83A1-F6EECF244321}">
-                <p14:modId xmlns:p14="http://schemas.microsoft.com/office/powerpoint/2010/main" val="1579011935"/>
-              </p:ext>
-            </p:extLst>
-          </p:nvPr>
-        </p:nvGraphicFramePr>
-        <p:xfrm>
-          <a:off x="548640" y="1325880"/>
-          <a:ext cx="11091672" cy="914400"/>
-        </p:xfrm>
-        <a:graphic>
-          <a:graphicData uri="http://schemas.openxmlformats.org/drawingml/2006/table">
-            <a:tbl>
-              <a:tblPr/>
-              <a:tblGrid>
-                <a:gridCol w="3993002"/>
-                <a:gridCol w="7098670"/>
-              </a:tblGrid>
-              <a:tr h="0">
-                <a:tc>
-                  <a:txBody>
-                    <a:bodyPr/>
-                    <a:lstStyle/>
-                    <a:p>
-                      <a:pPr indent="0" marL="0">
-                        <a:buNone/>
-                      </a:pPr>
-                      <a:r>
-                        <a:rPr lang="en-US" sz="1050" b="1" dirty="0">
-                          <a:solidFill>
-                            <a:srgbClr val="FFFFFF"/>
-                          </a:solidFill>
-                          <a:latin typeface="Calibri" pitchFamily="34" charset="0"/>
-                          <a:ea typeface="Calibri" pitchFamily="34" charset="-122"/>
-                          <a:cs typeface="Calibri" pitchFamily="34" charset="-120"/>
-                        </a:rPr>
-                        <a:t>If this happens</a:t>
-                      </a:r>
-                      <a:endParaRPr lang="en-US" sz="1050" dirty="0">
-                        <a:latin typeface="Calibri" charset="0"/>
-                        <a:ea typeface="Calibri" charset="0"/>
-                        <a:cs typeface="Calibri" charset="0"/>
-                      </a:endParaRPr>
-                    </a:p>
-                  </a:txBody>
-                  <a:tcPr marL="54864" marR="54864" marT="54864" marB="54864" anchor="ctr">
-                    <a:lnL w="6350" cap="flat" cmpd="sng" algn="ctr">
-                      <a:solidFill>
-                        <a:srgbClr val="D9DEE3"/>
-                      </a:solidFill>
-                      <a:prstDash val="solid"/>
-                      <a:round/>
-                      <a:headEnd type="none" w="med" len="med"/>
-                      <a:tailEnd type="none" w="med" len="med"/>
-                    </a:lnL>
-                    <a:lnR w="6350" cap="flat" cmpd="sng" algn="ctr">
-                      <a:solidFill>
-                        <a:srgbClr val="D9DEE3"/>
-                      </a:solidFill>
-                      <a:prstDash val="solid"/>
-                      <a:round/>
-                      <a:headEnd type="none" w="med" len="med"/>
-                      <a:tailEnd type="none" w="med" len="med"/>
-                    </a:lnR>
-                    <a:lnT w="6350" cap="flat" cmpd="sng" algn="ctr">
-                      <a:solidFill>
-                        <a:srgbClr val="D9DEE3"/>
-                      </a:solidFill>
-                      <a:prstDash val="solid"/>
-                      <a:round/>
-                      <a:headEnd type="none" w="med" len="med"/>
-                      <a:tailEnd type="none" w="med" len="med"/>
-                    </a:lnT>
-                    <a:lnB w="6350" cap="flat" cmpd="sng" algn="ctr">
-                      <a:solidFill>
-                        <a:srgbClr val="D9DEE3"/>
-                      </a:solidFill>
-                      <a:prstDash val="solid"/>
-                      <a:round/>
-                      <a:headEnd type="none" w="med" len="med"/>
-                      <a:tailEnd type="none" w="med" len="med"/>
-                    </a:lnB>
-                    <a:solidFill>
-                      <a:srgbClr val="0B2545"/>
-                    </a:solidFill>
-                  </a:tcPr>
-                </a:tc>
-                <a:tc>
-                  <a:txBody>
-                    <a:bodyPr/>
-                    <a:lstStyle/>
-                    <a:p>
-                      <a:pPr indent="0" marL="0">
-                        <a:buNone/>
-                      </a:pPr>
-                      <a:r>
-                        <a:rPr lang="en-US" sz="1050" b="1" dirty="0">
-                          <a:solidFill>
-                            <a:srgbClr val="FFFFFF"/>
-                          </a:solidFill>
-                          <a:latin typeface="Calibri" pitchFamily="34" charset="0"/>
-                          <a:ea typeface="Calibri" pitchFamily="34" charset="-122"/>
-                          <a:cs typeface="Calibri" pitchFamily="34" charset="-120"/>
-                        </a:rPr>
-                        <a:t>Do this instead</a:t>
-                      </a:r>
-                      <a:endParaRPr lang="en-US" sz="1050" dirty="0">
-                        <a:latin typeface="Calibri" charset="0"/>
-                        <a:ea typeface="Calibri" charset="0"/>
-                        <a:cs typeface="Calibri" charset="0"/>
-                      </a:endParaRPr>
-                    </a:p>
-                  </a:txBody>
-                  <a:tcPr marL="54864" marR="54864" marT="54864" marB="54864" anchor="ctr">
-                    <a:lnL w="6350" cap="flat" cmpd="sng" algn="ctr">
-                      <a:solidFill>
-                        <a:srgbClr val="D9DEE3"/>
-                      </a:solidFill>
-                      <a:prstDash val="solid"/>
-                      <a:round/>
-                      <a:headEnd type="none" w="med" len="med"/>
-                      <a:tailEnd type="none" w="med" len="med"/>
-                    </a:lnL>
-                    <a:lnR w="6350" cap="flat" cmpd="sng" algn="ctr">
-                      <a:solidFill>
-                        <a:srgbClr val="D9DEE3"/>
-                      </a:solidFill>
-                      <a:prstDash val="solid"/>
-                      <a:round/>
-                      <a:headEnd type="none" w="med" len="med"/>
-                      <a:tailEnd type="none" w="med" len="med"/>
-                    </a:lnR>
-                    <a:lnT w="6350" cap="flat" cmpd="sng" algn="ctr">
-                      <a:solidFill>
-                        <a:srgbClr val="D9DEE3"/>
-                      </a:solidFill>
-                      <a:prstDash val="solid"/>
-                      <a:round/>
-                      <a:headEnd type="none" w="med" len="med"/>
-                      <a:tailEnd type="none" w="med" len="med"/>
-                    </a:lnT>
-                    <a:lnB w="6350" cap="flat" cmpd="sng" algn="ctr">
-                      <a:solidFill>
-                        <a:srgbClr val="D9DEE3"/>
-                      </a:solidFill>
-                      <a:prstDash val="solid"/>
-                      <a:round/>
-                      <a:headEnd type="none" w="med" len="med"/>
-                      <a:tailEnd type="none" w="med" len="med"/>
-                    </a:lnB>
-                    <a:solidFill>
-                      <a:srgbClr val="0B2545"/>
-                    </a:solidFill>
-                  </a:tcPr>
-                </a:tc>
-              </a:tr>
-              <a:tr h="0">
-                <a:tc>
-                  <a:txBody>
-                    <a:bodyPr/>
-                    <a:lstStyle/>
-                    <a:p>
-                      <a:pPr indent="0" marL="0">
-                        <a:buNone/>
-                      </a:pPr>
-                      <a:r>
-                        <a:rPr lang="en-US" sz="1050" b="1" dirty="0">
-                          <a:solidFill>
-                            <a:srgbClr val="1F2933"/>
-                          </a:solidFill>
-                          <a:latin typeface="Calibri" pitchFamily="34" charset="0"/>
-                          <a:ea typeface="Calibri" pitchFamily="34" charset="-122"/>
-                          <a:cs typeface="Calibri" pitchFamily="34" charset="-120"/>
-                        </a:rPr>
-                        <a:t>Emulator dead on a machine</a:t>
-                      </a:r>
-                      <a:endParaRPr lang="en-US" sz="1050" dirty="0">
-                        <a:latin typeface="Calibri" charset="0"/>
-                        <a:ea typeface="Calibri" charset="0"/>
-                        <a:cs typeface="Calibri" charset="0"/>
-                      </a:endParaRPr>
-                    </a:p>
-                  </a:txBody>
-                  <a:tcPr marL="54864" marR="54864" marT="54864" marB="54864" anchor="ctr">
-                    <a:lnL w="6350" cap="flat" cmpd="sng" algn="ctr">
-                      <a:solidFill>
-                        <a:srgbClr val="D9DEE3"/>
-                      </a:solidFill>
-                      <a:prstDash val="solid"/>
-                      <a:round/>
-                      <a:headEnd type="none" w="med" len="med"/>
-                      <a:tailEnd type="none" w="med" len="med"/>
-                    </a:lnL>
-                    <a:lnR w="6350" cap="flat" cmpd="sng" algn="ctr">
-                      <a:solidFill>
-                        <a:srgbClr val="D9DEE3"/>
-                      </a:solidFill>
-                      <a:prstDash val="solid"/>
-                      <a:round/>
-                      <a:headEnd type="none" w="med" len="med"/>
-                      <a:tailEnd type="none" w="med" len="med"/>
-                    </a:lnR>
-                    <a:lnT w="6350" cap="flat" cmpd="sng" algn="ctr">
-                      <a:solidFill>
-                        <a:srgbClr val="D9DEE3"/>
-                      </a:solidFill>
-                      <a:prstDash val="solid"/>
-                      <a:round/>
-                      <a:headEnd type="none" w="med" len="med"/>
-                      <a:tailEnd type="none" w="med" len="med"/>
-                    </a:lnT>
-                    <a:lnB w="6350" cap="flat" cmpd="sng" algn="ctr">
-                      <a:solidFill>
-                        <a:srgbClr val="D9DEE3"/>
-                      </a:solidFill>
-                      <a:prstDash val="solid"/>
-                      <a:round/>
-                      <a:headEnd type="none" w="med" len="med"/>
-                      <a:tailEnd type="none" w="med" len="med"/>
-                    </a:lnB>
-                    <a:solidFill>
-                      <a:srgbClr val="FFFFFF"/>
-                    </a:solidFill>
-                  </a:tcPr>
-                </a:tc>
-                <a:tc>
-                  <a:txBody>
-                    <a:bodyPr/>
-                    <a:lstStyle/>
-                    <a:p>
-                      <a:pPr indent="0" marL="0">
-                        <a:buNone/>
-                      </a:pPr>
-                      <a:r>
-                        <a:rPr lang="en-US" sz="950" dirty="0">
-                          <a:solidFill>
-                            <a:srgbClr val="1F2933"/>
-                          </a:solidFill>
-                          <a:latin typeface="Courier New" pitchFamily="34" charset="0"/>
-                          <a:ea typeface="Courier New" pitchFamily="34" charset="-122"/>
-                          <a:cs typeface="Courier New" pitchFamily="34" charset="-120"/>
-                        </a:rPr>
-                        <a:t>flutter run -d chrome. Nothing today needs a plugin - layout, forms and theming all work in the browser. Resize the window to demo the responsive breakpoint.</a:t>
-                      </a:r>
-                      <a:endParaRPr lang="en-US" sz="950" dirty="0">
-                        <a:latin typeface="Courier New" charset="0"/>
-                        <a:ea typeface="Courier New" charset="0"/>
-                        <a:cs typeface="Courier New" charset="0"/>
-                      </a:endParaRPr>
-                    </a:p>
-                  </a:txBody>
-                  <a:tcPr marL="54864" marR="54864" marT="54864" marB="54864" anchor="ctr">
-                    <a:lnL w="6350" cap="flat" cmpd="sng" algn="ctr">
-                      <a:solidFill>
-                        <a:srgbClr val="D9DEE3"/>
-                      </a:solidFill>
-                      <a:prstDash val="solid"/>
-                      <a:round/>
-                      <a:headEnd type="none" w="med" len="med"/>
-                      <a:tailEnd type="none" w="med" len="med"/>
-                    </a:lnL>
-                    <a:lnR w="6350" cap="flat" cmpd="sng" algn="ctr">
-                      <a:solidFill>
-                        <a:srgbClr val="D9DEE3"/>
-                      </a:solidFill>
-                      <a:prstDash val="solid"/>
-                      <a:round/>
-                      <a:headEnd type="none" w="med" len="med"/>
-                      <a:tailEnd type="none" w="med" len="med"/>
-                    </a:lnR>
-                    <a:lnT w="6350" cap="flat" cmpd="sng" algn="ctr">
-                      <a:solidFill>
-                        <a:srgbClr val="D9DEE3"/>
-                      </a:solidFill>
-                      <a:prstDash val="solid"/>
-                      <a:round/>
-                      <a:headEnd type="none" w="med" len="med"/>
-                      <a:tailEnd type="none" w="med" len="med"/>
-                    </a:lnT>
-                    <a:lnB w="6350" cap="flat" cmpd="sng" algn="ctr">
-                      <a:solidFill>
-                        <a:srgbClr val="D9DEE3"/>
-                      </a:solidFill>
-                      <a:prstDash val="solid"/>
-                      <a:round/>
-                      <a:headEnd type="none" w="med" len="med"/>
-                      <a:tailEnd type="none" w="med" len="med"/>
-                    </a:lnB>
-                    <a:solidFill>
-                      <a:srgbClr val="FFFFFF"/>
-                    </a:solidFill>
-                  </a:tcPr>
-                </a:tc>
-              </a:tr>
-              <a:tr h="0">
-                <a:tc>
-                  <a:txBody>
-                    <a:bodyPr/>
-                    <a:lstStyle/>
-                    <a:p>
-                      <a:pPr indent="0" marL="0">
-                        <a:buNone/>
-                      </a:pPr>
-                      <a:r>
-                        <a:rPr lang="en-US" sz="1050" b="1" dirty="0">
-                          <a:solidFill>
-                            <a:srgbClr val="1F2933"/>
-                          </a:solidFill>
-                          <a:latin typeface="Calibri" pitchFamily="34" charset="0"/>
-                          <a:ea typeface="Calibri" pitchFamily="34" charset="-122"/>
-                          <a:cs typeface="Calibri" pitchFamily="34" charset="-120"/>
-                        </a:rPr>
-                        <a:t>DevTools will not open</a:t>
-                      </a:r>
-                      <a:endParaRPr lang="en-US" sz="1050" dirty="0">
-                        <a:latin typeface="Calibri" charset="0"/>
-                        <a:ea typeface="Calibri" charset="0"/>
-                        <a:cs typeface="Calibri" charset="0"/>
-                      </a:endParaRPr>
-                    </a:p>
-                  </a:txBody>
-                  <a:tcPr marL="54864" marR="54864" marT="54864" marB="54864" anchor="ctr">
-                    <a:lnL w="6350" cap="flat" cmpd="sng" algn="ctr">
-                      <a:solidFill>
-                        <a:srgbClr val="D9DEE3"/>
-                      </a:solidFill>
-                      <a:prstDash val="solid"/>
-                      <a:round/>
-                      <a:headEnd type="none" w="med" len="med"/>
-                      <a:tailEnd type="none" w="med" len="med"/>
-                    </a:lnL>
-                    <a:lnR w="6350" cap="flat" cmpd="sng" algn="ctr">
-                      <a:solidFill>
-                        <a:srgbClr val="D9DEE3"/>
-                      </a:solidFill>
-                      <a:prstDash val="solid"/>
-                      <a:round/>
-                      <a:headEnd type="none" w="med" len="med"/>
-                      <a:tailEnd type="none" w="med" len="med"/>
-                    </a:lnR>
-                    <a:lnT w="6350" cap="flat" cmpd="sng" algn="ctr">
-                      <a:solidFill>
-                        <a:srgbClr val="D9DEE3"/>
-                      </a:solidFill>
-                      <a:prstDash val="solid"/>
-                      <a:round/>
-                      <a:headEnd type="none" w="med" len="med"/>
-                      <a:tailEnd type="none" w="med" len="med"/>
-                    </a:lnT>
-                    <a:lnB w="6350" cap="flat" cmpd="sng" algn="ctr">
-                      <a:solidFill>
-                        <a:srgbClr val="D9DEE3"/>
-                      </a:solidFill>
-                      <a:prstDash val="solid"/>
-                      <a:round/>
-                      <a:headEnd type="none" w="med" len="med"/>
-                      <a:tailEnd type="none" w="med" len="med"/>
-                    </a:lnB>
-                    <a:solidFill>
-                      <a:srgbClr val="F3F5F8"/>
-                    </a:solidFill>
-                  </a:tcPr>
-                </a:tc>
-                <a:tc>
-                  <a:txBody>
-                    <a:bodyPr/>
-                    <a:lstStyle/>
-                    <a:p>
-                      <a:pPr indent="0" marL="0">
-                        <a:buNone/>
-                      </a:pPr>
-                      <a:r>
-                        <a:rPr lang="en-US" sz="1050" dirty="0">
-                          <a:solidFill>
-                            <a:srgbClr val="1F2933"/>
-                          </a:solidFill>
-                          <a:latin typeface="Calibri" pitchFamily="34" charset="0"/>
-                          <a:ea typeface="Calibri" pitchFamily="34" charset="-122"/>
-                          <a:cs typeface="Calibri" pitchFamily="34" charset="-120"/>
-                        </a:rPr>
-                        <a:t>Press p in the flutter run terminal for debug paint, and read the red error text on the device. The Layout Explorer is nice, not essential.</a:t>
-                      </a:r>
-                      <a:endParaRPr lang="en-US" sz="1050" dirty="0">
-                        <a:latin typeface="Calibri" charset="0"/>
-                        <a:ea typeface="Calibri" charset="0"/>
-                        <a:cs typeface="Calibri" charset="0"/>
-                      </a:endParaRPr>
-                    </a:p>
-                  </a:txBody>
-                  <a:tcPr marL="54864" marR="54864" marT="54864" marB="54864" anchor="ctr">
-                    <a:lnL w="6350" cap="flat" cmpd="sng" algn="ctr">
-                      <a:solidFill>
-                        <a:srgbClr val="D9DEE3"/>
-                      </a:solidFill>
-                      <a:prstDash val="solid"/>
-                      <a:round/>
-                      <a:headEnd type="none" w="med" len="med"/>
-                      <a:tailEnd type="none" w="med" len="med"/>
-                    </a:lnL>
-                    <a:lnR w="6350" cap="flat" cmpd="sng" algn="ctr">
-                      <a:solidFill>
-                        <a:srgbClr val="D9DEE3"/>
-                      </a:solidFill>
-                      <a:prstDash val="solid"/>
-                      <a:round/>
-                      <a:headEnd type="none" w="med" len="med"/>
-                      <a:tailEnd type="none" w="med" len="med"/>
-                    </a:lnR>
-                    <a:lnT w="6350" cap="flat" cmpd="sng" algn="ctr">
-                      <a:solidFill>
-                        <a:srgbClr val="D9DEE3"/>
-                      </a:solidFill>
-                      <a:prstDash val="solid"/>
-                      <a:round/>
-                      <a:headEnd type="none" w="med" len="med"/>
-                      <a:tailEnd type="none" w="med" len="med"/>
-                    </a:lnT>
-                    <a:lnB w="6350" cap="flat" cmpd="sng" algn="ctr">
-                      <a:solidFill>
-                        <a:srgbClr val="D9DEE3"/>
-                      </a:solidFill>
-                      <a:prstDash val="solid"/>
-                      <a:round/>
-                      <a:headEnd type="none" w="med" len="med"/>
-                      <a:tailEnd type="none" w="med" len="med"/>
-                    </a:lnB>
-                    <a:solidFill>
-                      <a:srgbClr val="F3F5F8"/>
-                    </a:solidFill>
-                  </a:tcPr>
-                </a:tc>
-              </a:tr>
-              <a:tr h="0">
-                <a:tc>
-                  <a:txBody>
-                    <a:bodyPr/>
-                    <a:lstStyle/>
-                    <a:p>
-                      <a:pPr indent="0" marL="0">
-                        <a:buNone/>
-                      </a:pPr>
-                      <a:r>
-                        <a:rPr lang="en-US" sz="1050" b="1" dirty="0">
-                          <a:solidFill>
-                            <a:srgbClr val="1F2933"/>
-                          </a:solidFill>
-                          <a:latin typeface="Calibri" pitchFamily="34" charset="0"/>
-                          <a:ea typeface="Calibri" pitchFamily="34" charset="-122"/>
-                          <a:cs typeface="Calibri" pitchFamily="34" charset="-120"/>
-                        </a:rPr>
-                        <a:t>Someone's project is broken from yesterday</a:t>
-                      </a:r>
-                      <a:endParaRPr lang="en-US" sz="1050" dirty="0">
-                        <a:latin typeface="Calibri" charset="0"/>
-                        <a:ea typeface="Calibri" charset="0"/>
-                        <a:cs typeface="Calibri" charset="0"/>
-                      </a:endParaRPr>
-                    </a:p>
-                  </a:txBody>
-                  <a:tcPr marL="54864" marR="54864" marT="54864" marB="54864" anchor="ctr">
-                    <a:lnL w="6350" cap="flat" cmpd="sng" algn="ctr">
-                      <a:solidFill>
-                        <a:srgbClr val="D9DEE3"/>
-                      </a:solidFill>
-                      <a:prstDash val="solid"/>
-                      <a:round/>
-                      <a:headEnd type="none" w="med" len="med"/>
-                      <a:tailEnd type="none" w="med" len="med"/>
-                    </a:lnL>
-                    <a:lnR w="6350" cap="flat" cmpd="sng" algn="ctr">
-                      <a:solidFill>
-                        <a:srgbClr val="D9DEE3"/>
-                      </a:solidFill>
-                      <a:prstDash val="solid"/>
-                      <a:round/>
-                      <a:headEnd type="none" w="med" len="med"/>
-                      <a:tailEnd type="none" w="med" len="med"/>
-                    </a:lnR>
-                    <a:lnT w="6350" cap="flat" cmpd="sng" algn="ctr">
-                      <a:solidFill>
-                        <a:srgbClr val="D9DEE3"/>
-                      </a:solidFill>
-                      <a:prstDash val="solid"/>
-                      <a:round/>
-                      <a:headEnd type="none" w="med" len="med"/>
-                      <a:tailEnd type="none" w="med" len="med"/>
-                    </a:lnT>
-                    <a:lnB w="6350" cap="flat" cmpd="sng" algn="ctr">
-                      <a:solidFill>
-                        <a:srgbClr val="D9DEE3"/>
-                      </a:solidFill>
-                      <a:prstDash val="solid"/>
-                      <a:round/>
-                      <a:headEnd type="none" w="med" len="med"/>
-                      <a:tailEnd type="none" w="med" len="med"/>
-                    </a:lnB>
-                    <a:solidFill>
-                      <a:srgbClr val="FFFFFF"/>
-                    </a:solidFill>
-                  </a:tcPr>
-                </a:tc>
-                <a:tc>
-                  <a:txBody>
-                    <a:bodyPr/>
-                    <a:lstStyle/>
-                    <a:p>
-                      <a:pPr indent="0" marL="0">
-                        <a:buNone/>
-                      </a:pPr>
-                      <a:r>
-                        <a:rPr lang="en-US" sz="950" dirty="0">
-                          <a:solidFill>
-                            <a:srgbClr val="1F2933"/>
-                          </a:solidFill>
-                          <a:latin typeface="Courier New" pitchFamily="34" charset="0"/>
-                          <a:ea typeface="Courier New" pitchFamily="34" charset="-122"/>
-                          <a:cs typeface="Courier New" pitchFamily="34" charset="-120"/>
-                        </a:rPr>
-                        <a:t>git checkout lab-2-1-start from the USB repo. Never debug yesterday's mess during today's lab.</a:t>
-                      </a:r>
-                      <a:endParaRPr lang="en-US" sz="950" dirty="0">
-                        <a:latin typeface="Courier New" charset="0"/>
-                        <a:ea typeface="Courier New" charset="0"/>
-                        <a:cs typeface="Courier New" charset="0"/>
-                      </a:endParaRPr>
-                    </a:p>
-                  </a:txBody>
-                  <a:tcPr marL="54864" marR="54864" marT="54864" marB="54864" anchor="ctr">
-                    <a:lnL w="6350" cap="flat" cmpd="sng" algn="ctr">
-                      <a:solidFill>
-                        <a:srgbClr val="D9DEE3"/>
-                      </a:solidFill>
-                      <a:prstDash val="solid"/>
-                      <a:round/>
-                      <a:headEnd type="none" w="med" len="med"/>
-                      <a:tailEnd type="none" w="med" len="med"/>
-                    </a:lnL>
-                    <a:lnR w="6350" cap="flat" cmpd="sng" algn="ctr">
-                      <a:solidFill>
-                        <a:srgbClr val="D9DEE3"/>
-                      </a:solidFill>
-                      <a:prstDash val="solid"/>
-                      <a:round/>
-                      <a:headEnd type="none" w="med" len="med"/>
-                      <a:tailEnd type="none" w="med" len="med"/>
-                    </a:lnR>
-                    <a:lnT w="6350" cap="flat" cmpd="sng" algn="ctr">
-                      <a:solidFill>
-                        <a:srgbClr val="D9DEE3"/>
-                      </a:solidFill>
-                      <a:prstDash val="solid"/>
-                      <a:round/>
-                      <a:headEnd type="none" w="med" len="med"/>
-                      <a:tailEnd type="none" w="med" len="med"/>
-                    </a:lnT>
-                    <a:lnB w="6350" cap="flat" cmpd="sng" algn="ctr">
-                      <a:solidFill>
-                        <a:srgbClr val="D9DEE3"/>
-                      </a:solidFill>
-                      <a:prstDash val="solid"/>
-                      <a:round/>
-                      <a:headEnd type="none" w="med" len="med"/>
-                      <a:tailEnd type="none" w="med" len="med"/>
-                    </a:lnB>
-                    <a:solidFill>
-                      <a:srgbClr val="FFFFFF"/>
-                    </a:solidFill>
-                  </a:tcPr>
-                </a:tc>
-              </a:tr>
-              <a:tr h="0">
-                <a:tc>
-                  <a:txBody>
-                    <a:bodyPr/>
-                    <a:lstStyle/>
-                    <a:p>
-                      <a:pPr indent="0" marL="0">
-                        <a:buNone/>
-                      </a:pPr>
-                      <a:r>
-                        <a:rPr lang="en-US" sz="1050" b="1" dirty="0">
-                          <a:solidFill>
-                            <a:srgbClr val="1F2933"/>
-                          </a:solidFill>
-                          <a:latin typeface="Calibri" pitchFamily="34" charset="0"/>
-                          <a:ea typeface="Calibri" pitchFamily="34" charset="-122"/>
-                          <a:cs typeface="Calibri" pitchFamily="34" charset="-120"/>
-                        </a:rPr>
-                        <a:t>Assets / logo will not load</a:t>
-                      </a:r>
-                      <a:endParaRPr lang="en-US" sz="1050" dirty="0">
-                        <a:latin typeface="Calibri" charset="0"/>
-                        <a:ea typeface="Calibri" charset="0"/>
-                        <a:cs typeface="Calibri" charset="0"/>
-                      </a:endParaRPr>
-                    </a:p>
-                  </a:txBody>
-                  <a:tcPr marL="54864" marR="54864" marT="54864" marB="54864" anchor="ctr">
-                    <a:lnL w="6350" cap="flat" cmpd="sng" algn="ctr">
-                      <a:solidFill>
-                        <a:srgbClr val="D9DEE3"/>
-                      </a:solidFill>
-                      <a:prstDash val="solid"/>
-                      <a:round/>
-                      <a:headEnd type="none" w="med" len="med"/>
-                      <a:tailEnd type="none" w="med" len="med"/>
-                    </a:lnL>
-                    <a:lnR w="6350" cap="flat" cmpd="sng" algn="ctr">
-                      <a:solidFill>
-                        <a:srgbClr val="D9DEE3"/>
-                      </a:solidFill>
-                      <a:prstDash val="solid"/>
-                      <a:round/>
-                      <a:headEnd type="none" w="med" len="med"/>
-                      <a:tailEnd type="none" w="med" len="med"/>
-                    </a:lnR>
-                    <a:lnT w="6350" cap="flat" cmpd="sng" algn="ctr">
-                      <a:solidFill>
-                        <a:srgbClr val="D9DEE3"/>
-                      </a:solidFill>
-                      <a:prstDash val="solid"/>
-                      <a:round/>
-                      <a:headEnd type="none" w="med" len="med"/>
-                      <a:tailEnd type="none" w="med" len="med"/>
-                    </a:lnT>
-                    <a:lnB w="6350" cap="flat" cmpd="sng" algn="ctr">
-                      <a:solidFill>
-                        <a:srgbClr val="D9DEE3"/>
-                      </a:solidFill>
-                      <a:prstDash val="solid"/>
-                      <a:round/>
-                      <a:headEnd type="none" w="med" len="med"/>
-                      <a:tailEnd type="none" w="med" len="med"/>
-                    </a:lnB>
-                    <a:solidFill>
-                      <a:srgbClr val="F3F5F8"/>
-                    </a:solidFill>
-                  </a:tcPr>
-                </a:tc>
-                <a:tc>
-                  <a:txBody>
-                    <a:bodyPr/>
-                    <a:lstStyle/>
-                    <a:p>
-                      <a:pPr indent="0" marL="0">
-                        <a:buNone/>
-                      </a:pPr>
-                      <a:r>
-                        <a:rPr lang="en-US" sz="1050" dirty="0">
-                          <a:solidFill>
-                            <a:srgbClr val="1F2933"/>
-                          </a:solidFill>
-                          <a:latin typeface="Calibri" pitchFamily="34" charset="0"/>
-                          <a:ea typeface="Calibri" pitchFamily="34" charset="-122"/>
-                          <a:cs typeface="Calibri" pitchFamily="34" charset="-120"/>
-                        </a:rPr>
-                        <a:t>Skip the logo step in Lab 2.3. Two seed colours alone prove the white-label point. Come back to assets if time allows.</a:t>
-                      </a:r>
-                      <a:endParaRPr lang="en-US" sz="1050" dirty="0">
-                        <a:latin typeface="Calibri" charset="0"/>
-                        <a:ea typeface="Calibri" charset="0"/>
-                        <a:cs typeface="Calibri" charset="0"/>
-                      </a:endParaRPr>
-                    </a:p>
-                  </a:txBody>
-                  <a:tcPr marL="54864" marR="54864" marT="54864" marB="54864" anchor="ctr">
-                    <a:lnL w="6350" cap="flat" cmpd="sng" algn="ctr">
-                      <a:solidFill>
-                        <a:srgbClr val="D9DEE3"/>
-                      </a:solidFill>
-                      <a:prstDash val="solid"/>
-                      <a:round/>
-                      <a:headEnd type="none" w="med" len="med"/>
-                      <a:tailEnd type="none" w="med" len="med"/>
-                    </a:lnL>
-                    <a:lnR w="6350" cap="flat" cmpd="sng" algn="ctr">
-                      <a:solidFill>
-                        <a:srgbClr val="D9DEE3"/>
-                      </a:solidFill>
-                      <a:prstDash val="solid"/>
-                      <a:round/>
-                      <a:headEnd type="none" w="med" len="med"/>
-                      <a:tailEnd type="none" w="med" len="med"/>
-                    </a:lnR>
-                    <a:lnT w="6350" cap="flat" cmpd="sng" algn="ctr">
-                      <a:solidFill>
-                        <a:srgbClr val="D9DEE3"/>
-                      </a:solidFill>
-                      <a:prstDash val="solid"/>
-                      <a:round/>
-                      <a:headEnd type="none" w="med" len="med"/>
-                      <a:tailEnd type="none" w="med" len="med"/>
-                    </a:lnT>
-                    <a:lnB w="6350" cap="flat" cmpd="sng" algn="ctr">
-                      <a:solidFill>
-                        <a:srgbClr val="D9DEE3"/>
-                      </a:solidFill>
-                      <a:prstDash val="solid"/>
-                      <a:round/>
-                      <a:headEnd type="none" w="med" len="med"/>
-                      <a:tailEnd type="none" w="med" len="med"/>
-                    </a:lnB>
-                    <a:solidFill>
-                      <a:srgbClr val="F3F5F8"/>
-                    </a:solidFill>
-                  </a:tcPr>
-                </a:tc>
-              </a:tr>
-              <a:tr h="0">
-                <a:tc>
-                  <a:txBody>
-                    <a:bodyPr/>
-                    <a:lstStyle/>
-                    <a:p>
-                      <a:pPr indent="0" marL="0">
-                        <a:buNone/>
-                      </a:pPr>
-                      <a:r>
-                        <a:rPr lang="en-US" sz="1050" b="1" dirty="0">
-                          <a:solidFill>
-                            <a:srgbClr val="1F2933"/>
-                          </a:solidFill>
-                          <a:latin typeface="Calibri" pitchFamily="34" charset="0"/>
-                          <a:ea typeface="Calibri" pitchFamily="34" charset="-122"/>
-                          <a:cs typeface="Calibri" pitchFamily="34" charset="-120"/>
-                        </a:rPr>
-                        <a:t>Your live layout demo goes wrong</a:t>
-                      </a:r>
-                      <a:endParaRPr lang="en-US" sz="1050" dirty="0">
-                        <a:latin typeface="Calibri" charset="0"/>
-                        <a:ea typeface="Calibri" charset="0"/>
-                        <a:cs typeface="Calibri" charset="0"/>
-                      </a:endParaRPr>
-                    </a:p>
-                  </a:txBody>
-                  <a:tcPr marL="54864" marR="54864" marT="54864" marB="54864" anchor="ctr">
-                    <a:lnL w="6350" cap="flat" cmpd="sng" algn="ctr">
-                      <a:solidFill>
-                        <a:srgbClr val="D9DEE3"/>
-                      </a:solidFill>
-                      <a:prstDash val="solid"/>
-                      <a:round/>
-                      <a:headEnd type="none" w="med" len="med"/>
-                      <a:tailEnd type="none" w="med" len="med"/>
-                    </a:lnL>
-                    <a:lnR w="6350" cap="flat" cmpd="sng" algn="ctr">
-                      <a:solidFill>
-                        <a:srgbClr val="D9DEE3"/>
-                      </a:solidFill>
-                      <a:prstDash val="solid"/>
-                      <a:round/>
-                      <a:headEnd type="none" w="med" len="med"/>
-                      <a:tailEnd type="none" w="med" len="med"/>
-                    </a:lnR>
-                    <a:lnT w="6350" cap="flat" cmpd="sng" algn="ctr">
-                      <a:solidFill>
-                        <a:srgbClr val="D9DEE3"/>
-                      </a:solidFill>
-                      <a:prstDash val="solid"/>
-                      <a:round/>
-                      <a:headEnd type="none" w="med" len="med"/>
-                      <a:tailEnd type="none" w="med" len="med"/>
-                    </a:lnT>
-                    <a:lnB w="6350" cap="flat" cmpd="sng" algn="ctr">
-                      <a:solidFill>
-                        <a:srgbClr val="D9DEE3"/>
-                      </a:solidFill>
-                      <a:prstDash val="solid"/>
-                      <a:round/>
-                      <a:headEnd type="none" w="med" len="med"/>
-                      <a:tailEnd type="none" w="med" len="med"/>
-                    </a:lnB>
-                    <a:solidFill>
-                      <a:srgbClr val="FFFFFF"/>
-                    </a:solidFill>
-                  </a:tcPr>
-                </a:tc>
-                <a:tc>
-                  <a:txBody>
-                    <a:bodyPr/>
-                    <a:lstStyle/>
-                    <a:p>
-                      <a:pPr indent="0" marL="0">
-                        <a:buNone/>
-                      </a:pPr>
-                      <a:r>
-                        <a:rPr lang="en-US" sz="1050" dirty="0">
-                          <a:solidFill>
-                            <a:srgbClr val="1F2933"/>
-                          </a:solidFill>
-                          <a:latin typeface="Calibri" pitchFamily="34" charset="0"/>
-                          <a:ea typeface="Calibri" pitchFamily="34" charset="-122"/>
-                          <a:cs typeface="Calibri" pitchFamily="34" charset="-120"/>
-                        </a:rPr>
-                        <a:t>You have the four broken-layout files pre-made on the USB stick - switch file instead of typing. The screenshots of each error are in your notes.</a:t>
-                      </a:r>
-                      <a:endParaRPr lang="en-US" sz="1050" dirty="0">
-                        <a:latin typeface="Calibri" charset="0"/>
-                        <a:ea typeface="Calibri" charset="0"/>
-                        <a:cs typeface="Calibri" charset="0"/>
-                      </a:endParaRPr>
-                    </a:p>
-                  </a:txBody>
-                  <a:tcPr marL="54864" marR="54864" marT="54864" marB="54864" anchor="ctr">
-                    <a:lnL w="6350" cap="flat" cmpd="sng" algn="ctr">
-                      <a:solidFill>
-                        <a:srgbClr val="D9DEE3"/>
-                      </a:solidFill>
-                      <a:prstDash val="solid"/>
-                      <a:round/>
-                      <a:headEnd type="none" w="med" len="med"/>
-                      <a:tailEnd type="none" w="med" len="med"/>
-                    </a:lnL>
-                    <a:lnR w="6350" cap="flat" cmpd="sng" algn="ctr">
-                      <a:solidFill>
-                        <a:srgbClr val="D9DEE3"/>
-                      </a:solidFill>
-                      <a:prstDash val="solid"/>
-                      <a:round/>
-                      <a:headEnd type="none" w="med" len="med"/>
-                      <a:tailEnd type="none" w="med" len="med"/>
-                    </a:lnR>
-                    <a:lnT w="6350" cap="flat" cmpd="sng" algn="ctr">
-                      <a:solidFill>
-                        <a:srgbClr val="D9DEE3"/>
-                      </a:solidFill>
-                      <a:prstDash val="solid"/>
-                      <a:round/>
-                      <a:headEnd type="none" w="med" len="med"/>
-                      <a:tailEnd type="none" w="med" len="med"/>
-                    </a:lnT>
-                    <a:lnB w="6350" cap="flat" cmpd="sng" algn="ctr">
-                      <a:solidFill>
-                        <a:srgbClr val="D9DEE3"/>
-                      </a:solidFill>
-                      <a:prstDash val="solid"/>
-                      <a:round/>
-                      <a:headEnd type="none" w="med" len="med"/>
-                      <a:tailEnd type="none" w="med" len="med"/>
-                    </a:lnB>
-                    <a:solidFill>
-                      <a:srgbClr val="FFFFFF"/>
-                    </a:solidFill>
-                  </a:tcPr>
-                </a:tc>
-              </a:tr>
-              <a:tr h="0">
-                <a:tc>
-                  <a:txBody>
-                    <a:bodyPr/>
-                    <a:lstStyle/>
-                    <a:p>
-                      <a:pPr indent="0" marL="0">
-                        <a:buNone/>
-                      </a:pPr>
-                      <a:r>
-                        <a:rPr lang="en-US" sz="1050" b="1" dirty="0">
-                          <a:solidFill>
-                            <a:srgbClr val="1F2933"/>
-                          </a:solidFill>
-                          <a:latin typeface="Calibri" pitchFamily="34" charset="0"/>
-                          <a:ea typeface="Calibri" pitchFamily="34" charset="-122"/>
-                          <a:cs typeface="Calibri" pitchFamily="34" charset="-120"/>
-                        </a:rPr>
-                        <a:t>A layout question you cannot answer</a:t>
-                      </a:r>
-                      <a:endParaRPr lang="en-US" sz="1050" dirty="0">
-                        <a:latin typeface="Calibri" charset="0"/>
-                        <a:ea typeface="Calibri" charset="0"/>
-                        <a:cs typeface="Calibri" charset="0"/>
-                      </a:endParaRPr>
-                    </a:p>
-                  </a:txBody>
-                  <a:tcPr marL="54864" marR="54864" marT="54864" marB="54864" anchor="ctr">
-                    <a:lnL w="6350" cap="flat" cmpd="sng" algn="ctr">
-                      <a:solidFill>
-                        <a:srgbClr val="D9DEE3"/>
-                      </a:solidFill>
-                      <a:prstDash val="solid"/>
-                      <a:round/>
-                      <a:headEnd type="none" w="med" len="med"/>
-                      <a:tailEnd type="none" w="med" len="med"/>
-                    </a:lnL>
-                    <a:lnR w="6350" cap="flat" cmpd="sng" algn="ctr">
-                      <a:solidFill>
-                        <a:srgbClr val="D9DEE3"/>
-                      </a:solidFill>
-                      <a:prstDash val="solid"/>
-                      <a:round/>
-                      <a:headEnd type="none" w="med" len="med"/>
-                      <a:tailEnd type="none" w="med" len="med"/>
-                    </a:lnR>
-                    <a:lnT w="6350" cap="flat" cmpd="sng" algn="ctr">
-                      <a:solidFill>
-                        <a:srgbClr val="D9DEE3"/>
-                      </a:solidFill>
-                      <a:prstDash val="solid"/>
-                      <a:round/>
-                      <a:headEnd type="none" w="med" len="med"/>
-                      <a:tailEnd type="none" w="med" len="med"/>
-                    </a:lnT>
-                    <a:lnB w="6350" cap="flat" cmpd="sng" algn="ctr">
-                      <a:solidFill>
-                        <a:srgbClr val="D9DEE3"/>
-                      </a:solidFill>
-                      <a:prstDash val="solid"/>
-                      <a:round/>
-                      <a:headEnd type="none" w="med" len="med"/>
-                      <a:tailEnd type="none" w="med" len="med"/>
-                    </a:lnB>
-                    <a:solidFill>
-                      <a:srgbClr val="F3F5F8"/>
-                    </a:solidFill>
-                  </a:tcPr>
-                </a:tc>
-                <a:tc>
-                  <a:txBody>
-                    <a:bodyPr/>
-                    <a:lstStyle/>
-                    <a:p>
-                      <a:pPr indent="0" marL="0">
-                        <a:buNone/>
-                      </a:pPr>
-                      <a:r>
-                        <a:rPr lang="en-US" sz="1050" dirty="0">
-                          <a:solidFill>
-                            <a:srgbClr val="1F2933"/>
-                          </a:solidFill>
-                          <a:latin typeface="Calibri" pitchFamily="34" charset="0"/>
-                          <a:ea typeface="Calibri" pitchFamily="34" charset="-122"/>
-                          <a:cs typeface="Calibri" pitchFamily="34" charset="-120"/>
-                        </a:rPr>
-                        <a:t>Open docs.flutter.dev/ui/layout/constraints on the projector and find it together. That doc answers almost every layout question in the course.</a:t>
-                      </a:r>
-                      <a:endParaRPr lang="en-US" sz="1050" dirty="0">
-                        <a:latin typeface="Calibri" charset="0"/>
-                        <a:ea typeface="Calibri" charset="0"/>
-                        <a:cs typeface="Calibri" charset="0"/>
-                      </a:endParaRPr>
-                    </a:p>
-                  </a:txBody>
-                  <a:tcPr marL="54864" marR="54864" marT="54864" marB="54864" anchor="ctr">
-                    <a:lnL w="6350" cap="flat" cmpd="sng" algn="ctr">
-                      <a:solidFill>
-                        <a:srgbClr val="D9DEE3"/>
-                      </a:solidFill>
-                      <a:prstDash val="solid"/>
-                      <a:round/>
-                      <a:headEnd type="none" w="med" len="med"/>
-                      <a:tailEnd type="none" w="med" len="med"/>
-                    </a:lnL>
-                    <a:lnR w="6350" cap="flat" cmpd="sng" algn="ctr">
-                      <a:solidFill>
-                        <a:srgbClr val="D9DEE3"/>
-                      </a:solidFill>
-                      <a:prstDash val="solid"/>
-                      <a:round/>
-                      <a:headEnd type="none" w="med" len="med"/>
-                      <a:tailEnd type="none" w="med" len="med"/>
-                    </a:lnR>
-                    <a:lnT w="6350" cap="flat" cmpd="sng" algn="ctr">
-                      <a:solidFill>
-                        <a:srgbClr val="D9DEE3"/>
-                      </a:solidFill>
-                      <a:prstDash val="solid"/>
-                      <a:round/>
-                      <a:headEnd type="none" w="med" len="med"/>
-                      <a:tailEnd type="none" w="med" len="med"/>
-                    </a:lnT>
-                    <a:lnB w="6350" cap="flat" cmpd="sng" algn="ctr">
-                      <a:solidFill>
-                        <a:srgbClr val="D9DEE3"/>
-                      </a:solidFill>
-                      <a:prstDash val="solid"/>
-                      <a:round/>
-                      <a:headEnd type="none" w="med" len="med"/>
-                      <a:tailEnd type="none" w="med" len="med"/>
-                    </a:lnB>
-                    <a:solidFill>
-                      <a:srgbClr val="F3F5F8"/>
-                    </a:solidFill>
-                  </a:tcPr>
-                </a:tc>
-              </a:tr>
-              <a:tr h="0">
-                <a:tc>
-                  <a:txBody>
-                    <a:bodyPr/>
-                    <a:lstStyle/>
-                    <a:p>
-                      <a:pPr indent="0" marL="0">
-                        <a:buNone/>
-                      </a:pPr>
-                      <a:r>
-                        <a:rPr lang="en-US" sz="1050" b="1" dirty="0">
-                          <a:solidFill>
-                            <a:srgbClr val="1F2933"/>
-                          </a:solidFill>
-                          <a:latin typeface="Calibri" pitchFamily="34" charset="0"/>
-                          <a:ea typeface="Calibri" pitchFamily="34" charset="-122"/>
-                          <a:cs typeface="Calibri" pitchFamily="34" charset="-120"/>
-                        </a:rPr>
-                        <a:t>Running badly over time</a:t>
-                      </a:r>
-                      <a:endParaRPr lang="en-US" sz="1050" dirty="0">
-                        <a:latin typeface="Calibri" charset="0"/>
-                        <a:ea typeface="Calibri" charset="0"/>
-                        <a:cs typeface="Calibri" charset="0"/>
-                      </a:endParaRPr>
-                    </a:p>
-                  </a:txBody>
-                  <a:tcPr marL="54864" marR="54864" marT="54864" marB="54864" anchor="ctr">
-                    <a:lnL w="6350" cap="flat" cmpd="sng" algn="ctr">
-                      <a:solidFill>
-                        <a:srgbClr val="D9DEE3"/>
-                      </a:solidFill>
-                      <a:prstDash val="solid"/>
-                      <a:round/>
-                      <a:headEnd type="none" w="med" len="med"/>
-                      <a:tailEnd type="none" w="med" len="med"/>
-                    </a:lnL>
-                    <a:lnR w="6350" cap="flat" cmpd="sng" algn="ctr">
-                      <a:solidFill>
-                        <a:srgbClr val="D9DEE3"/>
-                      </a:solidFill>
-                      <a:prstDash val="solid"/>
-                      <a:round/>
-                      <a:headEnd type="none" w="med" len="med"/>
-                      <a:tailEnd type="none" w="med" len="med"/>
-                    </a:lnR>
-                    <a:lnT w="6350" cap="flat" cmpd="sng" algn="ctr">
-                      <a:solidFill>
-                        <a:srgbClr val="D9DEE3"/>
-                      </a:solidFill>
-                      <a:prstDash val="solid"/>
-                      <a:round/>
-                      <a:headEnd type="none" w="med" len="med"/>
-                      <a:tailEnd type="none" w="med" len="med"/>
-                    </a:lnT>
-                    <a:lnB w="6350" cap="flat" cmpd="sng" algn="ctr">
-                      <a:solidFill>
-                        <a:srgbClr val="D9DEE3"/>
-                      </a:solidFill>
-                      <a:prstDash val="solid"/>
-                      <a:round/>
-                      <a:headEnd type="none" w="med" len="med"/>
-                      <a:tailEnd type="none" w="med" len="med"/>
-                    </a:lnB>
-                    <a:solidFill>
-                      <a:srgbClr val="FFFFFF"/>
-                    </a:solidFill>
-                  </a:tcPr>
-                </a:tc>
-                <a:tc>
-                  <a:txBody>
-                    <a:bodyPr/>
-                    <a:lstStyle/>
-                    <a:p>
-                      <a:pPr indent="0" marL="0">
-                        <a:buNone/>
-                      </a:pPr>
-                      <a:r>
-                        <a:rPr lang="en-US" sz="1050" dirty="0">
-                          <a:solidFill>
-                            <a:srgbClr val="1F2933"/>
-                          </a:solidFill>
-                          <a:latin typeface="Calibri" pitchFamily="34" charset="0"/>
-                          <a:ea typeface="Calibri" pitchFamily="34" charset="-122"/>
-                          <a:cs typeface="Calibri" pitchFamily="34" charset="-120"/>
-                        </a:rPr>
-                        <a:t>Cut the buttons table (reference) and the GridView slide. Never cut Lab 2.2 - the capture form is the spine of Days 3, 4 and 5.</a:t>
-                      </a:r>
-                      <a:endParaRPr lang="en-US" sz="1050" dirty="0">
-                        <a:latin typeface="Calibri" charset="0"/>
-                        <a:ea typeface="Calibri" charset="0"/>
-                        <a:cs typeface="Calibri" charset="0"/>
-                      </a:endParaRPr>
-                    </a:p>
-                  </a:txBody>
-                  <a:tcPr marL="54864" marR="54864" marT="54864" marB="54864" anchor="ctr">
-                    <a:lnL w="6350" cap="flat" cmpd="sng" algn="ctr">
-                      <a:solidFill>
-                        <a:srgbClr val="D9DEE3"/>
-                      </a:solidFill>
-                      <a:prstDash val="solid"/>
-                      <a:round/>
-                      <a:headEnd type="none" w="med" len="med"/>
-                      <a:tailEnd type="none" w="med" len="med"/>
-                    </a:lnL>
-                    <a:lnR w="6350" cap="flat" cmpd="sng" algn="ctr">
-                      <a:solidFill>
-                        <a:srgbClr val="D9DEE3"/>
-                      </a:solidFill>
-                      <a:prstDash val="solid"/>
-                      <a:round/>
-                      <a:headEnd type="none" w="med" len="med"/>
-                      <a:tailEnd type="none" w="med" len="med"/>
-                    </a:lnR>
-                    <a:lnT w="6350" cap="flat" cmpd="sng" algn="ctr">
-                      <a:solidFill>
-                        <a:srgbClr val="D9DEE3"/>
-                      </a:solidFill>
-                      <a:prstDash val="solid"/>
-                      <a:round/>
-                      <a:headEnd type="none" w="med" len="med"/>
-                      <a:tailEnd type="none" w="med" len="med"/>
-                    </a:lnT>
-                    <a:lnB w="6350" cap="flat" cmpd="sng" algn="ctr">
-                      <a:solidFill>
-                        <a:srgbClr val="D9DEE3"/>
-                      </a:solidFill>
-                      <a:prstDash val="solid"/>
-                      <a:round/>
-                      <a:headEnd type="none" w="med" len="med"/>
-                      <a:tailEnd type="none" w="med" len="med"/>
-                    </a:lnB>
-                    <a:solidFill>
-                      <a:srgbClr val="FFFFFF"/>
-                    </a:solidFill>
-                  </a:tcPr>
-                </a:tc>
-              </a:tr>
-            </a:tbl>
-          </a:graphicData>
-        </a:graphic>
-      </p:graphicFrame>
-      <p:sp>
-        <p:nvSpPr>
-          <p:cNvPr id="4" name="Text 1"/>
-          <p:cNvSpPr txBox="1"/>
-          <p:nvPr/>
-        </p:nvSpPr>
-        <p:spPr>
-          <a:xfrm>
-            <a:off x="548640" y="6473952"/>
-            <a:ext cx="9994392" cy="274320"/>
-          </a:xfrm>
-          <a:prstGeom prst="rect">
-            <a:avLst/>
-          </a:prstGeom>
-          <a:noFill/>
-          <a:ln/>
-        </p:spPr>
-        <p:txBody>
-          <a:bodyPr wrap="square" lIns="0" tIns="0" rIns="0" bIns="0" rtlCol="0" anchor="ctr"/>
-          <a:lstStyle/>
-          <a:p>
-            <a:pPr indent="0" marL="0">
-              <a:buNone/>
-            </a:pPr>
-            <a:r>
-              <a:rPr lang="en-US" sz="900" dirty="0">
-                <a:solidFill>
-                  <a:srgbClr val="5B6773"/>
-                </a:solidFill>
-                <a:latin typeface="Calibri" pitchFamily="34" charset="0"/>
-                <a:ea typeface="Calibri" pitchFamily="34" charset="-122"/>
-                <a:cs typeface="Calibri" pitchFamily="34" charset="-120"/>
-              </a:rPr>
-              <a:t>MO Integrations · Flutter Training · Day 2 - Widgets &amp; Layout</a:t>
-            </a:r>
-            <a:endParaRPr lang="en-US" sz="900" dirty="0"/>
-          </a:p>
-        </p:txBody>
-      </p:sp>
-      <p:sp>
-        <p:nvSpPr>
-          <p:cNvPr id="5" name="Text 2"/>
-          <p:cNvSpPr txBox="1"/>
-          <p:nvPr/>
-        </p:nvSpPr>
-        <p:spPr>
-          <a:xfrm>
-            <a:off x="10543032" y="6473952"/>
-            <a:ext cx="1097280" cy="274320"/>
-          </a:xfrm>
-          <a:prstGeom prst="rect">
-            <a:avLst/>
-          </a:prstGeom>
-          <a:noFill/>
-          <a:ln/>
-        </p:spPr>
-        <p:txBody>
-          <a:bodyPr wrap="square" lIns="0" tIns="0" rIns="0" bIns="0" rtlCol="0" anchor="ctr"/>
-          <a:lstStyle/>
-          <a:p>
-            <a:pPr algn="r" indent="0" marL="0">
-              <a:buNone/>
-            </a:pPr>
-            <a:r>
-              <a:rPr lang="en-US" sz="900" dirty="0">
-                <a:solidFill>
-                  <a:srgbClr val="5B6773"/>
-                </a:solidFill>
-                <a:latin typeface="Calibri" pitchFamily="34" charset="0"/>
-                <a:ea typeface="Calibri" pitchFamily="34" charset="-122"/>
-                <a:cs typeface="Calibri" pitchFamily="34" charset="-120"/>
-              </a:rPr>
-              <a:t>35</a:t>
             </a:r>
             <a:endParaRPr lang="en-US" sz="900" dirty="0"/>
           </a:p>
